--- a/exports/pptx/lessons/middle-module-02-panchabhuta/day-01-hook.pptx
+++ b/exports/pptx/lessons/middle-module-02-panchabhuta/day-01-hook.pptx
@@ -18,9 +18,13 @@
     <p:sldId id="266" r:id="rId12"/>
     <p:sldId id="267" r:id="rId13"/>
     <p:sldId id="268" r:id="rId14"/>
+    <p:sldId id="269" r:id="rId15"/>
+    <p:sldId id="270" r:id="rId16"/>
+    <p:sldId id="271" r:id="rId17"/>
+    <p:sldId id="272" r:id="rId18"/>
   </p:sldIdLst>
   <p:notesMasterIdLst>
-    <p:notesMasterId r:id="rId15"/>
+    <p:notesMasterId r:id="rId19"/>
   </p:notesMasterIdLst>
   <p:sldSz cx="9144000" cy="5143500"/>
   <p:notesSz cx="5143500" cy="9144000"/>
@@ -890,6 +894,358 @@
             <a:fld id="{F7021451-1387-4CA6-816F-3879F97B5CBC}" type="slidenum">
               <a:rPr lang="en-US"/>
               <a:t>13</a:t>
+            </a:fld>
+            <a:endParaRPr lang="en-US"/>
+          </a:p>
+        </p:txBody>
+      </p:sp>
+    </p:spTree>
+    <p:extLst>
+      <p:ext uri="{BB962C8B-B14F-4D97-AF65-F5344CB8AC3E}">
+        <p14:creationId xmlns:p14="http://schemas.microsoft.com/office/powerpoint/2010/main" val="1024086991"/>
+      </p:ext>
+    </p:extLst>
+  </p:cSld>
+  <p:clrMapOvr>
+    <a:masterClrMapping/>
+  </p:clrMapOvr>
+</p:notes>
+</file>
+
+<file path=ppt/notesSlides/notesSlide14.xml><?xml version="1.0" encoding="utf-8"?>
+<p:notes xmlns:a="http://schemas.openxmlformats.org/drawingml/2006/main" xmlns:r="http://schemas.openxmlformats.org/officeDocument/2006/relationships" xmlns:p="http://schemas.openxmlformats.org/presentationml/2006/main">
+  <p:cSld>
+    <p:spTree>
+      <p:nvGrpSpPr>
+        <p:cNvPr id="1" name=""/>
+        <p:cNvGrpSpPr/>
+        <p:nvPr/>
+      </p:nvGrpSpPr>
+      <p:grpSpPr>
+        <a:xfrm>
+          <a:off x="0" y="0"/>
+          <a:ext cx="0" cy="0"/>
+          <a:chOff x="0" y="0"/>
+          <a:chExt cx="0" cy="0"/>
+        </a:xfrm>
+      </p:grpSpPr>
+      <p:sp>
+        <p:nvSpPr>
+          <p:cNvPr id="2" name="Slide Image Placeholder 1"/>
+          <p:cNvSpPr>
+            <a:spLocks noGrp="1" noRot="1" noChangeAspect="1"/>
+          </p:cNvSpPr>
+          <p:nvPr>
+            <p:ph type="sldImg"/>
+          </p:nvPr>
+        </p:nvSpPr>
+        <p:spPr/>
+      </p:sp>
+      <p:sp>
+        <p:nvSpPr>
+          <p:cNvPr id="3" name="Notes Placeholder 2"/>
+          <p:cNvSpPr>
+            <a:spLocks noGrp="1"/>
+          </p:cNvSpPr>
+          <p:nvPr>
+            <p:ph type="body" idx="1"/>
+          </p:nvPr>
+        </p:nvSpPr>
+        <p:spPr/>
+        <p:txBody>
+          <a:bodyPr/>
+          <a:lstStyle/>
+          <a:p>
+            <a:r>
+              <a:rPr lang="en-US" dirty="0"/>
+              <a:t/>
+            </a:r>
+            <a:endParaRPr lang="en-US" dirty="0"/>
+          </a:p>
+        </p:txBody>
+      </p:sp>
+      <p:sp>
+        <p:nvSpPr>
+          <p:cNvPr id="4" name="Slide Number Placeholder 3"/>
+          <p:cNvSpPr>
+            <a:spLocks noGrp="1"/>
+          </p:cNvSpPr>
+          <p:nvPr>
+            <p:ph type="sldNum" sz="quarter" idx="10"/>
+          </p:nvPr>
+        </p:nvSpPr>
+        <p:spPr/>
+        <p:txBody>
+          <a:bodyPr/>
+          <a:lstStyle/>
+          <a:p>
+            <a:fld id="{F7021451-1387-4CA6-816F-3879F97B5CBC}" type="slidenum">
+              <a:rPr lang="en-US"/>
+              <a:t>14</a:t>
+            </a:fld>
+            <a:endParaRPr lang="en-US"/>
+          </a:p>
+        </p:txBody>
+      </p:sp>
+    </p:spTree>
+    <p:extLst>
+      <p:ext uri="{BB962C8B-B14F-4D97-AF65-F5344CB8AC3E}">
+        <p14:creationId xmlns:p14="http://schemas.microsoft.com/office/powerpoint/2010/main" val="1024086991"/>
+      </p:ext>
+    </p:extLst>
+  </p:cSld>
+  <p:clrMapOvr>
+    <a:masterClrMapping/>
+  </p:clrMapOvr>
+</p:notes>
+</file>
+
+<file path=ppt/notesSlides/notesSlide15.xml><?xml version="1.0" encoding="utf-8"?>
+<p:notes xmlns:a="http://schemas.openxmlformats.org/drawingml/2006/main" xmlns:r="http://schemas.openxmlformats.org/officeDocument/2006/relationships" xmlns:p="http://schemas.openxmlformats.org/presentationml/2006/main">
+  <p:cSld>
+    <p:spTree>
+      <p:nvGrpSpPr>
+        <p:cNvPr id="1" name=""/>
+        <p:cNvGrpSpPr/>
+        <p:nvPr/>
+      </p:nvGrpSpPr>
+      <p:grpSpPr>
+        <a:xfrm>
+          <a:off x="0" y="0"/>
+          <a:ext cx="0" cy="0"/>
+          <a:chOff x="0" y="0"/>
+          <a:chExt cx="0" cy="0"/>
+        </a:xfrm>
+      </p:grpSpPr>
+      <p:sp>
+        <p:nvSpPr>
+          <p:cNvPr id="2" name="Slide Image Placeholder 1"/>
+          <p:cNvSpPr>
+            <a:spLocks noGrp="1" noRot="1" noChangeAspect="1"/>
+          </p:cNvSpPr>
+          <p:nvPr>
+            <p:ph type="sldImg"/>
+          </p:nvPr>
+        </p:nvSpPr>
+        <p:spPr/>
+      </p:sp>
+      <p:sp>
+        <p:nvSpPr>
+          <p:cNvPr id="3" name="Notes Placeholder 2"/>
+          <p:cNvSpPr>
+            <a:spLocks noGrp="1"/>
+          </p:cNvSpPr>
+          <p:nvPr>
+            <p:ph type="body" idx="1"/>
+          </p:nvPr>
+        </p:nvSpPr>
+        <p:spPr/>
+        <p:txBody>
+          <a:bodyPr/>
+          <a:lstStyle/>
+          <a:p>
+            <a:r>
+              <a:rPr lang="en-US" dirty="0"/>
+              <a:t/>
+            </a:r>
+            <a:endParaRPr lang="en-US" dirty="0"/>
+          </a:p>
+        </p:txBody>
+      </p:sp>
+      <p:sp>
+        <p:nvSpPr>
+          <p:cNvPr id="4" name="Slide Number Placeholder 3"/>
+          <p:cNvSpPr>
+            <a:spLocks noGrp="1"/>
+          </p:cNvSpPr>
+          <p:nvPr>
+            <p:ph type="sldNum" sz="quarter" idx="10"/>
+          </p:nvPr>
+        </p:nvSpPr>
+        <p:spPr/>
+        <p:txBody>
+          <a:bodyPr/>
+          <a:lstStyle/>
+          <a:p>
+            <a:fld id="{F7021451-1387-4CA6-816F-3879F97B5CBC}" type="slidenum">
+              <a:rPr lang="en-US"/>
+              <a:t>15</a:t>
+            </a:fld>
+            <a:endParaRPr lang="en-US"/>
+          </a:p>
+        </p:txBody>
+      </p:sp>
+    </p:spTree>
+    <p:extLst>
+      <p:ext uri="{BB962C8B-B14F-4D97-AF65-F5344CB8AC3E}">
+        <p14:creationId xmlns:p14="http://schemas.microsoft.com/office/powerpoint/2010/main" val="1024086991"/>
+      </p:ext>
+    </p:extLst>
+  </p:cSld>
+  <p:clrMapOvr>
+    <a:masterClrMapping/>
+  </p:clrMapOvr>
+</p:notes>
+</file>
+
+<file path=ppt/notesSlides/notesSlide16.xml><?xml version="1.0" encoding="utf-8"?>
+<p:notes xmlns:a="http://schemas.openxmlformats.org/drawingml/2006/main" xmlns:r="http://schemas.openxmlformats.org/officeDocument/2006/relationships" xmlns:p="http://schemas.openxmlformats.org/presentationml/2006/main">
+  <p:cSld>
+    <p:spTree>
+      <p:nvGrpSpPr>
+        <p:cNvPr id="1" name=""/>
+        <p:cNvGrpSpPr/>
+        <p:nvPr/>
+      </p:nvGrpSpPr>
+      <p:grpSpPr>
+        <a:xfrm>
+          <a:off x="0" y="0"/>
+          <a:ext cx="0" cy="0"/>
+          <a:chOff x="0" y="0"/>
+          <a:chExt cx="0" cy="0"/>
+        </a:xfrm>
+      </p:grpSpPr>
+      <p:sp>
+        <p:nvSpPr>
+          <p:cNvPr id="2" name="Slide Image Placeholder 1"/>
+          <p:cNvSpPr>
+            <a:spLocks noGrp="1" noRot="1" noChangeAspect="1"/>
+          </p:cNvSpPr>
+          <p:nvPr>
+            <p:ph type="sldImg"/>
+          </p:nvPr>
+        </p:nvSpPr>
+        <p:spPr/>
+      </p:sp>
+      <p:sp>
+        <p:nvSpPr>
+          <p:cNvPr id="3" name="Notes Placeholder 2"/>
+          <p:cNvSpPr>
+            <a:spLocks noGrp="1"/>
+          </p:cNvSpPr>
+          <p:nvPr>
+            <p:ph type="body" idx="1"/>
+          </p:nvPr>
+        </p:nvSpPr>
+        <p:spPr/>
+        <p:txBody>
+          <a:bodyPr/>
+          <a:lstStyle/>
+          <a:p>
+            <a:r>
+              <a:rPr lang="en-US" dirty="0"/>
+              <a:t/>
+            </a:r>
+            <a:endParaRPr lang="en-US" dirty="0"/>
+          </a:p>
+        </p:txBody>
+      </p:sp>
+      <p:sp>
+        <p:nvSpPr>
+          <p:cNvPr id="4" name="Slide Number Placeholder 3"/>
+          <p:cNvSpPr>
+            <a:spLocks noGrp="1"/>
+          </p:cNvSpPr>
+          <p:nvPr>
+            <p:ph type="sldNum" sz="quarter" idx="10"/>
+          </p:nvPr>
+        </p:nvSpPr>
+        <p:spPr/>
+        <p:txBody>
+          <a:bodyPr/>
+          <a:lstStyle/>
+          <a:p>
+            <a:fld id="{F7021451-1387-4CA6-816F-3879F97B5CBC}" type="slidenum">
+              <a:rPr lang="en-US"/>
+              <a:t>16</a:t>
+            </a:fld>
+            <a:endParaRPr lang="en-US"/>
+          </a:p>
+        </p:txBody>
+      </p:sp>
+    </p:spTree>
+    <p:extLst>
+      <p:ext uri="{BB962C8B-B14F-4D97-AF65-F5344CB8AC3E}">
+        <p14:creationId xmlns:p14="http://schemas.microsoft.com/office/powerpoint/2010/main" val="1024086991"/>
+      </p:ext>
+    </p:extLst>
+  </p:cSld>
+  <p:clrMapOvr>
+    <a:masterClrMapping/>
+  </p:clrMapOvr>
+</p:notes>
+</file>
+
+<file path=ppt/notesSlides/notesSlide17.xml><?xml version="1.0" encoding="utf-8"?>
+<p:notes xmlns:a="http://schemas.openxmlformats.org/drawingml/2006/main" xmlns:r="http://schemas.openxmlformats.org/officeDocument/2006/relationships" xmlns:p="http://schemas.openxmlformats.org/presentationml/2006/main">
+  <p:cSld>
+    <p:spTree>
+      <p:nvGrpSpPr>
+        <p:cNvPr id="1" name=""/>
+        <p:cNvGrpSpPr/>
+        <p:nvPr/>
+      </p:nvGrpSpPr>
+      <p:grpSpPr>
+        <a:xfrm>
+          <a:off x="0" y="0"/>
+          <a:ext cx="0" cy="0"/>
+          <a:chOff x="0" y="0"/>
+          <a:chExt cx="0" cy="0"/>
+        </a:xfrm>
+      </p:grpSpPr>
+      <p:sp>
+        <p:nvSpPr>
+          <p:cNvPr id="2" name="Slide Image Placeholder 1"/>
+          <p:cNvSpPr>
+            <a:spLocks noGrp="1" noRot="1" noChangeAspect="1"/>
+          </p:cNvSpPr>
+          <p:nvPr>
+            <p:ph type="sldImg"/>
+          </p:nvPr>
+        </p:nvSpPr>
+        <p:spPr/>
+      </p:sp>
+      <p:sp>
+        <p:nvSpPr>
+          <p:cNvPr id="3" name="Notes Placeholder 2"/>
+          <p:cNvSpPr>
+            <a:spLocks noGrp="1"/>
+          </p:cNvSpPr>
+          <p:nvPr>
+            <p:ph type="body" idx="1"/>
+          </p:nvPr>
+        </p:nvSpPr>
+        <p:spPr/>
+        <p:txBody>
+          <a:bodyPr/>
+          <a:lstStyle/>
+          <a:p>
+            <a:r>
+              <a:rPr lang="en-US" dirty="0"/>
+              <a:t/>
+            </a:r>
+            <a:endParaRPr lang="en-US" dirty="0"/>
+          </a:p>
+        </p:txBody>
+      </p:sp>
+      <p:sp>
+        <p:nvSpPr>
+          <p:cNvPr id="4" name="Slide Number Placeholder 3"/>
+          <p:cNvSpPr>
+            <a:spLocks noGrp="1"/>
+          </p:cNvSpPr>
+          <p:nvPr>
+            <p:ph type="sldNum" sz="quarter" idx="10"/>
+          </p:nvPr>
+        </p:nvSpPr>
+        <p:spPr/>
+        <p:txBody>
+          <a:bodyPr/>
+          <a:lstStyle/>
+          <a:p>
+            <a:fld id="{F7021451-1387-4CA6-816F-3879F97B5CBC}" type="slidenum">
+              <a:rPr lang="en-US"/>
+              <a:t>17</a:t>
             </a:fld>
             <a:endParaRPr lang="en-US"/>
           </a:p>
@@ -2189,148 +2545,6 @@
         </p:nvSpPr>
         <p:spPr>
           <a:xfrm>
-            <a:off x="406301" y="1223963"/>
-            <a:ext cx="8498026" cy="274290"/>
-          </a:xfrm>
-          <a:prstGeom prst="rect">
-            <a:avLst/>
-          </a:prstGeom>
-          <a:noFill/>
-          <a:ln/>
-        </p:spPr>
-        <p:txBody>
-          <a:bodyPr wrap="square" lIns="0" tIns="0" rIns="0" bIns="0" rtlCol="0" anchor="t"/>
-          <a:lstStyle/>
-          <a:p>
-            <a:pPr algn="l" indent="0" marL="0">
-              <a:lnSpc>
-                <a:spcPts val="2160"/>
-              </a:lnSpc>
-              <a:spcBef>
-                <a:spcPts val="600"/>
-              </a:spcBef>
-              <a:spcAft>
-                <a:spcPts val="800"/>
-              </a:spcAft>
-              <a:buNone/>
-            </a:pPr>
-            <a:r>
-              <a:rPr lang="en-US" sz="1800" b="1" dirty="0">
-                <a:solidFill>
-                  <a:srgbClr val="FE4447"/>
-                </a:solidFill>
-                <a:latin typeface="Georgia" pitchFamily="34" charset="0"/>
-                <a:ea typeface="Georgia" pitchFamily="34" charset="-122"/>
-                <a:cs typeface="Georgia" pitchFamily="34" charset="-120"/>
-              </a:rPr>
-              <a:t>Learning objective</a:t>
-            </a:r>
-            <a:endParaRPr lang="en-US" sz="1800" dirty="0"/>
-          </a:p>
-        </p:txBody>
-      </p:sp>
-      <p:sp>
-        <p:nvSpPr>
-          <p:cNvPr id="6" name="Text 4"/>
-          <p:cNvSpPr/>
-          <p:nvPr/>
-        </p:nvSpPr>
-        <p:spPr>
-          <a:xfrm>
-            <a:off x="406301" y="1637854"/>
-            <a:ext cx="8498026" cy="426541"/>
-          </a:xfrm>
-          <a:prstGeom prst="rect">
-            <a:avLst/>
-          </a:prstGeom>
-          <a:noFill/>
-          <a:ln/>
-        </p:spPr>
-        <p:txBody>
-          <a:bodyPr wrap="square" lIns="0" tIns="0" rIns="0" bIns="0" rtlCol="0" anchor="t"/>
-          <a:lstStyle/>
-          <a:p>
-            <a:pPr algn="l" indent="0" marL="0">
-              <a:lnSpc>
-                <a:spcPts val="1680"/>
-              </a:lnSpc>
-              <a:spcBef>
-                <a:spcPts val="300"/>
-              </a:spcBef>
-              <a:spcAft>
-                <a:spcPts val="300"/>
-              </a:spcAft>
-              <a:buNone/>
-            </a:pPr>
-            <a:r>
-              <a:rPr lang="en-US" sz="1200" dirty="0">
-                <a:solidFill>
-                  <a:srgbClr val="1C2833"/>
-                </a:solidFill>
-                <a:latin typeface="Arial" pitchFamily="34" charset="0"/>
-                <a:ea typeface="Arial" pitchFamily="34" charset="-122"/>
-                <a:cs typeface="Arial" pitchFamily="34" charset="-120"/>
-              </a:rPr>
-              <a:t>By the end of this lesson, students will name the five great elements (</a:t>
-            </a:r>
-            <a:pPr algn="l" indent="0" marL="0">
-              <a:lnSpc>
-                <a:spcPts val="1680"/>
-              </a:lnSpc>
-              <a:spcBef>
-                <a:spcPts val="300"/>
-              </a:spcBef>
-              <a:spcAft>
-                <a:spcPts val="300"/>
-              </a:spcAft>
-              <a:buNone/>
-            </a:pPr>
-            <a:r>
-              <a:rPr lang="en-US" sz="1200" i="1" dirty="0">
-                <a:solidFill>
-                  <a:srgbClr val="1C2833"/>
-                </a:solidFill>
-                <a:latin typeface="Arial" pitchFamily="34" charset="0"/>
-                <a:ea typeface="Arial" pitchFamily="34" charset="-122"/>
-                <a:cs typeface="Arial" pitchFamily="34" charset="-120"/>
-              </a:rPr>
-              <a:t>pañca-mahābhūta</a:t>
-            </a:r>
-            <a:pPr algn="l" indent="0" marL="0">
-              <a:lnSpc>
-                <a:spcPts val="1680"/>
-              </a:lnSpc>
-              <a:spcBef>
-                <a:spcPts val="300"/>
-              </a:spcBef>
-              <a:spcAft>
-                <a:spcPts val="300"/>
-              </a:spcAft>
-              <a:buNone/>
-            </a:pPr>
-            <a:r>
-              <a:rPr lang="en-US" sz="1200" dirty="0">
-                <a:solidFill>
-                  <a:srgbClr val="1C2833"/>
-                </a:solidFill>
-                <a:latin typeface="Arial" pitchFamily="34" charset="0"/>
-                <a:ea typeface="Arial" pitchFamily="34" charset="-122"/>
-                <a:cs typeface="Arial" pitchFamily="34" charset="-120"/>
-              </a:rPr>
-              <a:t>) in Sanskrit and English and give one example of each from their own classroom.</a:t>
-            </a:r>
-            <a:endParaRPr lang="en-US" sz="1200" dirty="0"/>
-          </a:p>
-        </p:txBody>
-      </p:sp>
-      <p:sp>
-        <p:nvSpPr>
-          <p:cNvPr id="7" name="Text 5"/>
-          <p:cNvSpPr/>
-          <p:nvPr/>
-        </p:nvSpPr>
-        <p:spPr>
-          <a:xfrm>
             <a:off x="406301" y="4434929"/>
             <a:ext cx="8498026" cy="213271"/>
           </a:xfrm>
@@ -2475,7 +2689,7 @@
                 <a:ea typeface="Georgia" pitchFamily="34" charset="-122"/>
                 <a:cs typeface="Georgia" pitchFamily="34" charset="-120"/>
               </a:rPr>
-              <a:t>Homework (if any)</a:t>
+              <a:t>Activity (15 min) — Five Things in This Room</a:t>
             </a:r>
             <a:endParaRPr lang="en-US" sz="1800" dirty="0"/>
           </a:p>
@@ -2489,8 +2703,8 @@
         </p:nvSpPr>
         <p:spPr>
           <a:xfrm>
-            <a:off x="406301" y="870942"/>
-            <a:ext cx="8498026" cy="426541"/>
+            <a:off x="634901" y="883593"/>
+            <a:ext cx="8102798" cy="1706463"/>
           </a:xfrm>
           <a:prstGeom prst="rect">
             <a:avLst/>
@@ -2502,17 +2716,15 @@
           <a:bodyPr wrap="square" lIns="0" tIns="0" rIns="0" bIns="0" rtlCol="0" anchor="t"/>
           <a:lstStyle/>
           <a:p>
-            <a:pPr algn="l" indent="0" marL="0">
-              <a:lnSpc>
-                <a:spcPts val="1680"/>
-              </a:lnSpc>
-              <a:spcBef>
-                <a:spcPts val="300"/>
-              </a:spcBef>
-              <a:spcAft>
-                <a:spcPts val="300"/>
-              </a:spcAft>
-              <a:buNone/>
+            <a:pPr algn="l" marL="342900" indent="-342900">
+              <a:lnSpc>
+                <a:spcPts val="1620"/>
+              </a:lnSpc>
+              <a:spcAft>
+                <a:spcPts val="300"/>
+              </a:spcAft>
+              <a:buSzPct val="100000"/>
+              <a:buChar char="•"/>
             </a:pPr>
             <a:r>
               <a:rPr lang="en-US" sz="1200" dirty="0">
@@ -2523,42 +2735,20 @@
                 <a:ea typeface="Arial" pitchFamily="34" charset="-122"/>
                 <a:cs typeface="Arial" pitchFamily="34" charset="-120"/>
               </a:rPr>
-              <a:t>– Bring </a:t>
-            </a:r>
-            <a:pPr algn="l" indent="0" marL="0">
-              <a:lnSpc>
-                <a:spcPts val="1680"/>
-              </a:lnSpc>
-              <a:spcBef>
-                <a:spcPts val="300"/>
-              </a:spcBef>
-              <a:spcAft>
-                <a:spcPts val="300"/>
-              </a:spcAft>
-              <a:buNone/>
-            </a:pPr>
-            <a:r>
-              <a:rPr lang="en-US" sz="1200" b="1" dirty="0">
-                <a:solidFill>
-                  <a:srgbClr val="1C2833"/>
-                </a:solidFill>
-                <a:latin typeface="Arial" pitchFamily="34" charset="0"/>
-                <a:ea typeface="Arial" pitchFamily="34" charset="-122"/>
-                <a:cs typeface="Arial" pitchFamily="34" charset="-120"/>
-              </a:rPr>
-              <a:t>three interesting objects from home</a:t>
-            </a:r>
-            <a:pPr algn="l" indent="0" marL="0">
-              <a:lnSpc>
-                <a:spcPts val="1680"/>
-              </a:lnSpc>
-              <a:spcBef>
-                <a:spcPts val="300"/>
-              </a:spcBef>
-              <a:spcAft>
-                <a:spcPts val="300"/>
-              </a:spcAft>
-              <a:buNone/>
+              <a:t>Hand out five index cards per student.</a:t>
+            </a:r>
+            <a:endParaRPr lang="en-US" sz="1200" dirty="0"/>
+          </a:p>
+          <a:p>
+            <a:pPr algn="l" marL="342900" indent="-342900">
+              <a:lnSpc>
+                <a:spcPts val="1620"/>
+              </a:lnSpc>
+              <a:spcAft>
+                <a:spcPts val="300"/>
+              </a:spcAft>
+              <a:buSzPct val="100000"/>
+              <a:buChar char="•"/>
             </a:pPr>
             <a:r>
               <a:rPr lang="en-US" sz="1200" dirty="0">
@@ -2569,7 +2759,243 @@
                 <a:ea typeface="Arial" pitchFamily="34" charset="-122"/>
                 <a:cs typeface="Arial" pitchFamily="34" charset="-120"/>
               </a:rPr>
-              <a:t> to class tomorrow. They should be small enough to fit on your desk. (You'll need them on Day 4.) – Bonus: which element does each of your objects belong to?</a:t>
+              <a:t>Each card gets one element label at the top: </a:t>
+            </a:r>
+            <a:pPr algn="l" indent="0" marL="0">
+              <a:lnSpc>
+                <a:spcPts val="1620"/>
+              </a:lnSpc>
+              <a:spcAft>
+                <a:spcPts val="300"/>
+              </a:spcAft>
+              <a:buNone/>
+            </a:pPr>
+            <a:r>
+              <a:rPr lang="en-US" sz="1200" i="1" dirty="0">
+                <a:solidFill>
+                  <a:srgbClr val="1C2833"/>
+                </a:solidFill>
+                <a:latin typeface="Arial" pitchFamily="34" charset="0"/>
+                <a:ea typeface="Arial" pitchFamily="34" charset="-122"/>
+                <a:cs typeface="Arial" pitchFamily="34" charset="-120"/>
+              </a:rPr>
+              <a:t>pṛthvī, ap, tejas, vāyu, ākāśa</a:t>
+            </a:r>
+            <a:pPr algn="l" indent="0" marL="0">
+              <a:lnSpc>
+                <a:spcPts val="1620"/>
+              </a:lnSpc>
+              <a:spcAft>
+                <a:spcPts val="300"/>
+              </a:spcAft>
+              <a:buNone/>
+            </a:pPr>
+            <a:r>
+              <a:rPr lang="en-US" sz="1200" dirty="0">
+                <a:solidFill>
+                  <a:srgbClr val="1C2833"/>
+                </a:solidFill>
+                <a:latin typeface="Arial" pitchFamily="34" charset="0"/>
+                <a:ea typeface="Arial" pitchFamily="34" charset="-122"/>
+                <a:cs typeface="Arial" pitchFamily="34" charset="-120"/>
+              </a:rPr>
+              <a:t> (with English in brackets).</a:t>
+            </a:r>
+            <a:endParaRPr lang="en-US" sz="1200" dirty="0"/>
+          </a:p>
+          <a:p>
+            <a:pPr algn="l" marL="342900" indent="-342900">
+              <a:lnSpc>
+                <a:spcPts val="1620"/>
+              </a:lnSpc>
+              <a:spcAft>
+                <a:spcPts val="300"/>
+              </a:spcAft>
+              <a:buSzPct val="100000"/>
+              <a:buChar char="•"/>
+            </a:pPr>
+            <a:r>
+              <a:rPr lang="en-US" sz="1200" dirty="0">
+                <a:solidFill>
+                  <a:srgbClr val="1C2833"/>
+                </a:solidFill>
+                <a:latin typeface="Arial" pitchFamily="34" charset="0"/>
+                <a:ea typeface="Arial" pitchFamily="34" charset="-122"/>
+                <a:cs typeface="Arial" pitchFamily="34" charset="-120"/>
+              </a:rPr>
+              <a:t>In 10 minutes, students walk around the room (or stay seated if space is tight) and write ONE example of that element they can see </a:t>
+            </a:r>
+            <a:pPr algn="l" indent="0" marL="0">
+              <a:lnSpc>
+                <a:spcPts val="1620"/>
+              </a:lnSpc>
+              <a:spcAft>
+                <a:spcPts val="300"/>
+              </a:spcAft>
+              <a:buNone/>
+            </a:pPr>
+            <a:r>
+              <a:rPr lang="en-US" sz="1200" i="1" dirty="0">
+                <a:solidFill>
+                  <a:srgbClr val="1C2833"/>
+                </a:solidFill>
+                <a:latin typeface="Arial" pitchFamily="34" charset="0"/>
+                <a:ea typeface="Arial" pitchFamily="34" charset="-122"/>
+                <a:cs typeface="Arial" pitchFamily="34" charset="-120"/>
+              </a:rPr>
+              <a:t>right now</a:t>
+            </a:r>
+            <a:pPr algn="l" indent="0" marL="0">
+              <a:lnSpc>
+                <a:spcPts val="1620"/>
+              </a:lnSpc>
+              <a:spcAft>
+                <a:spcPts val="300"/>
+              </a:spcAft>
+              <a:buNone/>
+            </a:pPr>
+            <a:r>
+              <a:rPr lang="en-US" sz="1200" dirty="0">
+                <a:solidFill>
+                  <a:srgbClr val="1C2833"/>
+                </a:solidFill>
+                <a:latin typeface="Arial" pitchFamily="34" charset="0"/>
+                <a:ea typeface="Arial" pitchFamily="34" charset="-122"/>
+                <a:cs typeface="Arial" pitchFamily="34" charset="-120"/>
+              </a:rPr>
+              <a:t>, in this room.</a:t>
+            </a:r>
+            <a:endParaRPr lang="en-US" sz="1200" dirty="0"/>
+          </a:p>
+          <a:p>
+            <a:pPr algn="l" marL="342900" indent="-342900">
+              <a:lnSpc>
+                <a:spcPts val="1620"/>
+              </a:lnSpc>
+              <a:spcAft>
+                <a:spcPts val="300"/>
+              </a:spcAft>
+              <a:buSzPct val="100000"/>
+              <a:buChar char="•"/>
+            </a:pPr>
+            <a:r>
+              <a:rPr lang="en-US" sz="1200" i="1" dirty="0">
+                <a:solidFill>
+                  <a:srgbClr val="1C2833"/>
+                </a:solidFill>
+                <a:latin typeface="Arial" pitchFamily="34" charset="0"/>
+                <a:ea typeface="Arial" pitchFamily="34" charset="-122"/>
+                <a:cs typeface="Arial" pitchFamily="34" charset="-120"/>
+              </a:rPr>
+              <a:t>pṛthvī</a:t>
+            </a:r>
+            <a:pPr algn="l" indent="0" marL="0">
+              <a:lnSpc>
+                <a:spcPts val="1620"/>
+              </a:lnSpc>
+              <a:spcAft>
+                <a:spcPts val="300"/>
+              </a:spcAft>
+              <a:buNone/>
+            </a:pPr>
+            <a:r>
+              <a:rPr lang="en-US" sz="1200" dirty="0">
+                <a:solidFill>
+                  <a:srgbClr val="1C2833"/>
+                </a:solidFill>
+                <a:latin typeface="Arial" pitchFamily="34" charset="0"/>
+                <a:ea typeface="Arial" pitchFamily="34" charset="-122"/>
+                <a:cs typeface="Arial" pitchFamily="34" charset="-120"/>
+              </a:rPr>
+              <a:t> — the desk top, a textbook, the floor.</a:t>
+            </a:r>
+            <a:endParaRPr lang="en-US" sz="1200" dirty="0"/>
+          </a:p>
+          <a:p>
+            <a:pPr algn="l" marL="342900" indent="-342900">
+              <a:lnSpc>
+                <a:spcPts val="1620"/>
+              </a:lnSpc>
+              <a:spcAft>
+                <a:spcPts val="300"/>
+              </a:spcAft>
+              <a:buSzPct val="100000"/>
+              <a:buChar char="•"/>
+            </a:pPr>
+            <a:r>
+              <a:rPr lang="en-US" sz="1200" i="1" dirty="0">
+                <a:solidFill>
+                  <a:srgbClr val="1C2833"/>
+                </a:solidFill>
+                <a:latin typeface="Arial" pitchFamily="34" charset="0"/>
+                <a:ea typeface="Arial" pitchFamily="34" charset="-122"/>
+                <a:cs typeface="Arial" pitchFamily="34" charset="-120"/>
+              </a:rPr>
+              <a:t>ap</a:t>
+            </a:r>
+            <a:pPr algn="l" indent="0" marL="0">
+              <a:lnSpc>
+                <a:spcPts val="1620"/>
+              </a:lnSpc>
+              <a:spcAft>
+                <a:spcPts val="300"/>
+              </a:spcAft>
+              <a:buNone/>
+            </a:pPr>
+            <a:r>
+              <a:rPr lang="en-US" sz="1200" dirty="0">
+                <a:solidFill>
+                  <a:srgbClr val="1C2833"/>
+                </a:solidFill>
+                <a:latin typeface="Arial" pitchFamily="34" charset="0"/>
+                <a:ea typeface="Arial" pitchFamily="34" charset="-122"/>
+                <a:cs typeface="Arial" pitchFamily="34" charset="-120"/>
+              </a:rPr>
+              <a:t> — water in their water bottle, sweat on a friend's brow, condensation on a window.</a:t>
+            </a:r>
+            <a:endParaRPr lang="en-US" sz="1200" dirty="0"/>
+          </a:p>
+          <a:p>
+            <a:pPr algn="l" marL="342900" indent="-342900">
+              <a:lnSpc>
+                <a:spcPts val="1620"/>
+              </a:lnSpc>
+              <a:spcAft>
+                <a:spcPts val="300"/>
+              </a:spcAft>
+              <a:buSzPct val="100000"/>
+              <a:buChar char="•"/>
+            </a:pPr>
+            <a:r>
+              <a:rPr lang="en-US" sz="1200" i="1" dirty="0">
+                <a:solidFill>
+                  <a:srgbClr val="1C2833"/>
+                </a:solidFill>
+                <a:latin typeface="Arial" pitchFamily="34" charset="0"/>
+                <a:ea typeface="Arial" pitchFamily="34" charset="-122"/>
+                <a:cs typeface="Arial" pitchFamily="34" charset="-120"/>
+              </a:rPr>
+              <a:t>tejas</a:t>
+            </a:r>
+            <a:pPr algn="l" indent="0" marL="0">
+              <a:lnSpc>
+                <a:spcPts val="1620"/>
+              </a:lnSpc>
+              <a:spcAft>
+                <a:spcPts val="300"/>
+              </a:spcAft>
+              <a:buNone/>
+            </a:pPr>
+            <a:r>
+              <a:rPr lang="en-US" sz="1200" dirty="0">
+                <a:solidFill>
+                  <a:srgbClr val="1C2833"/>
+                </a:solidFill>
+                <a:latin typeface="Arial" pitchFamily="34" charset="0"/>
+                <a:ea typeface="Arial" pitchFamily="34" charset="-122"/>
+                <a:cs typeface="Arial" pitchFamily="34" charset="-120"/>
+              </a:rPr>
+              <a:t> — sunlight through the window, the heat of a friend's hand, the warmth of a tube light.</a:t>
             </a:r>
             <a:endParaRPr lang="en-US" sz="1200" dirty="0"/>
           </a:p>
@@ -2727,7 +3153,7 @@
                 <a:ea typeface="Georgia" pitchFamily="34" charset="-122"/>
                 <a:cs typeface="Georgia" pitchFamily="34" charset="-120"/>
               </a:rPr>
-              <a:t>Differentiation</a:t>
+              <a:t>Activity (15 min) — Five Things in This Room (cont.)</a:t>
             </a:r>
             <a:endParaRPr lang="en-US" sz="1800" dirty="0"/>
           </a:p>
@@ -2742,7 +3168,7 @@
         <p:spPr>
           <a:xfrm>
             <a:off x="634901" y="883593"/>
-            <a:ext cx="8102798" cy="937022"/>
+            <a:ext cx="8102798" cy="525661"/>
           </a:xfrm>
           <a:prstGeom prst="rect">
             <a:avLst/>
@@ -2765,15 +3191,15 @@
               <a:buChar char="•"/>
             </a:pPr>
             <a:r>
-              <a:rPr lang="en-US" sz="1200" b="1" dirty="0">
-                <a:solidFill>
-                  <a:srgbClr val="1C2833"/>
-                </a:solidFill>
-                <a:latin typeface="Arial" pitchFamily="34" charset="0"/>
-                <a:ea typeface="Arial" pitchFamily="34" charset="-122"/>
-                <a:cs typeface="Arial" pitchFamily="34" charset="-120"/>
-              </a:rPr>
-              <a:t>One tier up:</a:t>
+              <a:rPr lang="en-US" sz="1200" i="1" dirty="0">
+                <a:solidFill>
+                  <a:srgbClr val="1C2833"/>
+                </a:solidFill>
+                <a:latin typeface="Arial" pitchFamily="34" charset="0"/>
+                <a:ea typeface="Arial" pitchFamily="34" charset="-122"/>
+                <a:cs typeface="Arial" pitchFamily="34" charset="-120"/>
+              </a:rPr>
+              <a:t>vāyu</a:t>
             </a:r>
             <a:pPr algn="l" indent="0" marL="0">
               <a:lnSpc>
@@ -2793,47 +3219,7 @@
                 <a:ea typeface="Arial" pitchFamily="34" charset="-122"/>
                 <a:cs typeface="Arial" pitchFamily="34" charset="-120"/>
               </a:rPr>
-              <a:t> Some objects belong to more than one element. Find an object in this room that fits </a:t>
-            </a:r>
-            <a:pPr algn="l" indent="0" marL="0">
-              <a:lnSpc>
-                <a:spcPts val="1620"/>
-              </a:lnSpc>
-              <a:spcAft>
-                <a:spcPts val="300"/>
-              </a:spcAft>
-              <a:buNone/>
-            </a:pPr>
-            <a:r>
-              <a:rPr lang="en-US" sz="1200" i="1" dirty="0">
-                <a:solidFill>
-                  <a:srgbClr val="1C2833"/>
-                </a:solidFill>
-                <a:latin typeface="Arial" pitchFamily="34" charset="0"/>
-                <a:ea typeface="Arial" pitchFamily="34" charset="-122"/>
-                <a:cs typeface="Arial" pitchFamily="34" charset="-120"/>
-              </a:rPr>
-              <a:t>three</a:t>
-            </a:r>
-            <a:pPr algn="l" indent="0" marL="0">
-              <a:lnSpc>
-                <a:spcPts val="1620"/>
-              </a:lnSpc>
-              <a:spcAft>
-                <a:spcPts val="300"/>
-              </a:spcAft>
-              <a:buNone/>
-            </a:pPr>
-            <a:r>
-              <a:rPr lang="en-US" sz="1200" dirty="0">
-                <a:solidFill>
-                  <a:srgbClr val="1C2833"/>
-                </a:solidFill>
-                <a:latin typeface="Arial" pitchFamily="34" charset="0"/>
-                <a:ea typeface="Arial" pitchFamily="34" charset="-122"/>
-                <a:cs typeface="Arial" pitchFamily="34" charset="-120"/>
-              </a:rPr>
-              <a:t> elements and explain why.</a:t>
+              <a:t> — the breeze from a fan, their own breath.</a:t>
             </a:r>
             <a:endParaRPr lang="en-US" sz="1200" dirty="0"/>
           </a:p>
@@ -2849,15 +3235,15 @@
               <a:buChar char="•"/>
             </a:pPr>
             <a:r>
-              <a:rPr lang="en-US" sz="1200" b="1" dirty="0">
-                <a:solidFill>
-                  <a:srgbClr val="1C2833"/>
-                </a:solidFill>
-                <a:latin typeface="Arial" pitchFamily="34" charset="0"/>
-                <a:ea typeface="Arial" pitchFamily="34" charset="-122"/>
-                <a:cs typeface="Arial" pitchFamily="34" charset="-120"/>
-              </a:rPr>
-              <a:t>One tier down:</a:t>
+              <a:rPr lang="en-US" sz="1200" i="1" dirty="0">
+                <a:solidFill>
+                  <a:srgbClr val="1C2833"/>
+                </a:solidFill>
+                <a:latin typeface="Arial" pitchFamily="34" charset="0"/>
+                <a:ea typeface="Arial" pitchFamily="34" charset="-122"/>
+                <a:cs typeface="Arial" pitchFamily="34" charset="-120"/>
+              </a:rPr>
+              <a:t>ākāśa</a:t>
             </a:r>
             <a:pPr algn="l" indent="0" marL="0">
               <a:lnSpc>
@@ -2877,12 +3263,63 @@
                 <a:ea typeface="Arial" pitchFamily="34" charset="-122"/>
                 <a:cs typeface="Arial" pitchFamily="34" charset="-120"/>
               </a:rPr>
-              <a:t> If five terms feel too many, focus on remembering three for now: </a:t>
-            </a:r>
-            <a:pPr algn="l" indent="0" marL="0">
-              <a:lnSpc>
-                <a:spcPts val="1620"/>
-              </a:lnSpc>
+              <a:t> — the space between two students, the gap above their heads.</a:t>
+            </a:r>
+            <a:endParaRPr lang="en-US" sz="1200" dirty="0"/>
+          </a:p>
+        </p:txBody>
+      </p:sp>
+      <p:sp>
+        <p:nvSpPr>
+          <p:cNvPr id="5" name="Text 3"/>
+          <p:cNvSpPr/>
+          <p:nvPr/>
+        </p:nvSpPr>
+        <p:spPr>
+          <a:xfrm>
+            <a:off x="406301" y="1498104"/>
+            <a:ext cx="8498026" cy="426541"/>
+          </a:xfrm>
+          <a:prstGeom prst="rect">
+            <a:avLst/>
+          </a:prstGeom>
+          <a:noFill/>
+          <a:ln/>
+        </p:spPr>
+        <p:txBody>
+          <a:bodyPr wrap="square" lIns="0" tIns="0" rIns="0" bIns="0" rtlCol="0" anchor="t"/>
+          <a:lstStyle/>
+          <a:p>
+            <a:pPr algn="l" indent="0" marL="0">
+              <a:lnSpc>
+                <a:spcPts val="1680"/>
+              </a:lnSpc>
+              <a:spcBef>
+                <a:spcPts val="300"/>
+              </a:spcBef>
+              <a:spcAft>
+                <a:spcPts val="300"/>
+              </a:spcAft>
+              <a:buNone/>
+            </a:pPr>
+            <a:r>
+              <a:rPr lang="en-US" sz="1200" dirty="0">
+                <a:solidFill>
+                  <a:srgbClr val="1C2833"/>
+                </a:solidFill>
+                <a:latin typeface="Arial" pitchFamily="34" charset="0"/>
+                <a:ea typeface="Arial" pitchFamily="34" charset="-122"/>
+                <a:cs typeface="Arial" pitchFamily="34" charset="-120"/>
+              </a:rPr>
+              <a:t>Walk around. If a student writes "the chair" under </a:t>
+            </a:r>
+            <a:pPr algn="l" indent="0" marL="0">
+              <a:lnSpc>
+                <a:spcPts val="1680"/>
+              </a:lnSpc>
+              <a:spcBef>
+                <a:spcPts val="300"/>
+              </a:spcBef>
               <a:spcAft>
                 <a:spcPts val="300"/>
               </a:spcAft>
@@ -2897,12 +3334,15 @@
                 <a:ea typeface="Arial" pitchFamily="34" charset="-122"/>
                 <a:cs typeface="Arial" pitchFamily="34" charset="-120"/>
               </a:rPr>
-              <a:t>pṛthvī, ap, vāyu</a:t>
-            </a:r>
-            <a:pPr algn="l" indent="0" marL="0">
-              <a:lnSpc>
-                <a:spcPts val="1620"/>
-              </a:lnSpc>
+              <a:t>pṛthvī</a:t>
+            </a:r>
+            <a:pPr algn="l" indent="0" marL="0">
+              <a:lnSpc>
+                <a:spcPts val="1680"/>
+              </a:lnSpc>
+              <a:spcBef>
+                <a:spcPts val="300"/>
+              </a:spcBef>
               <a:spcAft>
                 <a:spcPts val="300"/>
               </a:spcAft>
@@ -2917,7 +3357,53 @@
                 <a:ea typeface="Arial" pitchFamily="34" charset="-122"/>
                 <a:cs typeface="Arial" pitchFamily="34" charset="-120"/>
               </a:rPr>
-              <a:t> (earth, water, air). We'll add the other two over the next two days.</a:t>
+              <a:t>, that's correct. If they write "a chair" under </a:t>
+            </a:r>
+            <a:pPr algn="l" indent="0" marL="0">
+              <a:lnSpc>
+                <a:spcPts val="1680"/>
+              </a:lnSpc>
+              <a:spcBef>
+                <a:spcPts val="300"/>
+              </a:spcBef>
+              <a:spcAft>
+                <a:spcPts val="300"/>
+              </a:spcAft>
+              <a:buNone/>
+            </a:pPr>
+            <a:r>
+              <a:rPr lang="en-US" sz="1200" i="1" dirty="0">
+                <a:solidFill>
+                  <a:srgbClr val="1C2833"/>
+                </a:solidFill>
+                <a:latin typeface="Arial" pitchFamily="34" charset="0"/>
+                <a:ea typeface="Arial" pitchFamily="34" charset="-122"/>
+                <a:cs typeface="Arial" pitchFamily="34" charset="-120"/>
+              </a:rPr>
+              <a:t>ākāśa</a:t>
+            </a:r>
+            <a:pPr algn="l" indent="0" marL="0">
+              <a:lnSpc>
+                <a:spcPts val="1680"/>
+              </a:lnSpc>
+              <a:spcBef>
+                <a:spcPts val="300"/>
+              </a:spcBef>
+              <a:spcAft>
+                <a:spcPts val="300"/>
+              </a:spcAft>
+              <a:buNone/>
+            </a:pPr>
+            <a:r>
+              <a:rPr lang="en-US" sz="1200" dirty="0">
+                <a:solidFill>
+                  <a:srgbClr val="1C2833"/>
+                </a:solidFill>
+                <a:latin typeface="Arial" pitchFamily="34" charset="0"/>
+                <a:ea typeface="Arial" pitchFamily="34" charset="-122"/>
+                <a:cs typeface="Arial" pitchFamily="34" charset="-120"/>
+              </a:rPr>
+              <a:t> and explain it's the empty seat space, that's also correct — and worth celebrating.</a:t>
             </a:r>
             <a:endParaRPr lang="en-US" sz="1200" dirty="0"/>
           </a:p>
@@ -2925,7 +3411,7 @@
       </p:sp>
       <p:sp>
         <p:nvSpPr>
-          <p:cNvPr id="5" name="Text 3"/>
+          <p:cNvPr id="6" name="Text 4"/>
           <p:cNvSpPr/>
           <p:nvPr/>
         </p:nvSpPr>
@@ -3075,7 +3561,7 @@
                 <a:ea typeface="Georgia" pitchFamily="34" charset="-122"/>
                 <a:cs typeface="Georgia" pitchFamily="34" charset="-120"/>
               </a:rPr>
-              <a:t>Teacher notes</a:t>
+              <a:t>Wrap-up (5 min)</a:t>
             </a:r>
             <a:endParaRPr lang="en-US" sz="1800" dirty="0"/>
           </a:p>
@@ -3089,8 +3575,8 @@
         </p:nvSpPr>
         <p:spPr>
           <a:xfrm>
-            <a:off x="406301" y="870942"/>
-            <a:ext cx="8498026" cy="853083"/>
+            <a:off x="634901" y="883593"/>
+            <a:ext cx="8102798" cy="937022"/>
           </a:xfrm>
           <a:prstGeom prst="rect">
             <a:avLst/>
@@ -3102,17 +3588,15 @@
           <a:bodyPr wrap="square" lIns="0" tIns="0" rIns="0" bIns="0" rtlCol="0" anchor="t"/>
           <a:lstStyle/>
           <a:p>
-            <a:pPr algn="l" indent="0" marL="0">
-              <a:lnSpc>
-                <a:spcPts val="1680"/>
-              </a:lnSpc>
-              <a:spcBef>
-                <a:spcPts val="300"/>
-              </a:spcBef>
-              <a:spcAft>
-                <a:spcPts val="300"/>
-              </a:spcAft>
-              <a:buNone/>
+            <a:pPr algn="l" marL="342900" indent="-342900">
+              <a:lnSpc>
+                <a:spcPts val="1620"/>
+              </a:lnSpc>
+              <a:spcAft>
+                <a:spcPts val="300"/>
+              </a:spcAft>
+              <a:buSzPct val="100000"/>
+              <a:buChar char="•"/>
             </a:pPr>
             <a:r>
               <a:rPr lang="en-US" sz="1200" dirty="0">
@@ -3123,15 +3607,36 @@
                 <a:ea typeface="Arial" pitchFamily="34" charset="-122"/>
                 <a:cs typeface="Arial" pitchFamily="34" charset="-120"/>
               </a:rPr>
-              <a:t>– Some students will immediately try to "win" by giving exotic examples. Gently steer them back: the win is </a:t>
-            </a:r>
-            <a:pPr algn="l" indent="0" marL="0">
-              <a:lnSpc>
-                <a:spcPts val="1680"/>
-              </a:lnSpc>
-              <a:spcBef>
-                <a:spcPts val="300"/>
-              </a:spcBef>
+              <a:t>Exit ticket (oral, going around the room): each student names ONE element and their own example. Anything that hasn't been said yet earns a small cheer.</a:t>
+            </a:r>
+            <a:endParaRPr lang="en-US" sz="1200" dirty="0"/>
+          </a:p>
+          <a:p>
+            <a:pPr algn="l" marL="342900" indent="-342900">
+              <a:lnSpc>
+                <a:spcPts val="1620"/>
+              </a:lnSpc>
+              <a:spcAft>
+                <a:spcPts val="300"/>
+              </a:spcAft>
+              <a:buSzPct val="100000"/>
+              <a:buChar char="•"/>
+            </a:pPr>
+            <a:r>
+              <a:rPr lang="en-US" sz="1200" dirty="0">
+                <a:solidFill>
+                  <a:srgbClr val="1C2833"/>
+                </a:solidFill>
+                <a:latin typeface="Arial" pitchFamily="34" charset="0"/>
+                <a:ea typeface="Arial" pitchFamily="34" charset="-122"/>
+                <a:cs typeface="Arial" pitchFamily="34" charset="-120"/>
+              </a:rPr>
+              <a:t>Preview: "Tomorrow we'll see how the tradition says these five elements </a:t>
+            </a:r>
+            <a:pPr algn="l" indent="0" marL="0">
+              <a:lnSpc>
+                <a:spcPts val="1620"/>
+              </a:lnSpc>
               <a:spcAft>
                 <a:spcPts val="300"/>
               </a:spcAft>
@@ -3146,15 +3651,12 @@
                 <a:ea typeface="Arial" pitchFamily="34" charset="-122"/>
                 <a:cs typeface="Arial" pitchFamily="34" charset="-120"/>
               </a:rPr>
-              <a:t>noticing</a:t>
-            </a:r>
-            <a:pPr algn="l" indent="0" marL="0">
-              <a:lnSpc>
-                <a:spcPts val="1680"/>
-              </a:lnSpc>
-              <a:spcBef>
-                <a:spcPts val="300"/>
-              </a:spcBef>
+              <a:t>came to be</a:t>
+            </a:r>
+            <a:pPr algn="l" indent="0" marL="0">
+              <a:lnSpc>
+                <a:spcPts val="1620"/>
+              </a:lnSpc>
               <a:spcAft>
                 <a:spcPts val="300"/>
               </a:spcAft>
@@ -3169,191 +3671,7 @@
                 <a:ea typeface="Arial" pitchFamily="34" charset="-122"/>
                 <a:cs typeface="Arial" pitchFamily="34" charset="-120"/>
               </a:rPr>
-              <a:t>, not exotic-ness. – If a student says "</a:t>
-            </a:r>
-            <a:pPr algn="l" indent="0" marL="0">
-              <a:lnSpc>
-                <a:spcPts val="1680"/>
-              </a:lnSpc>
-              <a:spcBef>
-                <a:spcPts val="300"/>
-              </a:spcBef>
-              <a:spcAft>
-                <a:spcPts val="300"/>
-              </a:spcAft>
-              <a:buNone/>
-            </a:pPr>
-            <a:r>
-              <a:rPr lang="en-US" sz="1200" i="1" dirty="0">
-                <a:solidFill>
-                  <a:srgbClr val="1C2833"/>
-                </a:solidFill>
-                <a:latin typeface="Arial" pitchFamily="34" charset="0"/>
-                <a:ea typeface="Arial" pitchFamily="34" charset="-122"/>
-                <a:cs typeface="Arial" pitchFamily="34" charset="-120"/>
-              </a:rPr>
-              <a:t>tejas</a:t>
-            </a:r>
-            <a:pPr algn="l" indent="0" marL="0">
-              <a:lnSpc>
-                <a:spcPts val="1680"/>
-              </a:lnSpc>
-              <a:spcBef>
-                <a:spcPts val="300"/>
-              </a:spcBef>
-              <a:spcAft>
-                <a:spcPts val="300"/>
-              </a:spcAft>
-              <a:buNone/>
-            </a:pPr>
-            <a:r>
-              <a:rPr lang="en-US" sz="1200" dirty="0">
-                <a:solidFill>
-                  <a:srgbClr val="1C2833"/>
-                </a:solidFill>
-                <a:latin typeface="Arial" pitchFamily="34" charset="0"/>
-                <a:ea typeface="Arial" pitchFamily="34" charset="-122"/>
-                <a:cs typeface="Arial" pitchFamily="34" charset="-120"/>
-              </a:rPr>
-              <a:t> doesn't fit anything in this room because nothing is on fire," ask them: is the tube light hot? Where is the warmth from? That's </a:t>
-            </a:r>
-            <a:pPr algn="l" indent="0" marL="0">
-              <a:lnSpc>
-                <a:spcPts val="1680"/>
-              </a:lnSpc>
-              <a:spcBef>
-                <a:spcPts val="300"/>
-              </a:spcBef>
-              <a:spcAft>
-                <a:spcPts val="300"/>
-              </a:spcAft>
-              <a:buNone/>
-            </a:pPr>
-            <a:r>
-              <a:rPr lang="en-US" sz="1200" i="1" dirty="0">
-                <a:solidFill>
-                  <a:srgbClr val="1C2833"/>
-                </a:solidFill>
-                <a:latin typeface="Arial" pitchFamily="34" charset="0"/>
-                <a:ea typeface="Arial" pitchFamily="34" charset="-122"/>
-                <a:cs typeface="Arial" pitchFamily="34" charset="-120"/>
-              </a:rPr>
-              <a:t>tejas</a:t>
-            </a:r>
-            <a:pPr algn="l" indent="0" marL="0">
-              <a:lnSpc>
-                <a:spcPts val="1680"/>
-              </a:lnSpc>
-              <a:spcBef>
-                <a:spcPts val="300"/>
-              </a:spcBef>
-              <a:spcAft>
-                <a:spcPts val="300"/>
-              </a:spcAft>
-              <a:buNone/>
-            </a:pPr>
-            <a:r>
-              <a:rPr lang="en-US" sz="1200" dirty="0">
-                <a:solidFill>
-                  <a:srgbClr val="1C2833"/>
-                </a:solidFill>
-                <a:latin typeface="Arial" pitchFamily="34" charset="0"/>
-                <a:ea typeface="Arial" pitchFamily="34" charset="-122"/>
-                <a:cs typeface="Arial" pitchFamily="34" charset="-120"/>
-              </a:rPr>
-              <a:t>. – Watch for confusion on </a:t>
-            </a:r>
-            <a:pPr algn="l" indent="0" marL="0">
-              <a:lnSpc>
-                <a:spcPts val="1680"/>
-              </a:lnSpc>
-              <a:spcBef>
-                <a:spcPts val="300"/>
-              </a:spcBef>
-              <a:spcAft>
-                <a:spcPts val="300"/>
-              </a:spcAft>
-              <a:buNone/>
-            </a:pPr>
-            <a:r>
-              <a:rPr lang="en-US" sz="1200" i="1" dirty="0">
-                <a:solidFill>
-                  <a:srgbClr val="1C2833"/>
-                </a:solidFill>
-                <a:latin typeface="Arial" pitchFamily="34" charset="0"/>
-                <a:ea typeface="Arial" pitchFamily="34" charset="-122"/>
-                <a:cs typeface="Arial" pitchFamily="34" charset="-120"/>
-              </a:rPr>
-              <a:t>ākāśa</a:t>
-            </a:r>
-            <a:pPr algn="l" indent="0" marL="0">
-              <a:lnSpc>
-                <a:spcPts val="1680"/>
-              </a:lnSpc>
-              <a:spcBef>
-                <a:spcPts val="300"/>
-              </a:spcBef>
-              <a:spcAft>
-                <a:spcPts val="300"/>
-              </a:spcAft>
-              <a:buNone/>
-            </a:pPr>
-            <a:r>
-              <a:rPr lang="en-US" sz="1200" dirty="0">
-                <a:solidFill>
-                  <a:srgbClr val="1C2833"/>
-                </a:solidFill>
-                <a:latin typeface="Arial" pitchFamily="34" charset="0"/>
-                <a:ea typeface="Arial" pitchFamily="34" charset="-122"/>
-                <a:cs typeface="Arial" pitchFamily="34" charset="-120"/>
-              </a:rPr>
-              <a:t>. Several students will insist "there's nothing here" — say "yes, and that 'nothing-here' has a name, and the name is </a:t>
-            </a:r>
-            <a:pPr algn="l" indent="0" marL="0">
-              <a:lnSpc>
-                <a:spcPts val="1680"/>
-              </a:lnSpc>
-              <a:spcBef>
-                <a:spcPts val="300"/>
-              </a:spcBef>
-              <a:spcAft>
-                <a:spcPts val="300"/>
-              </a:spcAft>
-              <a:buNone/>
-            </a:pPr>
-            <a:r>
-              <a:rPr lang="en-US" sz="1200" i="1" dirty="0">
-                <a:solidFill>
-                  <a:srgbClr val="1C2833"/>
-                </a:solidFill>
-                <a:latin typeface="Arial" pitchFamily="34" charset="0"/>
-                <a:ea typeface="Arial" pitchFamily="34" charset="-122"/>
-                <a:cs typeface="Arial" pitchFamily="34" charset="-120"/>
-              </a:rPr>
-              <a:t>ākāśa</a:t>
-            </a:r>
-            <a:pPr algn="l" indent="0" marL="0">
-              <a:lnSpc>
-                <a:spcPts val="1680"/>
-              </a:lnSpc>
-              <a:spcBef>
-                <a:spcPts val="300"/>
-              </a:spcBef>
-              <a:spcAft>
-                <a:spcPts val="300"/>
-              </a:spcAft>
-              <a:buNone/>
-            </a:pPr>
-            <a:r>
-              <a:rPr lang="en-US" sz="1200" dirty="0">
-                <a:solidFill>
-                  <a:srgbClr val="1C2833"/>
-                </a:solidFill>
-                <a:latin typeface="Arial" pitchFamily="34" charset="0"/>
-                <a:ea typeface="Arial" pitchFamily="34" charset="-122"/>
-                <a:cs typeface="Arial" pitchFamily="34" charset="-120"/>
-              </a:rPr>
-              <a:t>." It's the medium other things sit in.</a:t>
+              <a:t> — one after another, in a specific order."</a:t>
             </a:r>
             <a:endParaRPr lang="en-US" sz="1200" dirty="0"/>
           </a:p>
@@ -3511,6 +3829,1753 @@
                 <a:ea typeface="Georgia" pitchFamily="34" charset="-122"/>
                 <a:cs typeface="Georgia" pitchFamily="34" charset="-120"/>
               </a:rPr>
+              <a:t>Student-facing content</a:t>
+            </a:r>
+            <a:endParaRPr lang="en-US" sz="1800" dirty="0"/>
+          </a:p>
+        </p:txBody>
+      </p:sp>
+      <p:sp>
+        <p:nvSpPr>
+          <p:cNvPr id="4" name="Text 2"/>
+          <p:cNvSpPr/>
+          <p:nvPr/>
+        </p:nvSpPr>
+        <p:spPr>
+          <a:xfrm>
+            <a:off x="406301" y="883593"/>
+            <a:ext cx="8331398" cy="2343150"/>
+          </a:xfrm>
+          <a:prstGeom prst="rect">
+            <a:avLst/>
+          </a:prstGeom>
+          <a:solidFill>
+            <a:srgbClr val="F4F8F9"/>
+          </a:solidFill>
+          <a:ln/>
+        </p:spPr>
+        <p:txBody>
+          <a:bodyPr wrap="square" rtlCol="0" anchor="ctr"/>
+          <a:lstStyle/>
+          <a:p>
+            <a:pPr indent="0" marL="0">
+              <a:buNone/>
+            </a:pPr>
+            <a:endParaRPr lang="en-US" dirty="0"/>
+          </a:p>
+        </p:txBody>
+      </p:sp>
+      <p:sp>
+        <p:nvSpPr>
+          <p:cNvPr id="5" name="Shape 3"/>
+          <p:cNvSpPr/>
+          <p:nvPr/>
+        </p:nvSpPr>
+        <p:spPr>
+          <a:xfrm>
+            <a:off x="434876" y="883593"/>
+            <a:ext cx="0" cy="2343150"/>
+          </a:xfrm>
+          <a:prstGeom prst="line">
+            <a:avLst/>
+          </a:prstGeom>
+          <a:noFill/>
+          <a:ln w="57150">
+            <a:solidFill>
+              <a:srgbClr val="FE4447"/>
+            </a:solidFill>
+            <a:prstDash val="solid"/>
+          </a:ln>
+        </p:spPr>
+      </p:sp>
+      <p:sp>
+        <p:nvSpPr>
+          <p:cNvPr id="6" name="Text 4"/>
+          <p:cNvSpPr/>
+          <p:nvPr/>
+        </p:nvSpPr>
+        <p:spPr>
+          <a:xfrm>
+            <a:off x="692051" y="1074093"/>
+            <a:ext cx="7973389" cy="230981"/>
+          </a:xfrm>
+          <a:prstGeom prst="rect">
+            <a:avLst/>
+          </a:prstGeom>
+          <a:noFill/>
+          <a:ln/>
+        </p:spPr>
+        <p:txBody>
+          <a:bodyPr wrap="square" lIns="0" tIns="0" rIns="0" bIns="0" rtlCol="0" anchor="t"/>
+          <a:lstStyle/>
+          <a:p>
+            <a:pPr algn="l" indent="0" marL="0">
+              <a:lnSpc>
+                <a:spcPts val="1820"/>
+              </a:lnSpc>
+              <a:spcBef>
+                <a:spcPts val="300"/>
+              </a:spcBef>
+              <a:spcAft>
+                <a:spcPts val="300"/>
+              </a:spcAft>
+              <a:buNone/>
+            </a:pPr>
+            <a:r>
+              <a:rPr lang="en-US" sz="1300" b="1" i="1" dirty="0">
+                <a:solidFill>
+                  <a:srgbClr val="1C2833"/>
+                </a:solidFill>
+                <a:latin typeface="Georgia" pitchFamily="34" charset="0"/>
+                <a:ea typeface="Georgia" pitchFamily="34" charset="-122"/>
+                <a:cs typeface="Georgia" pitchFamily="34" charset="-120"/>
+              </a:rPr>
+              <a:t>Today we learned: The Five Great Elements</a:t>
+            </a:r>
+            <a:endParaRPr lang="en-US" sz="1300" dirty="0"/>
+          </a:p>
+        </p:txBody>
+      </p:sp>
+      <p:sp>
+        <p:nvSpPr>
+          <p:cNvPr id="7" name="Text 5"/>
+          <p:cNvSpPr/>
+          <p:nvPr/>
+        </p:nvSpPr>
+        <p:spPr>
+          <a:xfrm>
+            <a:off x="692051" y="1343174"/>
+            <a:ext cx="7973389" cy="461963"/>
+          </a:xfrm>
+          <a:prstGeom prst="rect">
+            <a:avLst/>
+          </a:prstGeom>
+          <a:noFill/>
+          <a:ln/>
+        </p:spPr>
+        <p:txBody>
+          <a:bodyPr wrap="square" lIns="0" tIns="0" rIns="0" bIns="0" rtlCol="0" anchor="t"/>
+          <a:lstStyle/>
+          <a:p>
+            <a:pPr algn="l" indent="0" marL="0">
+              <a:lnSpc>
+                <a:spcPts val="1820"/>
+              </a:lnSpc>
+              <a:spcBef>
+                <a:spcPts val="300"/>
+              </a:spcBef>
+              <a:spcAft>
+                <a:spcPts val="300"/>
+              </a:spcAft>
+              <a:buNone/>
+            </a:pPr>
+            <a:r>
+              <a:rPr lang="en-US" sz="1300" dirty="0">
+                <a:solidFill>
+                  <a:srgbClr val="1C2833"/>
+                </a:solidFill>
+                <a:latin typeface="Georgia" pitchFamily="34" charset="0"/>
+                <a:ea typeface="Georgia" pitchFamily="34" charset="-122"/>
+                <a:cs typeface="Georgia" pitchFamily="34" charset="-120"/>
+              </a:rPr>
+              <a:t>The </a:t>
+            </a:r>
+            <a:pPr algn="l" indent="0" marL="0">
+              <a:lnSpc>
+                <a:spcPts val="1820"/>
+              </a:lnSpc>
+              <a:spcBef>
+                <a:spcPts val="300"/>
+              </a:spcBef>
+              <a:spcAft>
+                <a:spcPts val="300"/>
+              </a:spcAft>
+              <a:buNone/>
+            </a:pPr>
+            <a:r>
+              <a:rPr lang="en-US" sz="1300" i="1" dirty="0">
+                <a:solidFill>
+                  <a:srgbClr val="1C2833"/>
+                </a:solidFill>
+                <a:latin typeface="Georgia" pitchFamily="34" charset="0"/>
+                <a:ea typeface="Georgia" pitchFamily="34" charset="-122"/>
+                <a:cs typeface="Georgia" pitchFamily="34" charset="-120"/>
+              </a:rPr>
+              <a:t>pañca-mahābhūta</a:t>
+            </a:r>
+            <a:pPr algn="l" indent="0" marL="0">
+              <a:lnSpc>
+                <a:spcPts val="1820"/>
+              </a:lnSpc>
+              <a:spcBef>
+                <a:spcPts val="300"/>
+              </a:spcBef>
+              <a:spcAft>
+                <a:spcPts val="300"/>
+              </a:spcAft>
+              <a:buNone/>
+            </a:pPr>
+            <a:r>
+              <a:rPr lang="en-US" sz="1300" dirty="0">
+                <a:solidFill>
+                  <a:srgbClr val="1C2833"/>
+                </a:solidFill>
+                <a:latin typeface="Georgia" pitchFamily="34" charset="0"/>
+                <a:ea typeface="Georgia" pitchFamily="34" charset="-122"/>
+                <a:cs typeface="Georgia" pitchFamily="34" charset="-120"/>
+              </a:rPr>
+              <a:t> are the five categories ancient Indian thinkers used to organise everything around us:</a:t>
+            </a:r>
+            <a:endParaRPr lang="en-US" sz="1300" dirty="0"/>
+          </a:p>
+        </p:txBody>
+      </p:sp>
+      <p:sp>
+        <p:nvSpPr>
+          <p:cNvPr id="8" name="Text 6"/>
+          <p:cNvSpPr/>
+          <p:nvPr/>
+        </p:nvSpPr>
+        <p:spPr>
+          <a:xfrm>
+            <a:off x="692051" y="1843236"/>
+            <a:ext cx="7973389" cy="923925"/>
+          </a:xfrm>
+          <a:prstGeom prst="rect">
+            <a:avLst/>
+          </a:prstGeom>
+          <a:noFill/>
+          <a:ln/>
+        </p:spPr>
+        <p:txBody>
+          <a:bodyPr wrap="square" lIns="0" tIns="0" rIns="0" bIns="0" rtlCol="0" anchor="t"/>
+          <a:lstStyle/>
+          <a:p>
+            <a:pPr algn="l" indent="0" marL="0">
+              <a:lnSpc>
+                <a:spcPts val="1820"/>
+              </a:lnSpc>
+              <a:spcBef>
+                <a:spcPts val="300"/>
+              </a:spcBef>
+              <a:spcAft>
+                <a:spcPts val="300"/>
+              </a:spcAft>
+              <a:buNone/>
+            </a:pPr>
+            <a:r>
+              <a:rPr lang="en-US" sz="1300" dirty="0">
+                <a:solidFill>
+                  <a:srgbClr val="1C2833"/>
+                </a:solidFill>
+                <a:latin typeface="Georgia" pitchFamily="34" charset="0"/>
+                <a:ea typeface="Georgia" pitchFamily="34" charset="-122"/>
+                <a:cs typeface="Georgia" pitchFamily="34" charset="-120"/>
+              </a:rPr>
+              <a:t>| Sanskrit (IAST) | English | One example from your room | |---|---|---| | </a:t>
+            </a:r>
+            <a:pPr algn="l" indent="0" marL="0">
+              <a:lnSpc>
+                <a:spcPts val="1820"/>
+              </a:lnSpc>
+              <a:spcBef>
+                <a:spcPts val="300"/>
+              </a:spcBef>
+              <a:spcAft>
+                <a:spcPts val="300"/>
+              </a:spcAft>
+              <a:buNone/>
+            </a:pPr>
+            <a:r>
+              <a:rPr lang="en-US" sz="1300" i="1" dirty="0">
+                <a:solidFill>
+                  <a:srgbClr val="1C2833"/>
+                </a:solidFill>
+                <a:latin typeface="Georgia" pitchFamily="34" charset="0"/>
+                <a:ea typeface="Georgia" pitchFamily="34" charset="-122"/>
+                <a:cs typeface="Georgia" pitchFamily="34" charset="-120"/>
+              </a:rPr>
+              <a:t>pṛthvī</a:t>
+            </a:r>
+            <a:pPr algn="l" indent="0" marL="0">
+              <a:lnSpc>
+                <a:spcPts val="1820"/>
+              </a:lnSpc>
+              <a:spcBef>
+                <a:spcPts val="300"/>
+              </a:spcBef>
+              <a:spcAft>
+                <a:spcPts val="300"/>
+              </a:spcAft>
+              <a:buNone/>
+            </a:pPr>
+            <a:r>
+              <a:rPr lang="en-US" sz="1300" dirty="0">
+                <a:solidFill>
+                  <a:srgbClr val="1C2833"/>
+                </a:solidFill>
+                <a:latin typeface="Georgia" pitchFamily="34" charset="0"/>
+                <a:ea typeface="Georgia" pitchFamily="34" charset="-122"/>
+                <a:cs typeface="Georgia" pitchFamily="34" charset="-120"/>
+              </a:rPr>
+              <a:t> | Earth / solid stuff | __________________ | | </a:t>
+            </a:r>
+            <a:pPr algn="l" indent="0" marL="0">
+              <a:lnSpc>
+                <a:spcPts val="1820"/>
+              </a:lnSpc>
+              <a:spcBef>
+                <a:spcPts val="300"/>
+              </a:spcBef>
+              <a:spcAft>
+                <a:spcPts val="300"/>
+              </a:spcAft>
+              <a:buNone/>
+            </a:pPr>
+            <a:r>
+              <a:rPr lang="en-US" sz="1300" i="1" dirty="0">
+                <a:solidFill>
+                  <a:srgbClr val="1C2833"/>
+                </a:solidFill>
+                <a:latin typeface="Georgia" pitchFamily="34" charset="0"/>
+                <a:ea typeface="Georgia" pitchFamily="34" charset="-122"/>
+                <a:cs typeface="Georgia" pitchFamily="34" charset="-120"/>
+              </a:rPr>
+              <a:t>ap</a:t>
+            </a:r>
+            <a:pPr algn="l" indent="0" marL="0">
+              <a:lnSpc>
+                <a:spcPts val="1820"/>
+              </a:lnSpc>
+              <a:spcBef>
+                <a:spcPts val="300"/>
+              </a:spcBef>
+              <a:spcAft>
+                <a:spcPts val="300"/>
+              </a:spcAft>
+              <a:buNone/>
+            </a:pPr>
+            <a:r>
+              <a:rPr lang="en-US" sz="1300" dirty="0">
+                <a:solidFill>
+                  <a:srgbClr val="1C2833"/>
+                </a:solidFill>
+                <a:latin typeface="Georgia" pitchFamily="34" charset="0"/>
+                <a:ea typeface="Georgia" pitchFamily="34" charset="-122"/>
+                <a:cs typeface="Georgia" pitchFamily="34" charset="-120"/>
+              </a:rPr>
+              <a:t> | Water / liquid stuff | __________________ | | </a:t>
+            </a:r>
+            <a:pPr algn="l" indent="0" marL="0">
+              <a:lnSpc>
+                <a:spcPts val="1820"/>
+              </a:lnSpc>
+              <a:spcBef>
+                <a:spcPts val="300"/>
+              </a:spcBef>
+              <a:spcAft>
+                <a:spcPts val="300"/>
+              </a:spcAft>
+              <a:buNone/>
+            </a:pPr>
+            <a:r>
+              <a:rPr lang="en-US" sz="1300" i="1" dirty="0">
+                <a:solidFill>
+                  <a:srgbClr val="1C2833"/>
+                </a:solidFill>
+                <a:latin typeface="Georgia" pitchFamily="34" charset="0"/>
+                <a:ea typeface="Georgia" pitchFamily="34" charset="-122"/>
+                <a:cs typeface="Georgia" pitchFamily="34" charset="-120"/>
+              </a:rPr>
+              <a:t>tejas</a:t>
+            </a:r>
+            <a:pPr algn="l" indent="0" marL="0">
+              <a:lnSpc>
+                <a:spcPts val="1820"/>
+              </a:lnSpc>
+              <a:spcBef>
+                <a:spcPts val="300"/>
+              </a:spcBef>
+              <a:spcAft>
+                <a:spcPts val="300"/>
+              </a:spcAft>
+              <a:buNone/>
+            </a:pPr>
+            <a:r>
+              <a:rPr lang="en-US" sz="1300" dirty="0">
+                <a:solidFill>
+                  <a:srgbClr val="1C2833"/>
+                </a:solidFill>
+                <a:latin typeface="Georgia" pitchFamily="34" charset="0"/>
+                <a:ea typeface="Georgia" pitchFamily="34" charset="-122"/>
+                <a:cs typeface="Georgia" pitchFamily="34" charset="-120"/>
+              </a:rPr>
+              <a:t> | Fire / heat / light | __________________ | | </a:t>
+            </a:r>
+            <a:pPr algn="l" indent="0" marL="0">
+              <a:lnSpc>
+                <a:spcPts val="1820"/>
+              </a:lnSpc>
+              <a:spcBef>
+                <a:spcPts val="300"/>
+              </a:spcBef>
+              <a:spcAft>
+                <a:spcPts val="300"/>
+              </a:spcAft>
+              <a:buNone/>
+            </a:pPr>
+            <a:r>
+              <a:rPr lang="en-US" sz="1300" i="1" dirty="0">
+                <a:solidFill>
+                  <a:srgbClr val="1C2833"/>
+                </a:solidFill>
+                <a:latin typeface="Georgia" pitchFamily="34" charset="0"/>
+                <a:ea typeface="Georgia" pitchFamily="34" charset="-122"/>
+                <a:cs typeface="Georgia" pitchFamily="34" charset="-120"/>
+              </a:rPr>
+              <a:t>vāyu</a:t>
+            </a:r>
+            <a:pPr algn="l" indent="0" marL="0">
+              <a:lnSpc>
+                <a:spcPts val="1820"/>
+              </a:lnSpc>
+              <a:spcBef>
+                <a:spcPts val="300"/>
+              </a:spcBef>
+              <a:spcAft>
+                <a:spcPts val="300"/>
+              </a:spcAft>
+              <a:buNone/>
+            </a:pPr>
+            <a:r>
+              <a:rPr lang="en-US" sz="1300" dirty="0">
+                <a:solidFill>
+                  <a:srgbClr val="1C2833"/>
+                </a:solidFill>
+                <a:latin typeface="Georgia" pitchFamily="34" charset="0"/>
+                <a:ea typeface="Georgia" pitchFamily="34" charset="-122"/>
+                <a:cs typeface="Georgia" pitchFamily="34" charset="-120"/>
+              </a:rPr>
+              <a:t> | Air / gas / movement | __________________ | | </a:t>
+            </a:r>
+            <a:pPr algn="l" indent="0" marL="0">
+              <a:lnSpc>
+                <a:spcPts val="1820"/>
+              </a:lnSpc>
+              <a:spcBef>
+                <a:spcPts val="300"/>
+              </a:spcBef>
+              <a:spcAft>
+                <a:spcPts val="300"/>
+              </a:spcAft>
+              <a:buNone/>
+            </a:pPr>
+            <a:r>
+              <a:rPr lang="en-US" sz="1300" i="1" dirty="0">
+                <a:solidFill>
+                  <a:srgbClr val="1C2833"/>
+                </a:solidFill>
+                <a:latin typeface="Georgia" pitchFamily="34" charset="0"/>
+                <a:ea typeface="Georgia" pitchFamily="34" charset="-122"/>
+                <a:cs typeface="Georgia" pitchFamily="34" charset="-120"/>
+              </a:rPr>
+              <a:t>ākāśa</a:t>
+            </a:r>
+            <a:pPr algn="l" indent="0" marL="0">
+              <a:lnSpc>
+                <a:spcPts val="1820"/>
+              </a:lnSpc>
+              <a:spcBef>
+                <a:spcPts val="300"/>
+              </a:spcBef>
+              <a:spcAft>
+                <a:spcPts val="300"/>
+              </a:spcAft>
+              <a:buNone/>
+            </a:pPr>
+            <a:r>
+              <a:rPr lang="en-US" sz="1300" dirty="0">
+                <a:solidFill>
+                  <a:srgbClr val="1C2833"/>
+                </a:solidFill>
+                <a:latin typeface="Georgia" pitchFamily="34" charset="0"/>
+                <a:ea typeface="Georgia" pitchFamily="34" charset="-122"/>
+                <a:cs typeface="Georgia" pitchFamily="34" charset="-120"/>
+              </a:rPr>
+              <a:t> | Space / room | __________________ |</a:t>
+            </a:r>
+            <a:endParaRPr lang="en-US" sz="1300" dirty="0"/>
+          </a:p>
+        </p:txBody>
+      </p:sp>
+      <p:sp>
+        <p:nvSpPr>
+          <p:cNvPr id="9" name="Text 7"/>
+          <p:cNvSpPr/>
+          <p:nvPr/>
+        </p:nvSpPr>
+        <p:spPr>
+          <a:xfrm>
+            <a:off x="692051" y="2805261"/>
+            <a:ext cx="7973389" cy="230981"/>
+          </a:xfrm>
+          <a:prstGeom prst="rect">
+            <a:avLst/>
+          </a:prstGeom>
+          <a:noFill/>
+          <a:ln/>
+        </p:spPr>
+        <p:txBody>
+          <a:bodyPr wrap="square" lIns="0" tIns="0" rIns="0" bIns="0" rtlCol="0" anchor="t"/>
+          <a:lstStyle/>
+          <a:p>
+            <a:pPr algn="l" indent="0" marL="0">
+              <a:lnSpc>
+                <a:spcPts val="1820"/>
+              </a:lnSpc>
+              <a:spcBef>
+                <a:spcPts val="300"/>
+              </a:spcBef>
+              <a:spcAft>
+                <a:spcPts val="300"/>
+              </a:spcAft>
+              <a:buNone/>
+            </a:pPr>
+            <a:r>
+              <a:rPr lang="en-US" sz="1300" i="1" dirty="0">
+                <a:solidFill>
+                  <a:srgbClr val="1C2833"/>
+                </a:solidFill>
+                <a:latin typeface="Georgia" pitchFamily="34" charset="0"/>
+                <a:ea typeface="Georgia" pitchFamily="34" charset="-122"/>
+                <a:cs typeface="Georgia" pitchFamily="34" charset="-120"/>
+              </a:rPr>
+              <a:t>Fill in the table with your own examples. Keep this in your notebook — we'll add to it through the module.</a:t>
+            </a:r>
+            <a:endParaRPr lang="en-US" sz="1300" dirty="0"/>
+          </a:p>
+        </p:txBody>
+      </p:sp>
+      <p:sp>
+        <p:nvSpPr>
+          <p:cNvPr id="10" name="Text 8"/>
+          <p:cNvSpPr/>
+          <p:nvPr/>
+        </p:nvSpPr>
+        <p:spPr>
+          <a:xfrm>
+            <a:off x="406301" y="4434929"/>
+            <a:ext cx="8498026" cy="213271"/>
+          </a:xfrm>
+          <a:prstGeom prst="rect">
+            <a:avLst/>
+          </a:prstGeom>
+          <a:noFill/>
+          <a:ln/>
+        </p:spPr>
+        <p:txBody>
+          <a:bodyPr wrap="square" lIns="0" tIns="0" rIns="0" bIns="0" rtlCol="0" anchor="t"/>
+          <a:lstStyle/>
+          <a:p>
+            <a:pPr algn="l" indent="0" marL="0">
+              <a:lnSpc>
+                <a:spcPts val="1680"/>
+              </a:lnSpc>
+              <a:spcBef>
+                <a:spcPts val="300"/>
+              </a:spcBef>
+              <a:spcAft>
+                <a:spcPts val="300"/>
+              </a:spcAft>
+              <a:buNone/>
+            </a:pPr>
+            <a:r>
+              <a:rPr lang="en-US" sz="1200" dirty="0">
+                <a:solidFill>
+                  <a:srgbClr val="1C2833"/>
+                </a:solidFill>
+                <a:latin typeface="Arial" pitchFamily="34" charset="0"/>
+                <a:ea typeface="Arial" pitchFamily="34" charset="-122"/>
+                <a:cs typeface="Arial" pitchFamily="34" charset="-120"/>
+              </a:rPr>
+              <a:t>Middle ·  · IKS Curriculum</a:t>
+            </a:r>
+            <a:endParaRPr lang="en-US" sz="1200" dirty="0"/>
+          </a:p>
+        </p:txBody>
+      </p:sp>
+    </p:spTree>
+  </p:cSld>
+  <p:clrMapOvr>
+    <a:masterClrMapping/>
+  </p:clrMapOvr>
+</p:sld>
+</file>
+
+<file path=ppt/slides/slide14.xml><?xml version="1.0" encoding="utf-8"?>
+<p:sld xmlns:a="http://schemas.openxmlformats.org/drawingml/2006/main" xmlns:r="http://schemas.openxmlformats.org/officeDocument/2006/relationships" xmlns:p="http://schemas.openxmlformats.org/presentationml/2006/main">
+  <p:cSld name="Slide 14">
+    <p:bg>
+      <p:bgPr>
+        <a:solidFill>
+          <a:srgbClr val="FFFFFF"/>
+        </a:solidFill>
+      </p:bgPr>
+    </p:bg>
+    <p:spTree>
+      <p:nvGrpSpPr>
+        <p:cNvPr id="1" name=""/>
+        <p:cNvGrpSpPr/>
+        <p:nvPr/>
+      </p:nvGrpSpPr>
+      <p:grpSpPr>
+        <a:xfrm>
+          <a:off x="0" y="0"/>
+          <a:ext cx="0" cy="0"/>
+          <a:chOff x="0" y="0"/>
+          <a:chExt cx="0" cy="0"/>
+        </a:xfrm>
+      </p:grpSpPr>
+      <p:sp>
+        <p:nvSpPr>
+          <p:cNvPr id="2" name="Text 0"/>
+          <p:cNvSpPr/>
+          <p:nvPr/>
+        </p:nvSpPr>
+        <p:spPr>
+          <a:xfrm>
+            <a:off x="0" y="0"/>
+            <a:ext cx="9144000" cy="101501"/>
+          </a:xfrm>
+          <a:prstGeom prst="rect">
+            <a:avLst/>
+          </a:prstGeom>
+          <a:solidFill>
+            <a:srgbClr val="277884"/>
+          </a:solidFill>
+          <a:ln/>
+        </p:spPr>
+        <p:txBody>
+          <a:bodyPr wrap="square" rtlCol="0" anchor="ctr"/>
+          <a:lstStyle/>
+          <a:p>
+            <a:pPr indent="0" marL="0">
+              <a:buNone/>
+            </a:pPr>
+            <a:endParaRPr lang="en-US" dirty="0"/>
+          </a:p>
+        </p:txBody>
+      </p:sp>
+      <p:sp>
+        <p:nvSpPr>
+          <p:cNvPr id="3" name="Text 1"/>
+          <p:cNvSpPr/>
+          <p:nvPr/>
+        </p:nvSpPr>
+        <p:spPr>
+          <a:xfrm>
+            <a:off x="406301" y="457051"/>
+            <a:ext cx="8498026" cy="274290"/>
+          </a:xfrm>
+          <a:prstGeom prst="rect">
+            <a:avLst/>
+          </a:prstGeom>
+          <a:noFill/>
+          <a:ln/>
+        </p:spPr>
+        <p:txBody>
+          <a:bodyPr wrap="square" lIns="0" tIns="0" rIns="0" bIns="0" rtlCol="0" anchor="t"/>
+          <a:lstStyle/>
+          <a:p>
+            <a:pPr algn="l" indent="0" marL="0">
+              <a:lnSpc>
+                <a:spcPts val="2160"/>
+              </a:lnSpc>
+              <a:spcBef>
+                <a:spcPts val="600"/>
+              </a:spcBef>
+              <a:spcAft>
+                <a:spcPts val="800"/>
+              </a:spcAft>
+              <a:buNone/>
+            </a:pPr>
+            <a:r>
+              <a:rPr lang="en-US" sz="1800" b="1" dirty="0">
+                <a:solidFill>
+                  <a:srgbClr val="FE4447"/>
+                </a:solidFill>
+                <a:latin typeface="Georgia" pitchFamily="34" charset="0"/>
+                <a:ea typeface="Georgia" pitchFamily="34" charset="-122"/>
+                <a:cs typeface="Georgia" pitchFamily="34" charset="-120"/>
+              </a:rPr>
+              <a:t>Homework (if any)</a:t>
+            </a:r>
+            <a:endParaRPr lang="en-US" sz="1800" dirty="0"/>
+          </a:p>
+        </p:txBody>
+      </p:sp>
+      <p:sp>
+        <p:nvSpPr>
+          <p:cNvPr id="4" name="Text 2"/>
+          <p:cNvSpPr/>
+          <p:nvPr/>
+        </p:nvSpPr>
+        <p:spPr>
+          <a:xfrm>
+            <a:off x="634901" y="883593"/>
+            <a:ext cx="8102798" cy="731341"/>
+          </a:xfrm>
+          <a:prstGeom prst="rect">
+            <a:avLst/>
+          </a:prstGeom>
+          <a:noFill/>
+          <a:ln/>
+        </p:spPr>
+        <p:txBody>
+          <a:bodyPr wrap="square" lIns="0" tIns="0" rIns="0" bIns="0" rtlCol="0" anchor="t"/>
+          <a:lstStyle/>
+          <a:p>
+            <a:pPr algn="l" marL="342900" indent="-342900">
+              <a:lnSpc>
+                <a:spcPts val="1620"/>
+              </a:lnSpc>
+              <a:spcAft>
+                <a:spcPts val="300"/>
+              </a:spcAft>
+              <a:buSzPct val="100000"/>
+              <a:buChar char="•"/>
+            </a:pPr>
+            <a:r>
+              <a:rPr lang="en-US" sz="1200" dirty="0">
+                <a:solidFill>
+                  <a:srgbClr val="1C2833"/>
+                </a:solidFill>
+                <a:latin typeface="Arial" pitchFamily="34" charset="0"/>
+                <a:ea typeface="Arial" pitchFamily="34" charset="-122"/>
+                <a:cs typeface="Arial" pitchFamily="34" charset="-120"/>
+              </a:rPr>
+              <a:t>Bring </a:t>
+            </a:r>
+            <a:pPr algn="l" indent="0" marL="0">
+              <a:lnSpc>
+                <a:spcPts val="1620"/>
+              </a:lnSpc>
+              <a:spcAft>
+                <a:spcPts val="300"/>
+              </a:spcAft>
+              <a:buNone/>
+            </a:pPr>
+            <a:r>
+              <a:rPr lang="en-US" sz="1200" b="1" dirty="0">
+                <a:solidFill>
+                  <a:srgbClr val="1C2833"/>
+                </a:solidFill>
+                <a:latin typeface="Arial" pitchFamily="34" charset="0"/>
+                <a:ea typeface="Arial" pitchFamily="34" charset="-122"/>
+                <a:cs typeface="Arial" pitchFamily="34" charset="-120"/>
+              </a:rPr>
+              <a:t>three interesting objects from home</a:t>
+            </a:r>
+            <a:pPr algn="l" indent="0" marL="0">
+              <a:lnSpc>
+                <a:spcPts val="1620"/>
+              </a:lnSpc>
+              <a:spcAft>
+                <a:spcPts val="300"/>
+              </a:spcAft>
+              <a:buNone/>
+            </a:pPr>
+            <a:r>
+              <a:rPr lang="en-US" sz="1200" dirty="0">
+                <a:solidFill>
+                  <a:srgbClr val="1C2833"/>
+                </a:solidFill>
+                <a:latin typeface="Arial" pitchFamily="34" charset="0"/>
+                <a:ea typeface="Arial" pitchFamily="34" charset="-122"/>
+                <a:cs typeface="Arial" pitchFamily="34" charset="-120"/>
+              </a:rPr>
+              <a:t> to class tomorrow. They should be small enough to fit on your desk. (You'll need them on Day 4.)</a:t>
+            </a:r>
+            <a:endParaRPr lang="en-US" sz="1200" dirty="0"/>
+          </a:p>
+          <a:p>
+            <a:pPr algn="l" marL="342900" indent="-342900">
+              <a:lnSpc>
+                <a:spcPts val="1620"/>
+              </a:lnSpc>
+              <a:spcAft>
+                <a:spcPts val="300"/>
+              </a:spcAft>
+              <a:buSzPct val="100000"/>
+              <a:buChar char="•"/>
+            </a:pPr>
+            <a:r>
+              <a:rPr lang="en-US" sz="1200" dirty="0">
+                <a:solidFill>
+                  <a:srgbClr val="1C2833"/>
+                </a:solidFill>
+                <a:latin typeface="Arial" pitchFamily="34" charset="0"/>
+                <a:ea typeface="Arial" pitchFamily="34" charset="-122"/>
+                <a:cs typeface="Arial" pitchFamily="34" charset="-120"/>
+              </a:rPr>
+              <a:t>Bonus: which element does each of your objects belong to?</a:t>
+            </a:r>
+            <a:endParaRPr lang="en-US" sz="1200" dirty="0"/>
+          </a:p>
+        </p:txBody>
+      </p:sp>
+      <p:sp>
+        <p:nvSpPr>
+          <p:cNvPr id="5" name="Text 3"/>
+          <p:cNvSpPr/>
+          <p:nvPr/>
+        </p:nvSpPr>
+        <p:spPr>
+          <a:xfrm>
+            <a:off x="406301" y="4434929"/>
+            <a:ext cx="8498026" cy="213271"/>
+          </a:xfrm>
+          <a:prstGeom prst="rect">
+            <a:avLst/>
+          </a:prstGeom>
+          <a:noFill/>
+          <a:ln/>
+        </p:spPr>
+        <p:txBody>
+          <a:bodyPr wrap="square" lIns="0" tIns="0" rIns="0" bIns="0" rtlCol="0" anchor="t"/>
+          <a:lstStyle/>
+          <a:p>
+            <a:pPr algn="l" indent="0" marL="0">
+              <a:lnSpc>
+                <a:spcPts val="1680"/>
+              </a:lnSpc>
+              <a:spcBef>
+                <a:spcPts val="300"/>
+              </a:spcBef>
+              <a:spcAft>
+                <a:spcPts val="300"/>
+              </a:spcAft>
+              <a:buNone/>
+            </a:pPr>
+            <a:r>
+              <a:rPr lang="en-US" sz="1200" dirty="0">
+                <a:solidFill>
+                  <a:srgbClr val="1C2833"/>
+                </a:solidFill>
+                <a:latin typeface="Arial" pitchFamily="34" charset="0"/>
+                <a:ea typeface="Arial" pitchFamily="34" charset="-122"/>
+                <a:cs typeface="Arial" pitchFamily="34" charset="-120"/>
+              </a:rPr>
+              <a:t>Middle ·  · IKS Curriculum</a:t>
+            </a:r>
+            <a:endParaRPr lang="en-US" sz="1200" dirty="0"/>
+          </a:p>
+        </p:txBody>
+      </p:sp>
+    </p:spTree>
+  </p:cSld>
+  <p:clrMapOvr>
+    <a:masterClrMapping/>
+  </p:clrMapOvr>
+</p:sld>
+</file>
+
+<file path=ppt/slides/slide15.xml><?xml version="1.0" encoding="utf-8"?>
+<p:sld xmlns:a="http://schemas.openxmlformats.org/drawingml/2006/main" xmlns:r="http://schemas.openxmlformats.org/officeDocument/2006/relationships" xmlns:p="http://schemas.openxmlformats.org/presentationml/2006/main">
+  <p:cSld name="Slide 15">
+    <p:bg>
+      <p:bgPr>
+        <a:solidFill>
+          <a:srgbClr val="FFFFFF"/>
+        </a:solidFill>
+      </p:bgPr>
+    </p:bg>
+    <p:spTree>
+      <p:nvGrpSpPr>
+        <p:cNvPr id="1" name=""/>
+        <p:cNvGrpSpPr/>
+        <p:nvPr/>
+      </p:nvGrpSpPr>
+      <p:grpSpPr>
+        <a:xfrm>
+          <a:off x="0" y="0"/>
+          <a:ext cx="0" cy="0"/>
+          <a:chOff x="0" y="0"/>
+          <a:chExt cx="0" cy="0"/>
+        </a:xfrm>
+      </p:grpSpPr>
+      <p:sp>
+        <p:nvSpPr>
+          <p:cNvPr id="2" name="Text 0"/>
+          <p:cNvSpPr/>
+          <p:nvPr/>
+        </p:nvSpPr>
+        <p:spPr>
+          <a:xfrm>
+            <a:off x="0" y="0"/>
+            <a:ext cx="9144000" cy="101501"/>
+          </a:xfrm>
+          <a:prstGeom prst="rect">
+            <a:avLst/>
+          </a:prstGeom>
+          <a:solidFill>
+            <a:srgbClr val="277884"/>
+          </a:solidFill>
+          <a:ln/>
+        </p:spPr>
+        <p:txBody>
+          <a:bodyPr wrap="square" rtlCol="0" anchor="ctr"/>
+          <a:lstStyle/>
+          <a:p>
+            <a:pPr indent="0" marL="0">
+              <a:buNone/>
+            </a:pPr>
+            <a:endParaRPr lang="en-US" dirty="0"/>
+          </a:p>
+        </p:txBody>
+      </p:sp>
+      <p:sp>
+        <p:nvSpPr>
+          <p:cNvPr id="3" name="Text 1"/>
+          <p:cNvSpPr/>
+          <p:nvPr/>
+        </p:nvSpPr>
+        <p:spPr>
+          <a:xfrm>
+            <a:off x="406301" y="457051"/>
+            <a:ext cx="8498026" cy="274290"/>
+          </a:xfrm>
+          <a:prstGeom prst="rect">
+            <a:avLst/>
+          </a:prstGeom>
+          <a:noFill/>
+          <a:ln/>
+        </p:spPr>
+        <p:txBody>
+          <a:bodyPr wrap="square" lIns="0" tIns="0" rIns="0" bIns="0" rtlCol="0" anchor="t"/>
+          <a:lstStyle/>
+          <a:p>
+            <a:pPr algn="l" indent="0" marL="0">
+              <a:lnSpc>
+                <a:spcPts val="2160"/>
+              </a:lnSpc>
+              <a:spcBef>
+                <a:spcPts val="600"/>
+              </a:spcBef>
+              <a:spcAft>
+                <a:spcPts val="800"/>
+              </a:spcAft>
+              <a:buNone/>
+            </a:pPr>
+            <a:r>
+              <a:rPr lang="en-US" sz="1800" b="1" dirty="0">
+                <a:solidFill>
+                  <a:srgbClr val="FE4447"/>
+                </a:solidFill>
+                <a:latin typeface="Georgia" pitchFamily="34" charset="0"/>
+                <a:ea typeface="Georgia" pitchFamily="34" charset="-122"/>
+                <a:cs typeface="Georgia" pitchFamily="34" charset="-120"/>
+              </a:rPr>
+              <a:t>Differentiation</a:t>
+            </a:r>
+            <a:endParaRPr lang="en-US" sz="1800" dirty="0"/>
+          </a:p>
+        </p:txBody>
+      </p:sp>
+      <p:sp>
+        <p:nvSpPr>
+          <p:cNvPr id="4" name="Text 2"/>
+          <p:cNvSpPr/>
+          <p:nvPr/>
+        </p:nvSpPr>
+        <p:spPr>
+          <a:xfrm>
+            <a:off x="634901" y="883593"/>
+            <a:ext cx="8102798" cy="937022"/>
+          </a:xfrm>
+          <a:prstGeom prst="rect">
+            <a:avLst/>
+          </a:prstGeom>
+          <a:noFill/>
+          <a:ln/>
+        </p:spPr>
+        <p:txBody>
+          <a:bodyPr wrap="square" lIns="0" tIns="0" rIns="0" bIns="0" rtlCol="0" anchor="t"/>
+          <a:lstStyle/>
+          <a:p>
+            <a:pPr algn="l" marL="342900" indent="-342900">
+              <a:lnSpc>
+                <a:spcPts val="1620"/>
+              </a:lnSpc>
+              <a:spcAft>
+                <a:spcPts val="300"/>
+              </a:spcAft>
+              <a:buSzPct val="100000"/>
+              <a:buChar char="•"/>
+            </a:pPr>
+            <a:r>
+              <a:rPr lang="en-US" sz="1200" b="1" dirty="0">
+                <a:solidFill>
+                  <a:srgbClr val="1C2833"/>
+                </a:solidFill>
+                <a:latin typeface="Arial" pitchFamily="34" charset="0"/>
+                <a:ea typeface="Arial" pitchFamily="34" charset="-122"/>
+                <a:cs typeface="Arial" pitchFamily="34" charset="-120"/>
+              </a:rPr>
+              <a:t>One tier up:</a:t>
+            </a:r>
+            <a:pPr algn="l" indent="0" marL="0">
+              <a:lnSpc>
+                <a:spcPts val="1620"/>
+              </a:lnSpc>
+              <a:spcAft>
+                <a:spcPts val="300"/>
+              </a:spcAft>
+              <a:buNone/>
+            </a:pPr>
+            <a:r>
+              <a:rPr lang="en-US" sz="1200" dirty="0">
+                <a:solidFill>
+                  <a:srgbClr val="1C2833"/>
+                </a:solidFill>
+                <a:latin typeface="Arial" pitchFamily="34" charset="0"/>
+                <a:ea typeface="Arial" pitchFamily="34" charset="-122"/>
+                <a:cs typeface="Arial" pitchFamily="34" charset="-120"/>
+              </a:rPr>
+              <a:t> Some objects belong to more than one element. Find an object in this room that fits </a:t>
+            </a:r>
+            <a:pPr algn="l" indent="0" marL="0">
+              <a:lnSpc>
+                <a:spcPts val="1620"/>
+              </a:lnSpc>
+              <a:spcAft>
+                <a:spcPts val="300"/>
+              </a:spcAft>
+              <a:buNone/>
+            </a:pPr>
+            <a:r>
+              <a:rPr lang="en-US" sz="1200" i="1" dirty="0">
+                <a:solidFill>
+                  <a:srgbClr val="1C2833"/>
+                </a:solidFill>
+                <a:latin typeface="Arial" pitchFamily="34" charset="0"/>
+                <a:ea typeface="Arial" pitchFamily="34" charset="-122"/>
+                <a:cs typeface="Arial" pitchFamily="34" charset="-120"/>
+              </a:rPr>
+              <a:t>three</a:t>
+            </a:r>
+            <a:pPr algn="l" indent="0" marL="0">
+              <a:lnSpc>
+                <a:spcPts val="1620"/>
+              </a:lnSpc>
+              <a:spcAft>
+                <a:spcPts val="300"/>
+              </a:spcAft>
+              <a:buNone/>
+            </a:pPr>
+            <a:r>
+              <a:rPr lang="en-US" sz="1200" dirty="0">
+                <a:solidFill>
+                  <a:srgbClr val="1C2833"/>
+                </a:solidFill>
+                <a:latin typeface="Arial" pitchFamily="34" charset="0"/>
+                <a:ea typeface="Arial" pitchFamily="34" charset="-122"/>
+                <a:cs typeface="Arial" pitchFamily="34" charset="-120"/>
+              </a:rPr>
+              <a:t> elements and explain why.</a:t>
+            </a:r>
+            <a:endParaRPr lang="en-US" sz="1200" dirty="0"/>
+          </a:p>
+          <a:p>
+            <a:pPr algn="l" marL="342900" indent="-342900">
+              <a:lnSpc>
+                <a:spcPts val="1620"/>
+              </a:lnSpc>
+              <a:spcAft>
+                <a:spcPts val="300"/>
+              </a:spcAft>
+              <a:buSzPct val="100000"/>
+              <a:buChar char="•"/>
+            </a:pPr>
+            <a:r>
+              <a:rPr lang="en-US" sz="1200" b="1" dirty="0">
+                <a:solidFill>
+                  <a:srgbClr val="1C2833"/>
+                </a:solidFill>
+                <a:latin typeface="Arial" pitchFamily="34" charset="0"/>
+                <a:ea typeface="Arial" pitchFamily="34" charset="-122"/>
+                <a:cs typeface="Arial" pitchFamily="34" charset="-120"/>
+              </a:rPr>
+              <a:t>One tier down:</a:t>
+            </a:r>
+            <a:pPr algn="l" indent="0" marL="0">
+              <a:lnSpc>
+                <a:spcPts val="1620"/>
+              </a:lnSpc>
+              <a:spcAft>
+                <a:spcPts val="300"/>
+              </a:spcAft>
+              <a:buNone/>
+            </a:pPr>
+            <a:r>
+              <a:rPr lang="en-US" sz="1200" dirty="0">
+                <a:solidFill>
+                  <a:srgbClr val="1C2833"/>
+                </a:solidFill>
+                <a:latin typeface="Arial" pitchFamily="34" charset="0"/>
+                <a:ea typeface="Arial" pitchFamily="34" charset="-122"/>
+                <a:cs typeface="Arial" pitchFamily="34" charset="-120"/>
+              </a:rPr>
+              <a:t> If five terms feel too many, focus on remembering three for now: </a:t>
+            </a:r>
+            <a:pPr algn="l" indent="0" marL="0">
+              <a:lnSpc>
+                <a:spcPts val="1620"/>
+              </a:lnSpc>
+              <a:spcAft>
+                <a:spcPts val="300"/>
+              </a:spcAft>
+              <a:buNone/>
+            </a:pPr>
+            <a:r>
+              <a:rPr lang="en-US" sz="1200" i="1" dirty="0">
+                <a:solidFill>
+                  <a:srgbClr val="1C2833"/>
+                </a:solidFill>
+                <a:latin typeface="Arial" pitchFamily="34" charset="0"/>
+                <a:ea typeface="Arial" pitchFamily="34" charset="-122"/>
+                <a:cs typeface="Arial" pitchFamily="34" charset="-120"/>
+              </a:rPr>
+              <a:t>pṛthvī, ap, vāyu</a:t>
+            </a:r>
+            <a:pPr algn="l" indent="0" marL="0">
+              <a:lnSpc>
+                <a:spcPts val="1620"/>
+              </a:lnSpc>
+              <a:spcAft>
+                <a:spcPts val="300"/>
+              </a:spcAft>
+              <a:buNone/>
+            </a:pPr>
+            <a:r>
+              <a:rPr lang="en-US" sz="1200" dirty="0">
+                <a:solidFill>
+                  <a:srgbClr val="1C2833"/>
+                </a:solidFill>
+                <a:latin typeface="Arial" pitchFamily="34" charset="0"/>
+                <a:ea typeface="Arial" pitchFamily="34" charset="-122"/>
+                <a:cs typeface="Arial" pitchFamily="34" charset="-120"/>
+              </a:rPr>
+              <a:t> (earth, water, air). We'll add the other two over the next two days.</a:t>
+            </a:r>
+            <a:endParaRPr lang="en-US" sz="1200" dirty="0"/>
+          </a:p>
+        </p:txBody>
+      </p:sp>
+      <p:sp>
+        <p:nvSpPr>
+          <p:cNvPr id="5" name="Text 3"/>
+          <p:cNvSpPr/>
+          <p:nvPr/>
+        </p:nvSpPr>
+        <p:spPr>
+          <a:xfrm>
+            <a:off x="406301" y="4434929"/>
+            <a:ext cx="8498026" cy="213271"/>
+          </a:xfrm>
+          <a:prstGeom prst="rect">
+            <a:avLst/>
+          </a:prstGeom>
+          <a:noFill/>
+          <a:ln/>
+        </p:spPr>
+        <p:txBody>
+          <a:bodyPr wrap="square" lIns="0" tIns="0" rIns="0" bIns="0" rtlCol="0" anchor="t"/>
+          <a:lstStyle/>
+          <a:p>
+            <a:pPr algn="l" indent="0" marL="0">
+              <a:lnSpc>
+                <a:spcPts val="1680"/>
+              </a:lnSpc>
+              <a:spcBef>
+                <a:spcPts val="300"/>
+              </a:spcBef>
+              <a:spcAft>
+                <a:spcPts val="300"/>
+              </a:spcAft>
+              <a:buNone/>
+            </a:pPr>
+            <a:r>
+              <a:rPr lang="en-US" sz="1200" dirty="0">
+                <a:solidFill>
+                  <a:srgbClr val="1C2833"/>
+                </a:solidFill>
+                <a:latin typeface="Arial" pitchFamily="34" charset="0"/>
+                <a:ea typeface="Arial" pitchFamily="34" charset="-122"/>
+                <a:cs typeface="Arial" pitchFamily="34" charset="-120"/>
+              </a:rPr>
+              <a:t>Middle ·  · IKS Curriculum</a:t>
+            </a:r>
+            <a:endParaRPr lang="en-US" sz="1200" dirty="0"/>
+          </a:p>
+        </p:txBody>
+      </p:sp>
+    </p:spTree>
+  </p:cSld>
+  <p:clrMapOvr>
+    <a:masterClrMapping/>
+  </p:clrMapOvr>
+</p:sld>
+</file>
+
+<file path=ppt/slides/slide16.xml><?xml version="1.0" encoding="utf-8"?>
+<p:sld xmlns:a="http://schemas.openxmlformats.org/drawingml/2006/main" xmlns:r="http://schemas.openxmlformats.org/officeDocument/2006/relationships" xmlns:p="http://schemas.openxmlformats.org/presentationml/2006/main">
+  <p:cSld name="Slide 16">
+    <p:bg>
+      <p:bgPr>
+        <a:solidFill>
+          <a:srgbClr val="FFFFFF"/>
+        </a:solidFill>
+      </p:bgPr>
+    </p:bg>
+    <p:spTree>
+      <p:nvGrpSpPr>
+        <p:cNvPr id="1" name=""/>
+        <p:cNvGrpSpPr/>
+        <p:nvPr/>
+      </p:nvGrpSpPr>
+      <p:grpSpPr>
+        <a:xfrm>
+          <a:off x="0" y="0"/>
+          <a:ext cx="0" cy="0"/>
+          <a:chOff x="0" y="0"/>
+          <a:chExt cx="0" cy="0"/>
+        </a:xfrm>
+      </p:grpSpPr>
+      <p:sp>
+        <p:nvSpPr>
+          <p:cNvPr id="2" name="Text 0"/>
+          <p:cNvSpPr/>
+          <p:nvPr/>
+        </p:nvSpPr>
+        <p:spPr>
+          <a:xfrm>
+            <a:off x="0" y="0"/>
+            <a:ext cx="9144000" cy="101501"/>
+          </a:xfrm>
+          <a:prstGeom prst="rect">
+            <a:avLst/>
+          </a:prstGeom>
+          <a:solidFill>
+            <a:srgbClr val="277884"/>
+          </a:solidFill>
+          <a:ln/>
+        </p:spPr>
+        <p:txBody>
+          <a:bodyPr wrap="square" rtlCol="0" anchor="ctr"/>
+          <a:lstStyle/>
+          <a:p>
+            <a:pPr indent="0" marL="0">
+              <a:buNone/>
+            </a:pPr>
+            <a:endParaRPr lang="en-US" dirty="0"/>
+          </a:p>
+        </p:txBody>
+      </p:sp>
+      <p:sp>
+        <p:nvSpPr>
+          <p:cNvPr id="3" name="Text 1"/>
+          <p:cNvSpPr/>
+          <p:nvPr/>
+        </p:nvSpPr>
+        <p:spPr>
+          <a:xfrm>
+            <a:off x="406301" y="457051"/>
+            <a:ext cx="8498026" cy="274290"/>
+          </a:xfrm>
+          <a:prstGeom prst="rect">
+            <a:avLst/>
+          </a:prstGeom>
+          <a:noFill/>
+          <a:ln/>
+        </p:spPr>
+        <p:txBody>
+          <a:bodyPr wrap="square" lIns="0" tIns="0" rIns="0" bIns="0" rtlCol="0" anchor="t"/>
+          <a:lstStyle/>
+          <a:p>
+            <a:pPr algn="l" indent="0" marL="0">
+              <a:lnSpc>
+                <a:spcPts val="2160"/>
+              </a:lnSpc>
+              <a:spcBef>
+                <a:spcPts val="600"/>
+              </a:spcBef>
+              <a:spcAft>
+                <a:spcPts val="800"/>
+              </a:spcAft>
+              <a:buNone/>
+            </a:pPr>
+            <a:r>
+              <a:rPr lang="en-US" sz="1800" b="1" dirty="0">
+                <a:solidFill>
+                  <a:srgbClr val="FE4447"/>
+                </a:solidFill>
+                <a:latin typeface="Georgia" pitchFamily="34" charset="0"/>
+                <a:ea typeface="Georgia" pitchFamily="34" charset="-122"/>
+                <a:cs typeface="Georgia" pitchFamily="34" charset="-120"/>
+              </a:rPr>
+              <a:t>Teacher notes</a:t>
+            </a:r>
+            <a:endParaRPr lang="en-US" sz="1800" dirty="0"/>
+          </a:p>
+        </p:txBody>
+      </p:sp>
+      <p:sp>
+        <p:nvSpPr>
+          <p:cNvPr id="4" name="Text 2"/>
+          <p:cNvSpPr/>
+          <p:nvPr/>
+        </p:nvSpPr>
+        <p:spPr>
+          <a:xfrm>
+            <a:off x="634901" y="883593"/>
+            <a:ext cx="8102798" cy="1386483"/>
+          </a:xfrm>
+          <a:prstGeom prst="rect">
+            <a:avLst/>
+          </a:prstGeom>
+          <a:noFill/>
+          <a:ln/>
+        </p:spPr>
+        <p:txBody>
+          <a:bodyPr wrap="square" lIns="0" tIns="0" rIns="0" bIns="0" rtlCol="0" anchor="t"/>
+          <a:lstStyle/>
+          <a:p>
+            <a:pPr algn="l" marL="342900" indent="-342900">
+              <a:lnSpc>
+                <a:spcPts val="1620"/>
+              </a:lnSpc>
+              <a:spcAft>
+                <a:spcPts val="300"/>
+              </a:spcAft>
+              <a:buSzPct val="100000"/>
+              <a:buChar char="•"/>
+            </a:pPr>
+            <a:r>
+              <a:rPr lang="en-US" sz="1200" dirty="0">
+                <a:solidFill>
+                  <a:srgbClr val="1C2833"/>
+                </a:solidFill>
+                <a:latin typeface="Arial" pitchFamily="34" charset="0"/>
+                <a:ea typeface="Arial" pitchFamily="34" charset="-122"/>
+                <a:cs typeface="Arial" pitchFamily="34" charset="-120"/>
+              </a:rPr>
+              <a:t>Some students will immediately try to "win" by giving exotic examples. Gently steer them back: the win is </a:t>
+            </a:r>
+            <a:pPr algn="l" indent="0" marL="0">
+              <a:lnSpc>
+                <a:spcPts val="1620"/>
+              </a:lnSpc>
+              <a:spcAft>
+                <a:spcPts val="300"/>
+              </a:spcAft>
+              <a:buNone/>
+            </a:pPr>
+            <a:r>
+              <a:rPr lang="en-US" sz="1200" i="1" dirty="0">
+                <a:solidFill>
+                  <a:srgbClr val="1C2833"/>
+                </a:solidFill>
+                <a:latin typeface="Arial" pitchFamily="34" charset="0"/>
+                <a:ea typeface="Arial" pitchFamily="34" charset="-122"/>
+                <a:cs typeface="Arial" pitchFamily="34" charset="-120"/>
+              </a:rPr>
+              <a:t>noticing</a:t>
+            </a:r>
+            <a:pPr algn="l" indent="0" marL="0">
+              <a:lnSpc>
+                <a:spcPts val="1620"/>
+              </a:lnSpc>
+              <a:spcAft>
+                <a:spcPts val="300"/>
+              </a:spcAft>
+              <a:buNone/>
+            </a:pPr>
+            <a:r>
+              <a:rPr lang="en-US" sz="1200" dirty="0">
+                <a:solidFill>
+                  <a:srgbClr val="1C2833"/>
+                </a:solidFill>
+                <a:latin typeface="Arial" pitchFamily="34" charset="0"/>
+                <a:ea typeface="Arial" pitchFamily="34" charset="-122"/>
+                <a:cs typeface="Arial" pitchFamily="34" charset="-120"/>
+              </a:rPr>
+              <a:t>, not exotic-ness.</a:t>
+            </a:r>
+            <a:endParaRPr lang="en-US" sz="1200" dirty="0"/>
+          </a:p>
+          <a:p>
+            <a:pPr algn="l" marL="342900" indent="-342900">
+              <a:lnSpc>
+                <a:spcPts val="1620"/>
+              </a:lnSpc>
+              <a:spcAft>
+                <a:spcPts val="300"/>
+              </a:spcAft>
+              <a:buSzPct val="100000"/>
+              <a:buChar char="•"/>
+            </a:pPr>
+            <a:r>
+              <a:rPr lang="en-US" sz="1200" dirty="0">
+                <a:solidFill>
+                  <a:srgbClr val="1C2833"/>
+                </a:solidFill>
+                <a:latin typeface="Arial" pitchFamily="34" charset="0"/>
+                <a:ea typeface="Arial" pitchFamily="34" charset="-122"/>
+                <a:cs typeface="Arial" pitchFamily="34" charset="-120"/>
+              </a:rPr>
+              <a:t>If a student says "</a:t>
+            </a:r>
+            <a:pPr algn="l" indent="0" marL="0">
+              <a:lnSpc>
+                <a:spcPts val="1620"/>
+              </a:lnSpc>
+              <a:spcAft>
+                <a:spcPts val="300"/>
+              </a:spcAft>
+              <a:buNone/>
+            </a:pPr>
+            <a:r>
+              <a:rPr lang="en-US" sz="1200" i="1" dirty="0">
+                <a:solidFill>
+                  <a:srgbClr val="1C2833"/>
+                </a:solidFill>
+                <a:latin typeface="Arial" pitchFamily="34" charset="0"/>
+                <a:ea typeface="Arial" pitchFamily="34" charset="-122"/>
+                <a:cs typeface="Arial" pitchFamily="34" charset="-120"/>
+              </a:rPr>
+              <a:t>tejas</a:t>
+            </a:r>
+            <a:pPr algn="l" indent="0" marL="0">
+              <a:lnSpc>
+                <a:spcPts val="1620"/>
+              </a:lnSpc>
+              <a:spcAft>
+                <a:spcPts val="300"/>
+              </a:spcAft>
+              <a:buNone/>
+            </a:pPr>
+            <a:r>
+              <a:rPr lang="en-US" sz="1200" dirty="0">
+                <a:solidFill>
+                  <a:srgbClr val="1C2833"/>
+                </a:solidFill>
+                <a:latin typeface="Arial" pitchFamily="34" charset="0"/>
+                <a:ea typeface="Arial" pitchFamily="34" charset="-122"/>
+                <a:cs typeface="Arial" pitchFamily="34" charset="-120"/>
+              </a:rPr>
+              <a:t> doesn't fit anything in this room because nothing is on fire," ask them: is the tube light hot? Where is the warmth from? That's </a:t>
+            </a:r>
+            <a:pPr algn="l" indent="0" marL="0">
+              <a:lnSpc>
+                <a:spcPts val="1620"/>
+              </a:lnSpc>
+              <a:spcAft>
+                <a:spcPts val="300"/>
+              </a:spcAft>
+              <a:buNone/>
+            </a:pPr>
+            <a:r>
+              <a:rPr lang="en-US" sz="1200" i="1" dirty="0">
+                <a:solidFill>
+                  <a:srgbClr val="1C2833"/>
+                </a:solidFill>
+                <a:latin typeface="Arial" pitchFamily="34" charset="0"/>
+                <a:ea typeface="Arial" pitchFamily="34" charset="-122"/>
+                <a:cs typeface="Arial" pitchFamily="34" charset="-120"/>
+              </a:rPr>
+              <a:t>tejas</a:t>
+            </a:r>
+            <a:pPr algn="l" indent="0" marL="0">
+              <a:lnSpc>
+                <a:spcPts val="1620"/>
+              </a:lnSpc>
+              <a:spcAft>
+                <a:spcPts val="300"/>
+              </a:spcAft>
+              <a:buNone/>
+            </a:pPr>
+            <a:r>
+              <a:rPr lang="en-US" sz="1200" dirty="0">
+                <a:solidFill>
+                  <a:srgbClr val="1C2833"/>
+                </a:solidFill>
+                <a:latin typeface="Arial" pitchFamily="34" charset="0"/>
+                <a:ea typeface="Arial" pitchFamily="34" charset="-122"/>
+                <a:cs typeface="Arial" pitchFamily="34" charset="-120"/>
+              </a:rPr>
+              <a:t>.</a:t>
+            </a:r>
+            <a:endParaRPr lang="en-US" sz="1200" dirty="0"/>
+          </a:p>
+          <a:p>
+            <a:pPr algn="l" marL="342900" indent="-342900">
+              <a:lnSpc>
+                <a:spcPts val="1620"/>
+              </a:lnSpc>
+              <a:spcAft>
+                <a:spcPts val="300"/>
+              </a:spcAft>
+              <a:buSzPct val="100000"/>
+              <a:buChar char="•"/>
+            </a:pPr>
+            <a:r>
+              <a:rPr lang="en-US" sz="1200" dirty="0">
+                <a:solidFill>
+                  <a:srgbClr val="1C2833"/>
+                </a:solidFill>
+                <a:latin typeface="Arial" pitchFamily="34" charset="0"/>
+                <a:ea typeface="Arial" pitchFamily="34" charset="-122"/>
+                <a:cs typeface="Arial" pitchFamily="34" charset="-120"/>
+              </a:rPr>
+              <a:t>Watch for confusion on </a:t>
+            </a:r>
+            <a:pPr algn="l" indent="0" marL="0">
+              <a:lnSpc>
+                <a:spcPts val="1620"/>
+              </a:lnSpc>
+              <a:spcAft>
+                <a:spcPts val="300"/>
+              </a:spcAft>
+              <a:buNone/>
+            </a:pPr>
+            <a:r>
+              <a:rPr lang="en-US" sz="1200" i="1" dirty="0">
+                <a:solidFill>
+                  <a:srgbClr val="1C2833"/>
+                </a:solidFill>
+                <a:latin typeface="Arial" pitchFamily="34" charset="0"/>
+                <a:ea typeface="Arial" pitchFamily="34" charset="-122"/>
+                <a:cs typeface="Arial" pitchFamily="34" charset="-120"/>
+              </a:rPr>
+              <a:t>ākāśa</a:t>
+            </a:r>
+            <a:pPr algn="l" indent="0" marL="0">
+              <a:lnSpc>
+                <a:spcPts val="1620"/>
+              </a:lnSpc>
+              <a:spcAft>
+                <a:spcPts val="300"/>
+              </a:spcAft>
+              <a:buNone/>
+            </a:pPr>
+            <a:r>
+              <a:rPr lang="en-US" sz="1200" dirty="0">
+                <a:solidFill>
+                  <a:srgbClr val="1C2833"/>
+                </a:solidFill>
+                <a:latin typeface="Arial" pitchFamily="34" charset="0"/>
+                <a:ea typeface="Arial" pitchFamily="34" charset="-122"/>
+                <a:cs typeface="Arial" pitchFamily="34" charset="-120"/>
+              </a:rPr>
+              <a:t>. Several students will insist "there's nothing here" — say "yes, and that 'nothing-here' has a name, and the name is </a:t>
+            </a:r>
+            <a:pPr algn="l" indent="0" marL="0">
+              <a:lnSpc>
+                <a:spcPts val="1620"/>
+              </a:lnSpc>
+              <a:spcAft>
+                <a:spcPts val="300"/>
+              </a:spcAft>
+              <a:buNone/>
+            </a:pPr>
+            <a:r>
+              <a:rPr lang="en-US" sz="1200" i="1" dirty="0">
+                <a:solidFill>
+                  <a:srgbClr val="1C2833"/>
+                </a:solidFill>
+                <a:latin typeface="Arial" pitchFamily="34" charset="0"/>
+                <a:ea typeface="Arial" pitchFamily="34" charset="-122"/>
+                <a:cs typeface="Arial" pitchFamily="34" charset="-120"/>
+              </a:rPr>
+              <a:t>ākāśa</a:t>
+            </a:r>
+            <a:pPr algn="l" indent="0" marL="0">
+              <a:lnSpc>
+                <a:spcPts val="1620"/>
+              </a:lnSpc>
+              <a:spcAft>
+                <a:spcPts val="300"/>
+              </a:spcAft>
+              <a:buNone/>
+            </a:pPr>
+            <a:r>
+              <a:rPr lang="en-US" sz="1200" dirty="0">
+                <a:solidFill>
+                  <a:srgbClr val="1C2833"/>
+                </a:solidFill>
+                <a:latin typeface="Arial" pitchFamily="34" charset="0"/>
+                <a:ea typeface="Arial" pitchFamily="34" charset="-122"/>
+                <a:cs typeface="Arial" pitchFamily="34" charset="-120"/>
+              </a:rPr>
+              <a:t>." It's the medium other things sit in.</a:t>
+            </a:r>
+            <a:endParaRPr lang="en-US" sz="1200" dirty="0"/>
+          </a:p>
+        </p:txBody>
+      </p:sp>
+      <p:sp>
+        <p:nvSpPr>
+          <p:cNvPr id="5" name="Text 3"/>
+          <p:cNvSpPr/>
+          <p:nvPr/>
+        </p:nvSpPr>
+        <p:spPr>
+          <a:xfrm>
+            <a:off x="406301" y="4434929"/>
+            <a:ext cx="8498026" cy="213271"/>
+          </a:xfrm>
+          <a:prstGeom prst="rect">
+            <a:avLst/>
+          </a:prstGeom>
+          <a:noFill/>
+          <a:ln/>
+        </p:spPr>
+        <p:txBody>
+          <a:bodyPr wrap="square" lIns="0" tIns="0" rIns="0" bIns="0" rtlCol="0" anchor="t"/>
+          <a:lstStyle/>
+          <a:p>
+            <a:pPr algn="l" indent="0" marL="0">
+              <a:lnSpc>
+                <a:spcPts val="1680"/>
+              </a:lnSpc>
+              <a:spcBef>
+                <a:spcPts val="300"/>
+              </a:spcBef>
+              <a:spcAft>
+                <a:spcPts val="300"/>
+              </a:spcAft>
+              <a:buNone/>
+            </a:pPr>
+            <a:r>
+              <a:rPr lang="en-US" sz="1200" dirty="0">
+                <a:solidFill>
+                  <a:srgbClr val="1C2833"/>
+                </a:solidFill>
+                <a:latin typeface="Arial" pitchFamily="34" charset="0"/>
+                <a:ea typeface="Arial" pitchFamily="34" charset="-122"/>
+                <a:cs typeface="Arial" pitchFamily="34" charset="-120"/>
+              </a:rPr>
+              <a:t>Middle ·  · IKS Curriculum</a:t>
+            </a:r>
+            <a:endParaRPr lang="en-US" sz="1200" dirty="0"/>
+          </a:p>
+        </p:txBody>
+      </p:sp>
+    </p:spTree>
+  </p:cSld>
+  <p:clrMapOvr>
+    <a:masterClrMapping/>
+  </p:clrMapOvr>
+</p:sld>
+</file>
+
+<file path=ppt/slides/slide17.xml><?xml version="1.0" encoding="utf-8"?>
+<p:sld xmlns:a="http://schemas.openxmlformats.org/drawingml/2006/main" xmlns:r="http://schemas.openxmlformats.org/officeDocument/2006/relationships" xmlns:p="http://schemas.openxmlformats.org/presentationml/2006/main">
+  <p:cSld name="Slide 17">
+    <p:bg>
+      <p:bgPr>
+        <a:solidFill>
+          <a:srgbClr val="FFFFFF"/>
+        </a:solidFill>
+      </p:bgPr>
+    </p:bg>
+    <p:spTree>
+      <p:nvGrpSpPr>
+        <p:cNvPr id="1" name=""/>
+        <p:cNvGrpSpPr/>
+        <p:nvPr/>
+      </p:nvGrpSpPr>
+      <p:grpSpPr>
+        <a:xfrm>
+          <a:off x="0" y="0"/>
+          <a:ext cx="0" cy="0"/>
+          <a:chOff x="0" y="0"/>
+          <a:chExt cx="0" cy="0"/>
+        </a:xfrm>
+      </p:grpSpPr>
+      <p:sp>
+        <p:nvSpPr>
+          <p:cNvPr id="2" name="Text 0"/>
+          <p:cNvSpPr/>
+          <p:nvPr/>
+        </p:nvSpPr>
+        <p:spPr>
+          <a:xfrm>
+            <a:off x="0" y="0"/>
+            <a:ext cx="9144000" cy="101501"/>
+          </a:xfrm>
+          <a:prstGeom prst="rect">
+            <a:avLst/>
+          </a:prstGeom>
+          <a:solidFill>
+            <a:srgbClr val="277884"/>
+          </a:solidFill>
+          <a:ln/>
+        </p:spPr>
+        <p:txBody>
+          <a:bodyPr wrap="square" rtlCol="0" anchor="ctr"/>
+          <a:lstStyle/>
+          <a:p>
+            <a:pPr indent="0" marL="0">
+              <a:buNone/>
+            </a:pPr>
+            <a:endParaRPr lang="en-US" dirty="0"/>
+          </a:p>
+        </p:txBody>
+      </p:sp>
+      <p:sp>
+        <p:nvSpPr>
+          <p:cNvPr id="3" name="Text 1"/>
+          <p:cNvSpPr/>
+          <p:nvPr/>
+        </p:nvSpPr>
+        <p:spPr>
+          <a:xfrm>
+            <a:off x="406301" y="457051"/>
+            <a:ext cx="8498026" cy="274290"/>
+          </a:xfrm>
+          <a:prstGeom prst="rect">
+            <a:avLst/>
+          </a:prstGeom>
+          <a:noFill/>
+          <a:ln/>
+        </p:spPr>
+        <p:txBody>
+          <a:bodyPr wrap="square" lIns="0" tIns="0" rIns="0" bIns="0" rtlCol="0" anchor="t"/>
+          <a:lstStyle/>
+          <a:p>
+            <a:pPr algn="l" indent="0" marL="0">
+              <a:lnSpc>
+                <a:spcPts val="2160"/>
+              </a:lnSpc>
+              <a:spcBef>
+                <a:spcPts val="600"/>
+              </a:spcBef>
+              <a:spcAft>
+                <a:spcPts val="800"/>
+              </a:spcAft>
+              <a:buNone/>
+            </a:pPr>
+            <a:r>
+              <a:rPr lang="en-US" sz="1800" b="1" dirty="0">
+                <a:solidFill>
+                  <a:srgbClr val="FE4447"/>
+                </a:solidFill>
+                <a:latin typeface="Georgia" pitchFamily="34" charset="0"/>
+                <a:ea typeface="Georgia" pitchFamily="34" charset="-122"/>
+                <a:cs typeface="Georgia" pitchFamily="34" charset="-120"/>
+              </a:rPr>
               <a:t>Citation(s) used in this lesson</a:t>
             </a:r>
             <a:endParaRPr lang="en-US" sz="1800" dirty="0"/>
@@ -3795,7 +5860,7 @@
                 <a:ea typeface="Georgia" pitchFamily="34" charset="-122"/>
                 <a:cs typeface="Georgia" pitchFamily="34" charset="-120"/>
               </a:rPr>
-              <a:t>Materials</a:t>
+              <a:t>Learning objective</a:t>
             </a:r>
             <a:endParaRPr lang="en-US" sz="1800" dirty="0"/>
           </a:p>
@@ -3810,7 +5875,7 @@
         <p:spPr>
           <a:xfrm>
             <a:off x="406301" y="870942"/>
-            <a:ext cx="8498026" cy="639812"/>
+            <a:ext cx="8498026" cy="426541"/>
           </a:xfrm>
           <a:prstGeom prst="rect">
             <a:avLst/>
@@ -3843,7 +5908,7 @@
                 <a:ea typeface="Arial" pitchFamily="34" charset="-122"/>
                 <a:cs typeface="Arial" pitchFamily="34" charset="-120"/>
               </a:rPr>
-              <a:t>– Five sample objects arranged at the front: a rock or brick (</a:t>
+              <a:t>By the end of this lesson, students will name the five great elements (</a:t>
             </a:r>
             <a:pPr algn="l" indent="0" marL="0">
               <a:lnSpc>
@@ -3866,7 +5931,7 @@
                 <a:ea typeface="Arial" pitchFamily="34" charset="-122"/>
                 <a:cs typeface="Arial" pitchFamily="34" charset="-120"/>
               </a:rPr>
-              <a:t>pṛthvī</a:t>
+              <a:t>pañca-mahābhūta</a:t>
             </a:r>
             <a:pPr algn="l" indent="0" marL="0">
               <a:lnSpc>
@@ -3889,191 +5954,7 @@
                 <a:ea typeface="Arial" pitchFamily="34" charset="-122"/>
                 <a:cs typeface="Arial" pitchFamily="34" charset="-120"/>
               </a:rPr>
-              <a:t>), a transparent jar of water (</a:t>
-            </a:r>
-            <a:pPr algn="l" indent="0" marL="0">
-              <a:lnSpc>
-                <a:spcPts val="1680"/>
-              </a:lnSpc>
-              <a:spcBef>
-                <a:spcPts val="300"/>
-              </a:spcBef>
-              <a:spcAft>
-                <a:spcPts val="300"/>
-              </a:spcAft>
-              <a:buNone/>
-            </a:pPr>
-            <a:r>
-              <a:rPr lang="en-US" sz="1200" i="1" dirty="0">
-                <a:solidFill>
-                  <a:srgbClr val="1C2833"/>
-                </a:solidFill>
-                <a:latin typeface="Arial" pitchFamily="34" charset="0"/>
-                <a:ea typeface="Arial" pitchFamily="34" charset="-122"/>
-                <a:cs typeface="Arial" pitchFamily="34" charset="-120"/>
-              </a:rPr>
-              <a:t>ap</a:t>
-            </a:r>
-            <a:pPr algn="l" indent="0" marL="0">
-              <a:lnSpc>
-                <a:spcPts val="1680"/>
-              </a:lnSpc>
-              <a:spcBef>
-                <a:spcPts val="300"/>
-              </a:spcBef>
-              <a:spcAft>
-                <a:spcPts val="300"/>
-              </a:spcAft>
-              <a:buNone/>
-            </a:pPr>
-            <a:r>
-              <a:rPr lang="en-US" sz="1200" dirty="0">
-                <a:solidFill>
-                  <a:srgbClr val="1C2833"/>
-                </a:solidFill>
-                <a:latin typeface="Arial" pitchFamily="34" charset="0"/>
-                <a:ea typeface="Arial" pitchFamily="34" charset="-122"/>
-                <a:cs typeface="Arial" pitchFamily="34" charset="-120"/>
-              </a:rPr>
-              <a:t>), an unlit candle or oil lamp (</a:t>
-            </a:r>
-            <a:pPr algn="l" indent="0" marL="0">
-              <a:lnSpc>
-                <a:spcPts val="1680"/>
-              </a:lnSpc>
-              <a:spcBef>
-                <a:spcPts val="300"/>
-              </a:spcBef>
-              <a:spcAft>
-                <a:spcPts val="300"/>
-              </a:spcAft>
-              <a:buNone/>
-            </a:pPr>
-            <a:r>
-              <a:rPr lang="en-US" sz="1200" i="1" dirty="0">
-                <a:solidFill>
-                  <a:srgbClr val="1C2833"/>
-                </a:solidFill>
-                <a:latin typeface="Arial" pitchFamily="34" charset="0"/>
-                <a:ea typeface="Arial" pitchFamily="34" charset="-122"/>
-                <a:cs typeface="Arial" pitchFamily="34" charset="-120"/>
-              </a:rPr>
-              <a:t>tejas</a:t>
-            </a:r>
-            <a:pPr algn="l" indent="0" marL="0">
-              <a:lnSpc>
-                <a:spcPts val="1680"/>
-              </a:lnSpc>
-              <a:spcBef>
-                <a:spcPts val="300"/>
-              </a:spcBef>
-              <a:spcAft>
-                <a:spcPts val="300"/>
-              </a:spcAft>
-              <a:buNone/>
-            </a:pPr>
-            <a:r>
-              <a:rPr lang="en-US" sz="1200" dirty="0">
-                <a:solidFill>
-                  <a:srgbClr val="1C2833"/>
-                </a:solidFill>
-                <a:latin typeface="Arial" pitchFamily="34" charset="0"/>
-                <a:ea typeface="Arial" pitchFamily="34" charset="-122"/>
-                <a:cs typeface="Arial" pitchFamily="34" charset="-120"/>
-              </a:rPr>
-              <a:t>), an inflated balloon (</a:t>
-            </a:r>
-            <a:pPr algn="l" indent="0" marL="0">
-              <a:lnSpc>
-                <a:spcPts val="1680"/>
-              </a:lnSpc>
-              <a:spcBef>
-                <a:spcPts val="300"/>
-              </a:spcBef>
-              <a:spcAft>
-                <a:spcPts val="300"/>
-              </a:spcAft>
-              <a:buNone/>
-            </a:pPr>
-            <a:r>
-              <a:rPr lang="en-US" sz="1200" i="1" dirty="0">
-                <a:solidFill>
-                  <a:srgbClr val="1C2833"/>
-                </a:solidFill>
-                <a:latin typeface="Arial" pitchFamily="34" charset="0"/>
-                <a:ea typeface="Arial" pitchFamily="34" charset="-122"/>
-                <a:cs typeface="Arial" pitchFamily="34" charset="-120"/>
-              </a:rPr>
-              <a:t>vāyu</a:t>
-            </a:r>
-            <a:pPr algn="l" indent="0" marL="0">
-              <a:lnSpc>
-                <a:spcPts val="1680"/>
-              </a:lnSpc>
-              <a:spcBef>
-                <a:spcPts val="300"/>
-              </a:spcBef>
-              <a:spcAft>
-                <a:spcPts val="300"/>
-              </a:spcAft>
-              <a:buNone/>
-            </a:pPr>
-            <a:r>
-              <a:rPr lang="en-US" sz="1200" dirty="0">
-                <a:solidFill>
-                  <a:srgbClr val="1C2833"/>
-                </a:solidFill>
-                <a:latin typeface="Arial" pitchFamily="34" charset="0"/>
-                <a:ea typeface="Arial" pitchFamily="34" charset="-122"/>
-                <a:cs typeface="Arial" pitchFamily="34" charset="-120"/>
-              </a:rPr>
-              <a:t>), an empty cardboard box with the flaps open (</a:t>
-            </a:r>
-            <a:pPr algn="l" indent="0" marL="0">
-              <a:lnSpc>
-                <a:spcPts val="1680"/>
-              </a:lnSpc>
-              <a:spcBef>
-                <a:spcPts val="300"/>
-              </a:spcBef>
-              <a:spcAft>
-                <a:spcPts val="300"/>
-              </a:spcAft>
-              <a:buNone/>
-            </a:pPr>
-            <a:r>
-              <a:rPr lang="en-US" sz="1200" i="1" dirty="0">
-                <a:solidFill>
-                  <a:srgbClr val="1C2833"/>
-                </a:solidFill>
-                <a:latin typeface="Arial" pitchFamily="34" charset="0"/>
-                <a:ea typeface="Arial" pitchFamily="34" charset="-122"/>
-                <a:cs typeface="Arial" pitchFamily="34" charset="-120"/>
-              </a:rPr>
-              <a:t>ākāśa</a:t>
-            </a:r>
-            <a:pPr algn="l" indent="0" marL="0">
-              <a:lnSpc>
-                <a:spcPts val="1680"/>
-              </a:lnSpc>
-              <a:spcBef>
-                <a:spcPts val="300"/>
-              </a:spcBef>
-              <a:spcAft>
-                <a:spcPts val="300"/>
-              </a:spcAft>
-              <a:buNone/>
-            </a:pPr>
-            <a:r>
-              <a:rPr lang="en-US" sz="1200" dirty="0">
-                <a:solidFill>
-                  <a:srgbClr val="1C2833"/>
-                </a:solidFill>
-                <a:latin typeface="Arial" pitchFamily="34" charset="0"/>
-                <a:ea typeface="Arial" pitchFamily="34" charset="-122"/>
-                <a:cs typeface="Arial" pitchFamily="34" charset="-120"/>
-              </a:rPr>
-              <a:t>). – Board / chart paper. – Five blank index cards per student.</a:t>
+              <a:t>) in Sanskrit and English and give one example of each from their own classroom.</a:t>
             </a:r>
             <a:endParaRPr lang="en-US" sz="1200" dirty="0"/>
           </a:p>
@@ -4231,7 +6112,7 @@
                 <a:ea typeface="Georgia" pitchFamily="34" charset="-122"/>
                 <a:cs typeface="Georgia" pitchFamily="34" charset="-120"/>
               </a:rPr>
-              <a:t>Vocabulary introduced today</a:t>
+              <a:t>Materials</a:t>
             </a:r>
             <a:endParaRPr lang="en-US" sz="1800" dirty="0"/>
           </a:p>
@@ -4246,7 +6127,7 @@
         <p:spPr>
           <a:xfrm>
             <a:off x="634901" y="883593"/>
-            <a:ext cx="8102798" cy="731341"/>
+            <a:ext cx="8102798" cy="975122"/>
           </a:xfrm>
           <a:prstGeom prst="rect">
             <a:avLst/>
@@ -4269,6 +6150,26 @@
               <a:buChar char="•"/>
             </a:pPr>
             <a:r>
+              <a:rPr lang="en-US" sz="1200" dirty="0">
+                <a:solidFill>
+                  <a:srgbClr val="1C2833"/>
+                </a:solidFill>
+                <a:latin typeface="Arial" pitchFamily="34" charset="0"/>
+                <a:ea typeface="Arial" pitchFamily="34" charset="-122"/>
+                <a:cs typeface="Arial" pitchFamily="34" charset="-120"/>
+              </a:rPr>
+              <a:t>Five sample objects arranged at the front: a rock or brick (</a:t>
+            </a:r>
+            <a:pPr algn="l" indent="0" marL="0">
+              <a:lnSpc>
+                <a:spcPts val="1620"/>
+              </a:lnSpc>
+              <a:spcAft>
+                <a:spcPts val="300"/>
+              </a:spcAft>
+              <a:buNone/>
+            </a:pPr>
+            <a:r>
               <a:rPr lang="en-US" sz="1200" i="1" dirty="0">
                 <a:solidFill>
                   <a:srgbClr val="1C2833"/>
@@ -4277,7 +6178,7 @@
                 <a:ea typeface="Arial" pitchFamily="34" charset="-122"/>
                 <a:cs typeface="Arial" pitchFamily="34" charset="-120"/>
               </a:rPr>
-              <a:t>pañca-mahābhūta</a:t>
+              <a:t>pṛthvī</a:t>
             </a:r>
             <a:pPr algn="l" indent="0" marL="0">
               <a:lnSpc>
@@ -4297,7 +6198,167 @@
                 <a:ea typeface="Arial" pitchFamily="34" charset="-122"/>
                 <a:cs typeface="Arial" pitchFamily="34" charset="-120"/>
               </a:rPr>
-              <a:t> (IAST: pañca-mahā-bhūta; lit. "five great elements") — the framework that organises matter and space into earth, water, fire, air, and space.</a:t>
+              <a:t>), a transparent jar of water (</a:t>
+            </a:r>
+            <a:pPr algn="l" indent="0" marL="0">
+              <a:lnSpc>
+                <a:spcPts val="1620"/>
+              </a:lnSpc>
+              <a:spcAft>
+                <a:spcPts val="300"/>
+              </a:spcAft>
+              <a:buNone/>
+            </a:pPr>
+            <a:r>
+              <a:rPr lang="en-US" sz="1200" i="1" dirty="0">
+                <a:solidFill>
+                  <a:srgbClr val="1C2833"/>
+                </a:solidFill>
+                <a:latin typeface="Arial" pitchFamily="34" charset="0"/>
+                <a:ea typeface="Arial" pitchFamily="34" charset="-122"/>
+                <a:cs typeface="Arial" pitchFamily="34" charset="-120"/>
+              </a:rPr>
+              <a:t>ap</a:t>
+            </a:r>
+            <a:pPr algn="l" indent="0" marL="0">
+              <a:lnSpc>
+                <a:spcPts val="1620"/>
+              </a:lnSpc>
+              <a:spcAft>
+                <a:spcPts val="300"/>
+              </a:spcAft>
+              <a:buNone/>
+            </a:pPr>
+            <a:r>
+              <a:rPr lang="en-US" sz="1200" dirty="0">
+                <a:solidFill>
+                  <a:srgbClr val="1C2833"/>
+                </a:solidFill>
+                <a:latin typeface="Arial" pitchFamily="34" charset="0"/>
+                <a:ea typeface="Arial" pitchFamily="34" charset="-122"/>
+                <a:cs typeface="Arial" pitchFamily="34" charset="-120"/>
+              </a:rPr>
+              <a:t>), an unlit candle or oil lamp (</a:t>
+            </a:r>
+            <a:pPr algn="l" indent="0" marL="0">
+              <a:lnSpc>
+                <a:spcPts val="1620"/>
+              </a:lnSpc>
+              <a:spcAft>
+                <a:spcPts val="300"/>
+              </a:spcAft>
+              <a:buNone/>
+            </a:pPr>
+            <a:r>
+              <a:rPr lang="en-US" sz="1200" i="1" dirty="0">
+                <a:solidFill>
+                  <a:srgbClr val="1C2833"/>
+                </a:solidFill>
+                <a:latin typeface="Arial" pitchFamily="34" charset="0"/>
+                <a:ea typeface="Arial" pitchFamily="34" charset="-122"/>
+                <a:cs typeface="Arial" pitchFamily="34" charset="-120"/>
+              </a:rPr>
+              <a:t>tejas</a:t>
+            </a:r>
+            <a:pPr algn="l" indent="0" marL="0">
+              <a:lnSpc>
+                <a:spcPts val="1620"/>
+              </a:lnSpc>
+              <a:spcAft>
+                <a:spcPts val="300"/>
+              </a:spcAft>
+              <a:buNone/>
+            </a:pPr>
+            <a:r>
+              <a:rPr lang="en-US" sz="1200" dirty="0">
+                <a:solidFill>
+                  <a:srgbClr val="1C2833"/>
+                </a:solidFill>
+                <a:latin typeface="Arial" pitchFamily="34" charset="0"/>
+                <a:ea typeface="Arial" pitchFamily="34" charset="-122"/>
+                <a:cs typeface="Arial" pitchFamily="34" charset="-120"/>
+              </a:rPr>
+              <a:t>), an inflated balloon (</a:t>
+            </a:r>
+            <a:pPr algn="l" indent="0" marL="0">
+              <a:lnSpc>
+                <a:spcPts val="1620"/>
+              </a:lnSpc>
+              <a:spcAft>
+                <a:spcPts val="300"/>
+              </a:spcAft>
+              <a:buNone/>
+            </a:pPr>
+            <a:r>
+              <a:rPr lang="en-US" sz="1200" i="1" dirty="0">
+                <a:solidFill>
+                  <a:srgbClr val="1C2833"/>
+                </a:solidFill>
+                <a:latin typeface="Arial" pitchFamily="34" charset="0"/>
+                <a:ea typeface="Arial" pitchFamily="34" charset="-122"/>
+                <a:cs typeface="Arial" pitchFamily="34" charset="-120"/>
+              </a:rPr>
+              <a:t>vāyu</a:t>
+            </a:r>
+            <a:pPr algn="l" indent="0" marL="0">
+              <a:lnSpc>
+                <a:spcPts val="1620"/>
+              </a:lnSpc>
+              <a:spcAft>
+                <a:spcPts val="300"/>
+              </a:spcAft>
+              <a:buNone/>
+            </a:pPr>
+            <a:r>
+              <a:rPr lang="en-US" sz="1200" dirty="0">
+                <a:solidFill>
+                  <a:srgbClr val="1C2833"/>
+                </a:solidFill>
+                <a:latin typeface="Arial" pitchFamily="34" charset="0"/>
+                <a:ea typeface="Arial" pitchFamily="34" charset="-122"/>
+                <a:cs typeface="Arial" pitchFamily="34" charset="-120"/>
+              </a:rPr>
+              <a:t>), an empty cardboard box with the flaps open (</a:t>
+            </a:r>
+            <a:pPr algn="l" indent="0" marL="0">
+              <a:lnSpc>
+                <a:spcPts val="1620"/>
+              </a:lnSpc>
+              <a:spcAft>
+                <a:spcPts val="300"/>
+              </a:spcAft>
+              <a:buNone/>
+            </a:pPr>
+            <a:r>
+              <a:rPr lang="en-US" sz="1200" i="1" dirty="0">
+                <a:solidFill>
+                  <a:srgbClr val="1C2833"/>
+                </a:solidFill>
+                <a:latin typeface="Arial" pitchFamily="34" charset="0"/>
+                <a:ea typeface="Arial" pitchFamily="34" charset="-122"/>
+                <a:cs typeface="Arial" pitchFamily="34" charset="-120"/>
+              </a:rPr>
+              <a:t>ākāśa</a:t>
+            </a:r>
+            <a:pPr algn="l" indent="0" marL="0">
+              <a:lnSpc>
+                <a:spcPts val="1620"/>
+              </a:lnSpc>
+              <a:spcAft>
+                <a:spcPts val="300"/>
+              </a:spcAft>
+              <a:buNone/>
+            </a:pPr>
+            <a:r>
+              <a:rPr lang="en-US" sz="1200" dirty="0">
+                <a:solidFill>
+                  <a:srgbClr val="1C2833"/>
+                </a:solidFill>
+                <a:latin typeface="Arial" pitchFamily="34" charset="0"/>
+                <a:ea typeface="Arial" pitchFamily="34" charset="-122"/>
+                <a:cs typeface="Arial" pitchFamily="34" charset="-120"/>
+              </a:rPr>
+              <a:t>).</a:t>
             </a:r>
             <a:endParaRPr lang="en-US" sz="1200" dirty="0"/>
           </a:p>
@@ -4313,26 +6374,6 @@
               <a:buChar char="•"/>
             </a:pPr>
             <a:r>
-              <a:rPr lang="en-US" sz="1200" i="1" dirty="0">
-                <a:solidFill>
-                  <a:srgbClr val="1C2833"/>
-                </a:solidFill>
-                <a:latin typeface="Arial" pitchFamily="34" charset="0"/>
-                <a:ea typeface="Arial" pitchFamily="34" charset="-122"/>
-                <a:cs typeface="Arial" pitchFamily="34" charset="-120"/>
-              </a:rPr>
-              <a:t>pṛthvī, ap, tejas, vāyu, ākāśa</a:t>
-            </a:r>
-            <a:pPr algn="l" indent="0" marL="0">
-              <a:lnSpc>
-                <a:spcPts val="1620"/>
-              </a:lnSpc>
-              <a:spcAft>
-                <a:spcPts val="300"/>
-              </a:spcAft>
-              <a:buNone/>
-            </a:pPr>
-            <a:r>
               <a:rPr lang="en-US" sz="1200" dirty="0">
                 <a:solidFill>
                   <a:srgbClr val="1C2833"/>
@@ -4341,7 +6382,31 @@
                 <a:ea typeface="Arial" pitchFamily="34" charset="-122"/>
                 <a:cs typeface="Arial" pitchFamily="34" charset="-120"/>
               </a:rPr>
-              <a:t> — the five elements themselves; see glossary.</a:t>
+              <a:t>Board / chart paper.</a:t>
+            </a:r>
+            <a:endParaRPr lang="en-US" sz="1200" dirty="0"/>
+          </a:p>
+          <a:p>
+            <a:pPr algn="l" marL="342900" indent="-342900">
+              <a:lnSpc>
+                <a:spcPts val="1620"/>
+              </a:lnSpc>
+              <a:spcAft>
+                <a:spcPts val="300"/>
+              </a:spcAft>
+              <a:buSzPct val="100000"/>
+              <a:buChar char="•"/>
+            </a:pPr>
+            <a:r>
+              <a:rPr lang="en-US" sz="1200" dirty="0">
+                <a:solidFill>
+                  <a:srgbClr val="1C2833"/>
+                </a:solidFill>
+                <a:latin typeface="Arial" pitchFamily="34" charset="0"/>
+                <a:ea typeface="Arial" pitchFamily="34" charset="-122"/>
+                <a:cs typeface="Arial" pitchFamily="34" charset="-120"/>
+              </a:rPr>
+              <a:t>Five blank index cards per student.</a:t>
             </a:r>
             <a:endParaRPr lang="en-US" sz="1200" dirty="0"/>
           </a:p>
@@ -4499,7 +6564,7 @@
                 <a:ea typeface="Georgia" pitchFamily="34" charset="-122"/>
                 <a:cs typeface="Georgia" pitchFamily="34" charset="-120"/>
               </a:rPr>
-              <a:t>Lesson flow</a:t>
+              <a:t>Vocabulary introduced today</a:t>
             </a:r>
             <a:endParaRPr lang="en-US" sz="1800" dirty="0"/>
           </a:p>
@@ -4508,6 +6573,116 @@
       <p:sp>
         <p:nvSpPr>
           <p:cNvPr id="4" name="Text 2"/>
+          <p:cNvSpPr/>
+          <p:nvPr/>
+        </p:nvSpPr>
+        <p:spPr>
+          <a:xfrm>
+            <a:off x="634901" y="883593"/>
+            <a:ext cx="8102798" cy="731341"/>
+          </a:xfrm>
+          <a:prstGeom prst="rect">
+            <a:avLst/>
+          </a:prstGeom>
+          <a:noFill/>
+          <a:ln/>
+        </p:spPr>
+        <p:txBody>
+          <a:bodyPr wrap="square" lIns="0" tIns="0" rIns="0" bIns="0" rtlCol="0" anchor="t"/>
+          <a:lstStyle/>
+          <a:p>
+            <a:pPr algn="l" marL="342900" indent="-342900">
+              <a:lnSpc>
+                <a:spcPts val="1620"/>
+              </a:lnSpc>
+              <a:spcAft>
+                <a:spcPts val="300"/>
+              </a:spcAft>
+              <a:buSzPct val="100000"/>
+              <a:buChar char="•"/>
+            </a:pPr>
+            <a:r>
+              <a:rPr lang="en-US" sz="1200" i="1" dirty="0">
+                <a:solidFill>
+                  <a:srgbClr val="1C2833"/>
+                </a:solidFill>
+                <a:latin typeface="Arial" pitchFamily="34" charset="0"/>
+                <a:ea typeface="Arial" pitchFamily="34" charset="-122"/>
+                <a:cs typeface="Arial" pitchFamily="34" charset="-120"/>
+              </a:rPr>
+              <a:t>pañca-mahābhūta</a:t>
+            </a:r>
+            <a:pPr algn="l" indent="0" marL="0">
+              <a:lnSpc>
+                <a:spcPts val="1620"/>
+              </a:lnSpc>
+              <a:spcAft>
+                <a:spcPts val="300"/>
+              </a:spcAft>
+              <a:buNone/>
+            </a:pPr>
+            <a:r>
+              <a:rPr lang="en-US" sz="1200" dirty="0">
+                <a:solidFill>
+                  <a:srgbClr val="1C2833"/>
+                </a:solidFill>
+                <a:latin typeface="Arial" pitchFamily="34" charset="0"/>
+                <a:ea typeface="Arial" pitchFamily="34" charset="-122"/>
+                <a:cs typeface="Arial" pitchFamily="34" charset="-120"/>
+              </a:rPr>
+              <a:t> (IAST: pañca-mahā-bhūta; lit. "five great elements") — the framework that organises matter and space into earth, water, fire, air, and space.</a:t>
+            </a:r>
+            <a:endParaRPr lang="en-US" sz="1200" dirty="0"/>
+          </a:p>
+          <a:p>
+            <a:pPr algn="l" marL="342900" indent="-342900">
+              <a:lnSpc>
+                <a:spcPts val="1620"/>
+              </a:lnSpc>
+              <a:spcAft>
+                <a:spcPts val="300"/>
+              </a:spcAft>
+              <a:buSzPct val="100000"/>
+              <a:buChar char="•"/>
+            </a:pPr>
+            <a:r>
+              <a:rPr lang="en-US" sz="1200" i="1" dirty="0">
+                <a:solidFill>
+                  <a:srgbClr val="1C2833"/>
+                </a:solidFill>
+                <a:latin typeface="Arial" pitchFamily="34" charset="0"/>
+                <a:ea typeface="Arial" pitchFamily="34" charset="-122"/>
+                <a:cs typeface="Arial" pitchFamily="34" charset="-120"/>
+              </a:rPr>
+              <a:t>pṛthvī, ap, tejas, vāyu, ākāśa</a:t>
+            </a:r>
+            <a:pPr algn="l" indent="0" marL="0">
+              <a:lnSpc>
+                <a:spcPts val="1620"/>
+              </a:lnSpc>
+              <a:spcAft>
+                <a:spcPts val="300"/>
+              </a:spcAft>
+              <a:buNone/>
+            </a:pPr>
+            <a:r>
+              <a:rPr lang="en-US" sz="1200" dirty="0">
+                <a:solidFill>
+                  <a:srgbClr val="1C2833"/>
+                </a:solidFill>
+                <a:latin typeface="Arial" pitchFamily="34" charset="0"/>
+                <a:ea typeface="Arial" pitchFamily="34" charset="-122"/>
+                <a:cs typeface="Arial" pitchFamily="34" charset="-120"/>
+              </a:rPr>
+              <a:t> — the five elements themselves; see glossary.</a:t>
+            </a:r>
+            <a:endParaRPr lang="en-US" sz="1200" dirty="0"/>
+          </a:p>
+        </p:txBody>
+      </p:sp>
+      <p:sp>
+        <p:nvSpPr>
+          <p:cNvPr id="5" name="Text 3"/>
           <p:cNvSpPr/>
           <p:nvPr/>
         </p:nvSpPr>
@@ -4657,7 +6832,7 @@
                 <a:ea typeface="Georgia" pitchFamily="34" charset="-122"/>
                 <a:cs typeface="Georgia" pitchFamily="34" charset="-120"/>
               </a:rPr>
-              <a:t>Warm-up (5 min)</a:t>
+              <a:t>Lesson flow</a:t>
             </a:r>
             <a:endParaRPr lang="en-US" sz="1800" dirty="0"/>
           </a:p>
@@ -4666,146 +6841,6 @@
       <p:sp>
         <p:nvSpPr>
           <p:cNvPr id="4" name="Text 2"/>
-          <p:cNvSpPr/>
-          <p:nvPr/>
-        </p:nvSpPr>
-        <p:spPr>
-          <a:xfrm>
-            <a:off x="406301" y="870942"/>
-            <a:ext cx="8498026" cy="426541"/>
-          </a:xfrm>
-          <a:prstGeom prst="rect">
-            <a:avLst/>
-          </a:prstGeom>
-          <a:noFill/>
-          <a:ln/>
-        </p:spPr>
-        <p:txBody>
-          <a:bodyPr wrap="square" lIns="0" tIns="0" rIns="0" bIns="0" rtlCol="0" anchor="t"/>
-          <a:lstStyle/>
-          <a:p>
-            <a:pPr algn="l" indent="0" marL="0">
-              <a:lnSpc>
-                <a:spcPts val="1680"/>
-              </a:lnSpc>
-              <a:spcBef>
-                <a:spcPts val="300"/>
-              </a:spcBef>
-              <a:spcAft>
-                <a:spcPts val="300"/>
-              </a:spcAft>
-              <a:buNone/>
-            </a:pPr>
-            <a:r>
-              <a:rPr lang="en-US" sz="1200" dirty="0">
-                <a:solidFill>
-                  <a:srgbClr val="1C2833"/>
-                </a:solidFill>
-                <a:latin typeface="Arial" pitchFamily="34" charset="0"/>
-                <a:ea typeface="Arial" pitchFamily="34" charset="-122"/>
-                <a:cs typeface="Arial" pitchFamily="34" charset="-120"/>
-              </a:rPr>
-              <a:t>– Teacher: "Look around this room without moving. What is everything you see </a:t>
-            </a:r>
-            <a:pPr algn="l" indent="0" marL="0">
-              <a:lnSpc>
-                <a:spcPts val="1680"/>
-              </a:lnSpc>
-              <a:spcBef>
-                <a:spcPts val="300"/>
-              </a:spcBef>
-              <a:spcAft>
-                <a:spcPts val="300"/>
-              </a:spcAft>
-              <a:buNone/>
-            </a:pPr>
-            <a:r>
-              <a:rPr lang="en-US" sz="1200" i="1" dirty="0">
-                <a:solidFill>
-                  <a:srgbClr val="1C2833"/>
-                </a:solidFill>
-                <a:latin typeface="Arial" pitchFamily="34" charset="0"/>
-                <a:ea typeface="Arial" pitchFamily="34" charset="-122"/>
-                <a:cs typeface="Arial" pitchFamily="34" charset="-120"/>
-              </a:rPr>
-              <a:t>made of</a:t>
-            </a:r>
-            <a:pPr algn="l" indent="0" marL="0">
-              <a:lnSpc>
-                <a:spcPts val="1680"/>
-              </a:lnSpc>
-              <a:spcBef>
-                <a:spcPts val="300"/>
-              </a:spcBef>
-              <a:spcAft>
-                <a:spcPts val="300"/>
-              </a:spcAft>
-              <a:buNone/>
-            </a:pPr>
-            <a:r>
-              <a:rPr lang="en-US" sz="1200" dirty="0">
-                <a:solidFill>
-                  <a:srgbClr val="1C2833"/>
-                </a:solidFill>
-                <a:latin typeface="Arial" pitchFamily="34" charset="0"/>
-                <a:ea typeface="Arial" pitchFamily="34" charset="-122"/>
-                <a:cs typeface="Arial" pitchFamily="34" charset="-120"/>
-              </a:rPr>
-              <a:t>? Don't tell me the </a:t>
-            </a:r>
-            <a:pPr algn="l" indent="0" marL="0">
-              <a:lnSpc>
-                <a:spcPts val="1680"/>
-              </a:lnSpc>
-              <a:spcBef>
-                <a:spcPts val="300"/>
-              </a:spcBef>
-              <a:spcAft>
-                <a:spcPts val="300"/>
-              </a:spcAft>
-              <a:buNone/>
-            </a:pPr>
-            <a:r>
-              <a:rPr lang="en-US" sz="1200" i="1" dirty="0">
-                <a:solidFill>
-                  <a:srgbClr val="1C2833"/>
-                </a:solidFill>
-                <a:latin typeface="Arial" pitchFamily="34" charset="0"/>
-                <a:ea typeface="Arial" pitchFamily="34" charset="-122"/>
-                <a:cs typeface="Arial" pitchFamily="34" charset="-120"/>
-              </a:rPr>
-              <a:t>name</a:t>
-            </a:r>
-            <a:pPr algn="l" indent="0" marL="0">
-              <a:lnSpc>
-                <a:spcPts val="1680"/>
-              </a:lnSpc>
-              <a:spcBef>
-                <a:spcPts val="300"/>
-              </a:spcBef>
-              <a:spcAft>
-                <a:spcPts val="300"/>
-              </a:spcAft>
-              <a:buNone/>
-            </a:pPr>
-            <a:r>
-              <a:rPr lang="en-US" sz="1200" dirty="0">
-                <a:solidFill>
-                  <a:srgbClr val="1C2833"/>
-                </a:solidFill>
-                <a:latin typeface="Arial" pitchFamily="34" charset="0"/>
-                <a:ea typeface="Arial" pitchFamily="34" charset="-122"/>
-                <a:cs typeface="Arial" pitchFamily="34" charset="-120"/>
-              </a:rPr>
-              <a:t> — tell me what kind of stuff it is." – Take 4 quick answers. Don't correct anyone. Write all answers on the board.</a:t>
-            </a:r>
-            <a:endParaRPr lang="en-US" sz="1200" dirty="0"/>
-          </a:p>
-        </p:txBody>
-      </p:sp>
-      <p:sp>
-        <p:nvSpPr>
-          <p:cNvPr id="5" name="Text 3"/>
           <p:cNvSpPr/>
           <p:nvPr/>
         </p:nvSpPr>
@@ -4955,7 +6990,7 @@
                 <a:ea typeface="Georgia" pitchFamily="34" charset="-122"/>
                 <a:cs typeface="Georgia" pitchFamily="34" charset="-120"/>
               </a:rPr>
-              <a:t>Core (20 min)</a:t>
+              <a:t>Warm-up (5 min)</a:t>
             </a:r>
             <a:endParaRPr lang="en-US" sz="1800" dirty="0"/>
           </a:p>
@@ -4970,7 +7005,7 @@
         <p:spPr>
           <a:xfrm>
             <a:off x="634901" y="883593"/>
-            <a:ext cx="8102798" cy="281880"/>
+            <a:ext cx="8102798" cy="731341"/>
           </a:xfrm>
           <a:prstGeom prst="rect">
             <a:avLst/>
@@ -5001,7 +7036,7 @@
                 <a:ea typeface="Arial" pitchFamily="34" charset="-122"/>
                 <a:cs typeface="Arial" pitchFamily="34" charset="-120"/>
               </a:rPr>
-              <a:t>Reveal the five objects on the table one at a time. For each, ask: </a:t>
+              <a:t>Teacher: "Look around this room without moving. What is everything you see </a:t>
             </a:r>
             <a:pPr algn="l" indent="0" marL="0">
               <a:lnSpc>
@@ -5021,7 +7056,91 @@
                 <a:ea typeface="Arial" pitchFamily="34" charset="-122"/>
                 <a:cs typeface="Arial" pitchFamily="34" charset="-120"/>
               </a:rPr>
-              <a:t>"What is this an example of?"</a:t>
+              <a:t>made of</a:t>
+            </a:r>
+            <a:pPr algn="l" indent="0" marL="0">
+              <a:lnSpc>
+                <a:spcPts val="1620"/>
+              </a:lnSpc>
+              <a:spcAft>
+                <a:spcPts val="300"/>
+              </a:spcAft>
+              <a:buNone/>
+            </a:pPr>
+            <a:r>
+              <a:rPr lang="en-US" sz="1200" dirty="0">
+                <a:solidFill>
+                  <a:srgbClr val="1C2833"/>
+                </a:solidFill>
+                <a:latin typeface="Arial" pitchFamily="34" charset="0"/>
+                <a:ea typeface="Arial" pitchFamily="34" charset="-122"/>
+                <a:cs typeface="Arial" pitchFamily="34" charset="-120"/>
+              </a:rPr>
+              <a:t>? Don't tell me the </a:t>
+            </a:r>
+            <a:pPr algn="l" indent="0" marL="0">
+              <a:lnSpc>
+                <a:spcPts val="1620"/>
+              </a:lnSpc>
+              <a:spcAft>
+                <a:spcPts val="300"/>
+              </a:spcAft>
+              <a:buNone/>
+            </a:pPr>
+            <a:r>
+              <a:rPr lang="en-US" sz="1200" i="1" dirty="0">
+                <a:solidFill>
+                  <a:srgbClr val="1C2833"/>
+                </a:solidFill>
+                <a:latin typeface="Arial" pitchFamily="34" charset="0"/>
+                <a:ea typeface="Arial" pitchFamily="34" charset="-122"/>
+                <a:cs typeface="Arial" pitchFamily="34" charset="-120"/>
+              </a:rPr>
+              <a:t>name</a:t>
+            </a:r>
+            <a:pPr algn="l" indent="0" marL="0">
+              <a:lnSpc>
+                <a:spcPts val="1620"/>
+              </a:lnSpc>
+              <a:spcAft>
+                <a:spcPts val="300"/>
+              </a:spcAft>
+              <a:buNone/>
+            </a:pPr>
+            <a:r>
+              <a:rPr lang="en-US" sz="1200" dirty="0">
+                <a:solidFill>
+                  <a:srgbClr val="1C2833"/>
+                </a:solidFill>
+                <a:latin typeface="Arial" pitchFamily="34" charset="0"/>
+                <a:ea typeface="Arial" pitchFamily="34" charset="-122"/>
+                <a:cs typeface="Arial" pitchFamily="34" charset="-120"/>
+              </a:rPr>
+              <a:t> — tell me what kind of stuff it is."</a:t>
+            </a:r>
+            <a:endParaRPr lang="en-US" sz="1200" dirty="0"/>
+          </a:p>
+          <a:p>
+            <a:pPr algn="l" marL="342900" indent="-342900">
+              <a:lnSpc>
+                <a:spcPts val="1620"/>
+              </a:lnSpc>
+              <a:spcAft>
+                <a:spcPts val="300"/>
+              </a:spcAft>
+              <a:buSzPct val="100000"/>
+              <a:buChar char="•"/>
+            </a:pPr>
+            <a:r>
+              <a:rPr lang="en-US" sz="1200" dirty="0">
+                <a:solidFill>
+                  <a:srgbClr val="1C2833"/>
+                </a:solidFill>
+                <a:latin typeface="Arial" pitchFamily="34" charset="0"/>
+                <a:ea typeface="Arial" pitchFamily="34" charset="-122"/>
+                <a:cs typeface="Arial" pitchFamily="34" charset="-120"/>
+              </a:rPr>
+              <a:t>Take 4 quick answers. Don't correct anyone. Write all answers on the board.</a:t>
             </a:r>
             <a:endParaRPr lang="en-US" sz="1200" dirty="0"/>
           </a:p>
@@ -5035,1025 +7154,7 @@
         </p:nvSpPr>
         <p:spPr>
           <a:xfrm>
-            <a:off x="406301" y="1254323"/>
-            <a:ext cx="8498026" cy="1279624"/>
-          </a:xfrm>
-          <a:prstGeom prst="rect">
-            <a:avLst/>
-          </a:prstGeom>
-          <a:noFill/>
-          <a:ln/>
-        </p:spPr>
-        <p:txBody>
-          <a:bodyPr wrap="square" lIns="0" tIns="0" rIns="0" bIns="0" rtlCol="0" anchor="t"/>
-          <a:lstStyle/>
-          <a:p>
-            <a:pPr algn="l" indent="0" marL="0">
-              <a:lnSpc>
-                <a:spcPts val="1680"/>
-              </a:lnSpc>
-              <a:spcBef>
-                <a:spcPts val="300"/>
-              </a:spcBef>
-              <a:spcAft>
-                <a:spcPts val="300"/>
-              </a:spcAft>
-              <a:buNone/>
-            </a:pPr>
-            <a:r>
-              <a:rPr lang="en-US" sz="1200" dirty="0">
-                <a:solidFill>
-                  <a:srgbClr val="1C2833"/>
-                </a:solidFill>
-                <a:latin typeface="Arial" pitchFamily="34" charset="0"/>
-                <a:ea typeface="Arial" pitchFamily="34" charset="-122"/>
-                <a:cs typeface="Arial" pitchFamily="34" charset="-120"/>
-              </a:rPr>
-              <a:t>– Rock → solid. </a:t>
-            </a:r>
-            <a:pPr algn="l" indent="0" marL="0">
-              <a:lnSpc>
-                <a:spcPts val="1680"/>
-              </a:lnSpc>
-              <a:spcBef>
-                <a:spcPts val="300"/>
-              </a:spcBef>
-              <a:spcAft>
-                <a:spcPts val="300"/>
-              </a:spcAft>
-              <a:buNone/>
-            </a:pPr>
-            <a:r>
-              <a:rPr lang="en-US" sz="1200" i="1" dirty="0">
-                <a:solidFill>
-                  <a:srgbClr val="1C2833"/>
-                </a:solidFill>
-                <a:latin typeface="Arial" pitchFamily="34" charset="0"/>
-                <a:ea typeface="Arial" pitchFamily="34" charset="-122"/>
-                <a:cs typeface="Arial" pitchFamily="34" charset="-120"/>
-              </a:rPr>
-              <a:t>"In Sanskrit, this category is called</a:t>
-            </a:r>
-            <a:pPr algn="l" indent="0" marL="0">
-              <a:lnSpc>
-                <a:spcPts val="1680"/>
-              </a:lnSpc>
-              <a:spcBef>
-                <a:spcPts val="300"/>
-              </a:spcBef>
-              <a:spcAft>
-                <a:spcPts val="300"/>
-              </a:spcAft>
-              <a:buNone/>
-            </a:pPr>
-            <a:r>
-              <a:rPr lang="en-US" sz="1200" dirty="0">
-                <a:solidFill>
-                  <a:srgbClr val="1C2833"/>
-                </a:solidFill>
-                <a:latin typeface="Arial" pitchFamily="34" charset="0"/>
-                <a:ea typeface="Arial" pitchFamily="34" charset="-122"/>
-                <a:cs typeface="Arial" pitchFamily="34" charset="-120"/>
-              </a:rPr>
-              <a:t> pṛthvī </a:t>
-            </a:r>
-            <a:pPr algn="l" indent="0" marL="0">
-              <a:lnSpc>
-                <a:spcPts val="1680"/>
-              </a:lnSpc>
-              <a:spcBef>
-                <a:spcPts val="300"/>
-              </a:spcBef>
-              <a:spcAft>
-                <a:spcPts val="300"/>
-              </a:spcAft>
-              <a:buNone/>
-            </a:pPr>
-            <a:r>
-              <a:rPr lang="en-US" sz="1200" i="1" dirty="0">
-                <a:solidFill>
-                  <a:srgbClr val="1C2833"/>
-                </a:solidFill>
-                <a:latin typeface="Arial" pitchFamily="34" charset="0"/>
-                <a:ea typeface="Arial" pitchFamily="34" charset="-122"/>
-                <a:cs typeface="Arial" pitchFamily="34" charset="-120"/>
-              </a:rPr>
-              <a:t>— PRITH-vee — the earth-element."</a:t>
-            </a:r>
-            <a:pPr algn="l" indent="0" marL="0">
-              <a:lnSpc>
-                <a:spcPts val="1680"/>
-              </a:lnSpc>
-              <a:spcBef>
-                <a:spcPts val="300"/>
-              </a:spcBef>
-              <a:spcAft>
-                <a:spcPts val="300"/>
-              </a:spcAft>
-              <a:buNone/>
-            </a:pPr>
-            <a:r>
-              <a:rPr lang="en-US" sz="1200" dirty="0">
-                <a:solidFill>
-                  <a:srgbClr val="1C2833"/>
-                </a:solidFill>
-                <a:latin typeface="Arial" pitchFamily="34" charset="0"/>
-                <a:ea typeface="Arial" pitchFamily="34" charset="-122"/>
-                <a:cs typeface="Arial" pitchFamily="34" charset="-120"/>
-              </a:rPr>
-              <a:t> (Write on board.) – Water jar → liquid. </a:t>
-            </a:r>
-            <a:pPr algn="l" indent="0" marL="0">
-              <a:lnSpc>
-                <a:spcPts val="1680"/>
-              </a:lnSpc>
-              <a:spcBef>
-                <a:spcPts val="300"/>
-              </a:spcBef>
-              <a:spcAft>
-                <a:spcPts val="300"/>
-              </a:spcAft>
-              <a:buNone/>
-            </a:pPr>
-            <a:r>
-              <a:rPr lang="en-US" sz="1200" i="1" dirty="0">
-                <a:solidFill>
-                  <a:srgbClr val="1C2833"/>
-                </a:solidFill>
-                <a:latin typeface="Arial" pitchFamily="34" charset="0"/>
-                <a:ea typeface="Arial" pitchFamily="34" charset="-122"/>
-                <a:cs typeface="Arial" pitchFamily="34" charset="-120"/>
-              </a:rPr>
-              <a:t>"Sanskrit:</a:t>
-            </a:r>
-            <a:pPr algn="l" indent="0" marL="0">
-              <a:lnSpc>
-                <a:spcPts val="1680"/>
-              </a:lnSpc>
-              <a:spcBef>
-                <a:spcPts val="300"/>
-              </a:spcBef>
-              <a:spcAft>
-                <a:spcPts val="300"/>
-              </a:spcAft>
-              <a:buNone/>
-            </a:pPr>
-            <a:r>
-              <a:rPr lang="en-US" sz="1200" dirty="0">
-                <a:solidFill>
-                  <a:srgbClr val="1C2833"/>
-                </a:solidFill>
-                <a:latin typeface="Arial" pitchFamily="34" charset="0"/>
-                <a:ea typeface="Arial" pitchFamily="34" charset="-122"/>
-                <a:cs typeface="Arial" pitchFamily="34" charset="-120"/>
-              </a:rPr>
-              <a:t> ap</a:t>
-            </a:r>
-            <a:pPr algn="l" indent="0" marL="0">
-              <a:lnSpc>
-                <a:spcPts val="1680"/>
-              </a:lnSpc>
-              <a:spcBef>
-                <a:spcPts val="300"/>
-              </a:spcBef>
-              <a:spcAft>
-                <a:spcPts val="300"/>
-              </a:spcAft>
-              <a:buNone/>
-            </a:pPr>
-            <a:r>
-              <a:rPr lang="en-US" sz="1200" i="1" dirty="0">
-                <a:solidFill>
-                  <a:srgbClr val="1C2833"/>
-                </a:solidFill>
-                <a:latin typeface="Arial" pitchFamily="34" charset="0"/>
-                <a:ea typeface="Arial" pitchFamily="34" charset="-122"/>
-                <a:cs typeface="Arial" pitchFamily="34" charset="-120"/>
-              </a:rPr>
-              <a:t>. (Some texts say</a:t>
-            </a:r>
-            <a:pPr algn="l" indent="0" marL="0">
-              <a:lnSpc>
-                <a:spcPts val="1680"/>
-              </a:lnSpc>
-              <a:spcBef>
-                <a:spcPts val="300"/>
-              </a:spcBef>
-              <a:spcAft>
-                <a:spcPts val="300"/>
-              </a:spcAft>
-              <a:buNone/>
-            </a:pPr>
-            <a:r>
-              <a:rPr lang="en-US" sz="1200" dirty="0">
-                <a:solidFill>
-                  <a:srgbClr val="1C2833"/>
-                </a:solidFill>
-                <a:latin typeface="Arial" pitchFamily="34" charset="0"/>
-                <a:ea typeface="Arial" pitchFamily="34" charset="-122"/>
-                <a:cs typeface="Arial" pitchFamily="34" charset="-120"/>
-              </a:rPr>
-              <a:t>jala</a:t>
-            </a:r>
-            <a:pPr algn="l" indent="0" marL="0">
-              <a:lnSpc>
-                <a:spcPts val="1680"/>
-              </a:lnSpc>
-              <a:spcBef>
-                <a:spcPts val="300"/>
-              </a:spcBef>
-              <a:spcAft>
-                <a:spcPts val="300"/>
-              </a:spcAft>
-              <a:buNone/>
-            </a:pPr>
-            <a:r>
-              <a:rPr lang="en-US" sz="1200" i="1" dirty="0">
-                <a:solidFill>
-                  <a:srgbClr val="1C2833"/>
-                </a:solidFill>
-                <a:latin typeface="Arial" pitchFamily="34" charset="0"/>
-                <a:ea typeface="Arial" pitchFamily="34" charset="-122"/>
-                <a:cs typeface="Arial" pitchFamily="34" charset="-120"/>
-              </a:rPr>
-              <a:t>.) The water-element."</a:t>
-            </a:r>
-            <a:pPr algn="l" indent="0" marL="0">
-              <a:lnSpc>
-                <a:spcPts val="1680"/>
-              </a:lnSpc>
-              <a:spcBef>
-                <a:spcPts val="300"/>
-              </a:spcBef>
-              <a:spcAft>
-                <a:spcPts val="300"/>
-              </a:spcAft>
-              <a:buNone/>
-            </a:pPr>
-            <a:r>
-              <a:rPr lang="en-US" sz="1200" dirty="0">
-                <a:solidFill>
-                  <a:srgbClr val="1C2833"/>
-                </a:solidFill>
-                <a:latin typeface="Arial" pitchFamily="34" charset="0"/>
-                <a:ea typeface="Arial" pitchFamily="34" charset="-122"/>
-                <a:cs typeface="Arial" pitchFamily="34" charset="-120"/>
-              </a:rPr>
-              <a:t> – Candle → heat / light. </a:t>
-            </a:r>
-            <a:pPr algn="l" indent="0" marL="0">
-              <a:lnSpc>
-                <a:spcPts val="1680"/>
-              </a:lnSpc>
-              <a:spcBef>
-                <a:spcPts val="300"/>
-              </a:spcBef>
-              <a:spcAft>
-                <a:spcPts val="300"/>
-              </a:spcAft>
-              <a:buNone/>
-            </a:pPr>
-            <a:r>
-              <a:rPr lang="en-US" sz="1200" i="1" dirty="0">
-                <a:solidFill>
-                  <a:srgbClr val="1C2833"/>
-                </a:solidFill>
-                <a:latin typeface="Arial" pitchFamily="34" charset="0"/>
-                <a:ea typeface="Arial" pitchFamily="34" charset="-122"/>
-                <a:cs typeface="Arial" pitchFamily="34" charset="-120"/>
-              </a:rPr>
-              <a:t>"Sanskrit:</a:t>
-            </a:r>
-            <a:pPr algn="l" indent="0" marL="0">
-              <a:lnSpc>
-                <a:spcPts val="1680"/>
-              </a:lnSpc>
-              <a:spcBef>
-                <a:spcPts val="300"/>
-              </a:spcBef>
-              <a:spcAft>
-                <a:spcPts val="300"/>
-              </a:spcAft>
-              <a:buNone/>
-            </a:pPr>
-            <a:r>
-              <a:rPr lang="en-US" sz="1200" dirty="0">
-                <a:solidFill>
-                  <a:srgbClr val="1C2833"/>
-                </a:solidFill>
-                <a:latin typeface="Arial" pitchFamily="34" charset="0"/>
-                <a:ea typeface="Arial" pitchFamily="34" charset="-122"/>
-                <a:cs typeface="Arial" pitchFamily="34" charset="-120"/>
-              </a:rPr>
-              <a:t> tejas </a:t>
-            </a:r>
-            <a:pPr algn="l" indent="0" marL="0">
-              <a:lnSpc>
-                <a:spcPts val="1680"/>
-              </a:lnSpc>
-              <a:spcBef>
-                <a:spcPts val="300"/>
-              </a:spcBef>
-              <a:spcAft>
-                <a:spcPts val="300"/>
-              </a:spcAft>
-              <a:buNone/>
-            </a:pPr>
-            <a:r>
-              <a:rPr lang="en-US" sz="1200" i="1" dirty="0">
-                <a:solidFill>
-                  <a:srgbClr val="1C2833"/>
-                </a:solidFill>
-                <a:latin typeface="Arial" pitchFamily="34" charset="0"/>
-                <a:ea typeface="Arial" pitchFamily="34" charset="-122"/>
-                <a:cs typeface="Arial" pitchFamily="34" charset="-120"/>
-              </a:rPr>
-              <a:t>— TAY-jus — the fire-element. Not just a flame: anything hot, or that gives light, or transforms one thing into another."</a:t>
-            </a:r>
-            <a:pPr algn="l" indent="0" marL="0">
-              <a:lnSpc>
-                <a:spcPts val="1680"/>
-              </a:lnSpc>
-              <a:spcBef>
-                <a:spcPts val="300"/>
-              </a:spcBef>
-              <a:spcAft>
-                <a:spcPts val="300"/>
-              </a:spcAft>
-              <a:buNone/>
-            </a:pPr>
-            <a:r>
-              <a:rPr lang="en-US" sz="1200" dirty="0">
-                <a:solidFill>
-                  <a:srgbClr val="1C2833"/>
-                </a:solidFill>
-                <a:latin typeface="Arial" pitchFamily="34" charset="0"/>
-                <a:ea typeface="Arial" pitchFamily="34" charset="-122"/>
-                <a:cs typeface="Arial" pitchFamily="34" charset="-120"/>
-              </a:rPr>
-              <a:t> – Balloon → air. </a:t>
-            </a:r>
-            <a:pPr algn="l" indent="0" marL="0">
-              <a:lnSpc>
-                <a:spcPts val="1680"/>
-              </a:lnSpc>
-              <a:spcBef>
-                <a:spcPts val="300"/>
-              </a:spcBef>
-              <a:spcAft>
-                <a:spcPts val="300"/>
-              </a:spcAft>
-              <a:buNone/>
-            </a:pPr>
-            <a:r>
-              <a:rPr lang="en-US" sz="1200" i="1" dirty="0">
-                <a:solidFill>
-                  <a:srgbClr val="1C2833"/>
-                </a:solidFill>
-                <a:latin typeface="Arial" pitchFamily="34" charset="0"/>
-                <a:ea typeface="Arial" pitchFamily="34" charset="-122"/>
-                <a:cs typeface="Arial" pitchFamily="34" charset="-120"/>
-              </a:rPr>
-              <a:t>"Sanskrit:</a:t>
-            </a:r>
-            <a:pPr algn="l" indent="0" marL="0">
-              <a:lnSpc>
-                <a:spcPts val="1680"/>
-              </a:lnSpc>
-              <a:spcBef>
-                <a:spcPts val="300"/>
-              </a:spcBef>
-              <a:spcAft>
-                <a:spcPts val="300"/>
-              </a:spcAft>
-              <a:buNone/>
-            </a:pPr>
-            <a:r>
-              <a:rPr lang="en-US" sz="1200" dirty="0">
-                <a:solidFill>
-                  <a:srgbClr val="1C2833"/>
-                </a:solidFill>
-                <a:latin typeface="Arial" pitchFamily="34" charset="0"/>
-                <a:ea typeface="Arial" pitchFamily="34" charset="-122"/>
-                <a:cs typeface="Arial" pitchFamily="34" charset="-120"/>
-              </a:rPr>
-              <a:t> vāyu </a:t>
-            </a:r>
-            <a:pPr algn="l" indent="0" marL="0">
-              <a:lnSpc>
-                <a:spcPts val="1680"/>
-              </a:lnSpc>
-              <a:spcBef>
-                <a:spcPts val="300"/>
-              </a:spcBef>
-              <a:spcAft>
-                <a:spcPts val="300"/>
-              </a:spcAft>
-              <a:buNone/>
-            </a:pPr>
-            <a:r>
-              <a:rPr lang="en-US" sz="1200" i="1" dirty="0">
-                <a:solidFill>
-                  <a:srgbClr val="1C2833"/>
-                </a:solidFill>
-                <a:latin typeface="Arial" pitchFamily="34" charset="0"/>
-                <a:ea typeface="Arial" pitchFamily="34" charset="-122"/>
-                <a:cs typeface="Arial" pitchFamily="34" charset="-120"/>
-              </a:rPr>
-              <a:t>— VAH-yu — the air-element. Anything that moves and flows like gas."</a:t>
-            </a:r>
-            <a:pPr algn="l" indent="0" marL="0">
-              <a:lnSpc>
-                <a:spcPts val="1680"/>
-              </a:lnSpc>
-              <a:spcBef>
-                <a:spcPts val="300"/>
-              </a:spcBef>
-              <a:spcAft>
-                <a:spcPts val="300"/>
-              </a:spcAft>
-              <a:buNone/>
-            </a:pPr>
-            <a:r>
-              <a:rPr lang="en-US" sz="1200" dirty="0">
-                <a:solidFill>
-                  <a:srgbClr val="1C2833"/>
-                </a:solidFill>
-                <a:latin typeface="Arial" pitchFamily="34" charset="0"/>
-                <a:ea typeface="Arial" pitchFamily="34" charset="-122"/>
-                <a:cs typeface="Arial" pitchFamily="34" charset="-120"/>
-              </a:rPr>
-              <a:t> – Empty box → space. </a:t>
-            </a:r>
-            <a:pPr algn="l" indent="0" marL="0">
-              <a:lnSpc>
-                <a:spcPts val="1680"/>
-              </a:lnSpc>
-              <a:spcBef>
-                <a:spcPts val="300"/>
-              </a:spcBef>
-              <a:spcAft>
-                <a:spcPts val="300"/>
-              </a:spcAft>
-              <a:buNone/>
-            </a:pPr>
-            <a:r>
-              <a:rPr lang="en-US" sz="1200" i="1" dirty="0">
-                <a:solidFill>
-                  <a:srgbClr val="1C2833"/>
-                </a:solidFill>
-                <a:latin typeface="Arial" pitchFamily="34" charset="0"/>
-                <a:ea typeface="Arial" pitchFamily="34" charset="-122"/>
-                <a:cs typeface="Arial" pitchFamily="34" charset="-120"/>
-              </a:rPr>
-              <a:t>"And finally — the</a:t>
-            </a:r>
-            <a:pPr algn="l" indent="0" marL="0">
-              <a:lnSpc>
-                <a:spcPts val="1680"/>
-              </a:lnSpc>
-              <a:spcBef>
-                <a:spcPts val="300"/>
-              </a:spcBef>
-              <a:spcAft>
-                <a:spcPts val="300"/>
-              </a:spcAft>
-              <a:buNone/>
-            </a:pPr>
-            <a:r>
-              <a:rPr lang="en-US" sz="1200" dirty="0">
-                <a:solidFill>
-                  <a:srgbClr val="1C2833"/>
-                </a:solidFill>
-                <a:latin typeface="Arial" pitchFamily="34" charset="0"/>
-                <a:ea typeface="Arial" pitchFamily="34" charset="-122"/>
-                <a:cs typeface="Arial" pitchFamily="34" charset="-120"/>
-              </a:rPr>
-              <a:t>box</a:t>
-            </a:r>
-            <a:pPr algn="l" indent="0" marL="0">
-              <a:lnSpc>
-                <a:spcPts val="1680"/>
-              </a:lnSpc>
-              <a:spcBef>
-                <a:spcPts val="300"/>
-              </a:spcBef>
-              <a:spcAft>
-                <a:spcPts val="300"/>
-              </a:spcAft>
-              <a:buNone/>
-            </a:pPr>
-            <a:r>
-              <a:rPr lang="en-US" sz="1200" i="1" dirty="0">
-                <a:solidFill>
-                  <a:srgbClr val="1C2833"/>
-                </a:solidFill>
-                <a:latin typeface="Arial" pitchFamily="34" charset="0"/>
-                <a:ea typeface="Arial" pitchFamily="34" charset="-122"/>
-                <a:cs typeface="Arial" pitchFamily="34" charset="-120"/>
-              </a:rPr>
-              <a:t> is made of cardboard, but what about what's</a:t>
-            </a:r>
-            <a:pPr algn="l" indent="0" marL="0">
-              <a:lnSpc>
-                <a:spcPts val="1680"/>
-              </a:lnSpc>
-              <a:spcBef>
-                <a:spcPts val="300"/>
-              </a:spcBef>
-              <a:spcAft>
-                <a:spcPts val="300"/>
-              </a:spcAft>
-              <a:buNone/>
-            </a:pPr>
-            <a:r>
-              <a:rPr lang="en-US" sz="1200" dirty="0">
-                <a:solidFill>
-                  <a:srgbClr val="1C2833"/>
-                </a:solidFill>
-                <a:latin typeface="Arial" pitchFamily="34" charset="0"/>
-                <a:ea typeface="Arial" pitchFamily="34" charset="-122"/>
-                <a:cs typeface="Arial" pitchFamily="34" charset="-120"/>
-              </a:rPr>
-              <a:t>inside</a:t>
-            </a:r>
-            <a:pPr algn="l" indent="0" marL="0">
-              <a:lnSpc>
-                <a:spcPts val="1680"/>
-              </a:lnSpc>
-              <a:spcBef>
-                <a:spcPts val="300"/>
-              </a:spcBef>
-              <a:spcAft>
-                <a:spcPts val="300"/>
-              </a:spcAft>
-              <a:buNone/>
-            </a:pPr>
-            <a:r>
-              <a:rPr lang="en-US" sz="1200" i="1" dirty="0">
-                <a:solidFill>
-                  <a:srgbClr val="1C2833"/>
-                </a:solidFill>
-                <a:latin typeface="Arial" pitchFamily="34" charset="0"/>
-                <a:ea typeface="Arial" pitchFamily="34" charset="-122"/>
-                <a:cs typeface="Arial" pitchFamily="34" charset="-120"/>
-              </a:rPr>
-              <a:t> the box? The room you have? That's</a:t>
-            </a:r>
-            <a:pPr algn="l" indent="0" marL="0">
-              <a:lnSpc>
-                <a:spcPts val="1680"/>
-              </a:lnSpc>
-              <a:spcBef>
-                <a:spcPts val="300"/>
-              </a:spcBef>
-              <a:spcAft>
-                <a:spcPts val="300"/>
-              </a:spcAft>
-              <a:buNone/>
-            </a:pPr>
-            <a:r>
-              <a:rPr lang="en-US" sz="1200" dirty="0">
-                <a:solidFill>
-                  <a:srgbClr val="1C2833"/>
-                </a:solidFill>
-                <a:latin typeface="Arial" pitchFamily="34" charset="0"/>
-                <a:ea typeface="Arial" pitchFamily="34" charset="-122"/>
-                <a:cs typeface="Arial" pitchFamily="34" charset="-120"/>
-              </a:rPr>
-              <a:t> ākāśa </a:t>
-            </a:r>
-            <a:pPr algn="l" indent="0" marL="0">
-              <a:lnSpc>
-                <a:spcPts val="1680"/>
-              </a:lnSpc>
-              <a:spcBef>
-                <a:spcPts val="300"/>
-              </a:spcBef>
-              <a:spcAft>
-                <a:spcPts val="300"/>
-              </a:spcAft>
-              <a:buNone/>
-            </a:pPr>
-            <a:r>
-              <a:rPr lang="en-US" sz="1200" i="1" dirty="0">
-                <a:solidFill>
-                  <a:srgbClr val="1C2833"/>
-                </a:solidFill>
-                <a:latin typeface="Arial" pitchFamily="34" charset="0"/>
-                <a:ea typeface="Arial" pitchFamily="34" charset="-122"/>
-                <a:cs typeface="Arial" pitchFamily="34" charset="-120"/>
-              </a:rPr>
-              <a:t>— AH-KAH-sha — the space-element."</a:t>
-            </a:r>
-            <a:endParaRPr lang="en-US" sz="1200" dirty="0"/>
-          </a:p>
-        </p:txBody>
-      </p:sp>
-      <p:sp>
-        <p:nvSpPr>
-          <p:cNvPr id="6" name="Text 4"/>
-          <p:cNvSpPr/>
-          <p:nvPr/>
-        </p:nvSpPr>
-        <p:spPr>
-          <a:xfrm>
-            <a:off x="634901" y="2622798"/>
-            <a:ext cx="8102798" cy="281880"/>
-          </a:xfrm>
-          <a:prstGeom prst="rect">
-            <a:avLst/>
-          </a:prstGeom>
-          <a:noFill/>
-          <a:ln/>
-        </p:spPr>
-        <p:txBody>
-          <a:bodyPr wrap="square" lIns="0" tIns="0" rIns="0" bIns="0" rtlCol="0" anchor="t"/>
-          <a:lstStyle/>
-          <a:p>
-            <a:pPr algn="l" marL="342900" indent="-342900">
-              <a:lnSpc>
-                <a:spcPts val="1620"/>
-              </a:lnSpc>
-              <a:spcAft>
-                <a:spcPts val="300"/>
-              </a:spcAft>
-              <a:buSzPct val="100000"/>
-              <a:buChar char="•"/>
-            </a:pPr>
-            <a:r>
-              <a:rPr lang="en-US" sz="1200" b="1" dirty="0">
-                <a:solidFill>
-                  <a:srgbClr val="1C2833"/>
-                </a:solidFill>
-                <a:latin typeface="Arial" pitchFamily="34" charset="0"/>
-                <a:ea typeface="Arial" pitchFamily="34" charset="-122"/>
-                <a:cs typeface="Arial" pitchFamily="34" charset="-120"/>
-              </a:rPr>
-              <a:t>Key idea on the board:</a:t>
-            </a:r>
-            <a:endParaRPr lang="en-US" sz="1200" dirty="0"/>
-          </a:p>
-        </p:txBody>
-      </p:sp>
-      <p:sp>
-        <p:nvSpPr>
-          <p:cNvPr id="7" name="Text 5"/>
-          <p:cNvSpPr/>
-          <p:nvPr/>
-        </p:nvSpPr>
-        <p:spPr>
-          <a:xfrm>
-            <a:off x="406301" y="2993529"/>
-            <a:ext cx="8498026" cy="426541"/>
-          </a:xfrm>
-          <a:prstGeom prst="rect">
-            <a:avLst/>
-          </a:prstGeom>
-          <a:noFill/>
-          <a:ln/>
-        </p:spPr>
-        <p:txBody>
-          <a:bodyPr wrap="square" lIns="0" tIns="0" rIns="0" bIns="0" rtlCol="0" anchor="t"/>
-          <a:lstStyle/>
-          <a:p>
-            <a:pPr algn="l" indent="0" marL="0">
-              <a:lnSpc>
-                <a:spcPts val="1680"/>
-              </a:lnSpc>
-              <a:spcBef>
-                <a:spcPts val="300"/>
-              </a:spcBef>
-              <a:spcAft>
-                <a:spcPts val="300"/>
-              </a:spcAft>
-              <a:buNone/>
-            </a:pPr>
-            <a:r>
-              <a:rPr lang="en-US" sz="1200" dirty="0">
-                <a:solidFill>
-                  <a:srgbClr val="1C2833"/>
-                </a:solidFill>
-                <a:latin typeface="Arial" pitchFamily="34" charset="0"/>
-                <a:ea typeface="Arial" pitchFamily="34" charset="-122"/>
-                <a:cs typeface="Arial" pitchFamily="34" charset="-120"/>
-              </a:rPr>
-              <a:t>&gt; Around 1500 BCE, thinkers in the Indian subcontinent organised everything they could see into </a:t>
-            </a:r>
-            <a:pPr algn="l" indent="0" marL="0">
-              <a:lnSpc>
-                <a:spcPts val="1680"/>
-              </a:lnSpc>
-              <a:spcBef>
-                <a:spcPts val="300"/>
-              </a:spcBef>
-              <a:spcAft>
-                <a:spcPts val="300"/>
-              </a:spcAft>
-              <a:buNone/>
-            </a:pPr>
-            <a:r>
-              <a:rPr lang="en-US" sz="1200" b="1" dirty="0">
-                <a:solidFill>
-                  <a:srgbClr val="1C2833"/>
-                </a:solidFill>
-                <a:latin typeface="Arial" pitchFamily="34" charset="0"/>
-                <a:ea typeface="Arial" pitchFamily="34" charset="-122"/>
-                <a:cs typeface="Arial" pitchFamily="34" charset="-120"/>
-              </a:rPr>
-              <a:t>five categories</a:t>
-            </a:r>
-            <a:pPr algn="l" indent="0" marL="0">
-              <a:lnSpc>
-                <a:spcPts val="1680"/>
-              </a:lnSpc>
-              <a:spcBef>
-                <a:spcPts val="300"/>
-              </a:spcBef>
-              <a:spcAft>
-                <a:spcPts val="300"/>
-              </a:spcAft>
-              <a:buNone/>
-            </a:pPr>
-            <a:r>
-              <a:rPr lang="en-US" sz="1200" dirty="0">
-                <a:solidFill>
-                  <a:srgbClr val="1C2833"/>
-                </a:solidFill>
-                <a:latin typeface="Arial" pitchFamily="34" charset="0"/>
-                <a:ea typeface="Arial" pitchFamily="34" charset="-122"/>
-                <a:cs typeface="Arial" pitchFamily="34" charset="-120"/>
-              </a:rPr>
-              <a:t>. They called them the </a:t>
-            </a:r>
-            <a:pPr algn="l" indent="0" marL="0">
-              <a:lnSpc>
-                <a:spcPts val="1680"/>
-              </a:lnSpc>
-              <a:spcBef>
-                <a:spcPts val="300"/>
-              </a:spcBef>
-              <a:spcAft>
-                <a:spcPts val="300"/>
-              </a:spcAft>
-              <a:buNone/>
-            </a:pPr>
-            <a:r>
-              <a:rPr lang="en-US" sz="1200" i="1" dirty="0">
-                <a:solidFill>
-                  <a:srgbClr val="1C2833"/>
-                </a:solidFill>
-                <a:latin typeface="Arial" pitchFamily="34" charset="0"/>
-                <a:ea typeface="Arial" pitchFamily="34" charset="-122"/>
-                <a:cs typeface="Arial" pitchFamily="34" charset="-120"/>
-              </a:rPr>
-              <a:t>pañca-mahābhūta</a:t>
-            </a:r>
-            <a:pPr algn="l" indent="0" marL="0">
-              <a:lnSpc>
-                <a:spcPts val="1680"/>
-              </a:lnSpc>
-              <a:spcBef>
-                <a:spcPts val="300"/>
-              </a:spcBef>
-              <a:spcAft>
-                <a:spcPts val="300"/>
-              </a:spcAft>
-              <a:buNone/>
-            </a:pPr>
-            <a:r>
-              <a:rPr lang="en-US" sz="1200" dirty="0">
-                <a:solidFill>
-                  <a:srgbClr val="1C2833"/>
-                </a:solidFill>
-                <a:latin typeface="Arial" pitchFamily="34" charset="0"/>
-                <a:ea typeface="Arial" pitchFamily="34" charset="-122"/>
-                <a:cs typeface="Arial" pitchFamily="34" charset="-120"/>
-              </a:rPr>
-              <a:t> — the </a:t>
-            </a:r>
-            <a:pPr algn="l" indent="0" marL="0">
-              <a:lnSpc>
-                <a:spcPts val="1680"/>
-              </a:lnSpc>
-              <a:spcBef>
-                <a:spcPts val="300"/>
-              </a:spcBef>
-              <a:spcAft>
-                <a:spcPts val="300"/>
-              </a:spcAft>
-              <a:buNone/>
-            </a:pPr>
-            <a:r>
-              <a:rPr lang="en-US" sz="1200" b="1" dirty="0">
-                <a:solidFill>
-                  <a:srgbClr val="1C2833"/>
-                </a:solidFill>
-                <a:latin typeface="Arial" pitchFamily="34" charset="0"/>
-                <a:ea typeface="Arial" pitchFamily="34" charset="-122"/>
-                <a:cs typeface="Arial" pitchFamily="34" charset="-120"/>
-              </a:rPr>
-              <a:t>five great elements</a:t>
-            </a:r>
-            <a:pPr algn="l" indent="0" marL="0">
-              <a:lnSpc>
-                <a:spcPts val="1680"/>
-              </a:lnSpc>
-              <a:spcBef>
-                <a:spcPts val="300"/>
-              </a:spcBef>
-              <a:spcAft>
-                <a:spcPts val="300"/>
-              </a:spcAft>
-              <a:buNone/>
-            </a:pPr>
-            <a:r>
-              <a:rPr lang="en-US" sz="1200" dirty="0">
-                <a:solidFill>
-                  <a:srgbClr val="1C2833"/>
-                </a:solidFill>
-                <a:latin typeface="Arial" pitchFamily="34" charset="0"/>
-                <a:ea typeface="Arial" pitchFamily="34" charset="-122"/>
-                <a:cs typeface="Arial" pitchFamily="34" charset="-120"/>
-              </a:rPr>
-              <a:t>.</a:t>
-            </a:r>
-            <a:endParaRPr lang="en-US" sz="1200" dirty="0"/>
-          </a:p>
-        </p:txBody>
-      </p:sp>
-      <p:sp>
-        <p:nvSpPr>
-          <p:cNvPr id="8" name="Text 6"/>
-          <p:cNvSpPr/>
-          <p:nvPr/>
-        </p:nvSpPr>
-        <p:spPr>
-          <a:xfrm>
-            <a:off x="634901" y="3508921"/>
-            <a:ext cx="8102798" cy="281880"/>
-          </a:xfrm>
-          <a:prstGeom prst="rect">
-            <a:avLst/>
-          </a:prstGeom>
-          <a:noFill/>
-          <a:ln/>
-        </p:spPr>
-        <p:txBody>
-          <a:bodyPr wrap="square" lIns="0" tIns="0" rIns="0" bIns="0" rtlCol="0" anchor="t"/>
-          <a:lstStyle/>
-          <a:p>
-            <a:pPr algn="l" marL="342900" indent="-342900">
-              <a:lnSpc>
-                <a:spcPts val="1620"/>
-              </a:lnSpc>
-              <a:spcAft>
-                <a:spcPts val="300"/>
-              </a:spcAft>
-              <a:buSzPct val="100000"/>
-              <a:buChar char="•"/>
-            </a:pPr>
-            <a:r>
-              <a:rPr lang="en-US" sz="1200" dirty="0">
-                <a:solidFill>
-                  <a:srgbClr val="1C2833"/>
-                </a:solidFill>
-                <a:latin typeface="Arial" pitchFamily="34" charset="0"/>
-                <a:ea typeface="Arial" pitchFamily="34" charset="-122"/>
-                <a:cs typeface="Arial" pitchFamily="34" charset="-120"/>
-              </a:rPr>
-              <a:t>Show the source: read aloud the SB 2.10.3 paraphrase from the cache file:</a:t>
-            </a:r>
-            <a:endParaRPr lang="en-US" sz="1200" dirty="0"/>
-          </a:p>
-        </p:txBody>
-      </p:sp>
-      <p:sp>
-        <p:nvSpPr>
-          <p:cNvPr id="9" name="Text 7"/>
-          <p:cNvSpPr/>
-          <p:nvPr/>
-        </p:nvSpPr>
-        <p:spPr>
-          <a:xfrm>
-            <a:off x="406301" y="3879652"/>
-            <a:ext cx="8498026" cy="426541"/>
-          </a:xfrm>
-          <a:prstGeom prst="rect">
-            <a:avLst/>
-          </a:prstGeom>
-          <a:noFill/>
-          <a:ln/>
-        </p:spPr>
-        <p:txBody>
-          <a:bodyPr wrap="square" lIns="0" tIns="0" rIns="0" bIns="0" rtlCol="0" anchor="t"/>
-          <a:lstStyle/>
-          <a:p>
-            <a:pPr algn="l" indent="0" marL="0">
-              <a:lnSpc>
-                <a:spcPts val="1680"/>
-              </a:lnSpc>
-              <a:spcBef>
-                <a:spcPts val="300"/>
-              </a:spcBef>
-              <a:spcAft>
-                <a:spcPts val="300"/>
-              </a:spcAft>
-              <a:buNone/>
-            </a:pPr>
-            <a:r>
-              <a:rPr lang="en-US" sz="1200" dirty="0">
-                <a:solidFill>
-                  <a:srgbClr val="1C2833"/>
-                </a:solidFill>
-                <a:latin typeface="Arial" pitchFamily="34" charset="0"/>
-                <a:ea typeface="Arial" pitchFamily="34" charset="-122"/>
-                <a:cs typeface="Arial" pitchFamily="34" charset="-120"/>
-              </a:rPr>
-              <a:t>&gt; </a:t>
-            </a:r>
-            <a:pPr algn="l" indent="0" marL="0">
-              <a:lnSpc>
-                <a:spcPts val="1680"/>
-              </a:lnSpc>
-              <a:spcBef>
-                <a:spcPts val="300"/>
-              </a:spcBef>
-              <a:spcAft>
-                <a:spcPts val="300"/>
-              </a:spcAft>
-              <a:buNone/>
-            </a:pPr>
-            <a:r>
-              <a:rPr lang="en-US" sz="1200" i="1" dirty="0">
-                <a:solidFill>
-                  <a:srgbClr val="1C2833"/>
-                </a:solidFill>
-                <a:latin typeface="Arial" pitchFamily="34" charset="0"/>
-                <a:ea typeface="Arial" pitchFamily="34" charset="-122"/>
-                <a:cs typeface="Arial" pitchFamily="34" charset="-120"/>
-              </a:rPr>
-              <a:t>"... bhūta — the five gross elements (the sky, air, fire, water, earth) ..."</a:t>
-            </a:r>
-            <a:pPr algn="l" indent="0" marL="0">
-              <a:lnSpc>
-                <a:spcPts val="1680"/>
-              </a:lnSpc>
-              <a:spcBef>
-                <a:spcPts val="300"/>
-              </a:spcBef>
-              <a:spcAft>
-                <a:spcPts val="300"/>
-              </a:spcAft>
-              <a:buNone/>
-            </a:pPr>
-            <a:r>
-              <a:rPr lang="en-US" sz="1200" dirty="0">
-                <a:solidFill>
-                  <a:srgbClr val="1C2833"/>
-                </a:solidFill>
-                <a:latin typeface="Arial" pitchFamily="34" charset="0"/>
-                <a:ea typeface="Arial" pitchFamily="34" charset="-122"/>
-                <a:cs typeface="Arial" pitchFamily="34" charset="-120"/>
-              </a:rPr>
-              <a:t> &gt; — Śrīmad-Bhāgavatam 2.10.3 </a:t>
-            </a:r>
-            <a:pPr algn="l" indent="0" marL="0">
-              <a:lnSpc>
-                <a:spcPts val="1680"/>
-              </a:lnSpc>
-              <a:spcBef>
-                <a:spcPts val="300"/>
-              </a:spcBef>
-              <a:spcAft>
-                <a:spcPts val="300"/>
-              </a:spcAft>
-              <a:buNone/>
-            </a:pPr>
-            <a:r>
-              <a:rPr lang="en-US" sz="1200" i="1" dirty="0">
-                <a:solidFill>
-                  <a:srgbClr val="1C2833"/>
-                </a:solidFill>
-                <a:latin typeface="Arial" pitchFamily="34" charset="0"/>
-                <a:ea typeface="Arial" pitchFamily="34" charset="-122"/>
-                <a:cs typeface="Arial" pitchFamily="34" charset="-120"/>
-              </a:rPr>
-              <a:t>(Read for adult ears, not for student memorisation. Just hear it once.)</a:t>
-            </a:r>
-            <a:endParaRPr lang="en-US" sz="1200" dirty="0"/>
-          </a:p>
-        </p:txBody>
-      </p:sp>
-      <p:sp>
-        <p:nvSpPr>
-          <p:cNvPr id="10" name="Text 8"/>
-          <p:cNvSpPr/>
-          <p:nvPr/>
-        </p:nvSpPr>
-        <p:spPr>
-          <a:xfrm>
-            <a:off x="406301" y="4458593"/>
+            <a:off x="406301" y="4434929"/>
             <a:ext cx="8498026" cy="213271"/>
           </a:xfrm>
           <a:prstGeom prst="rect">
@@ -6197,7 +7298,7 @@
                 <a:ea typeface="Georgia" pitchFamily="34" charset="-122"/>
                 <a:cs typeface="Georgia" pitchFamily="34" charset="-120"/>
               </a:rPr>
-              <a:t>Activity (15 min) — Five Things in This Room</a:t>
+              <a:t>Core (20 min)</a:t>
             </a:r>
             <a:endParaRPr lang="en-US" sz="1800" dirty="0"/>
           </a:p>
@@ -6211,8 +7312,8 @@
         </p:nvSpPr>
         <p:spPr>
           <a:xfrm>
-            <a:off x="406301" y="870942"/>
-            <a:ext cx="8498026" cy="639812"/>
+            <a:off x="634901" y="883593"/>
+            <a:ext cx="8102798" cy="281880"/>
           </a:xfrm>
           <a:prstGeom prst="rect">
             <a:avLst/>
@@ -6224,17 +7325,15 @@
           <a:bodyPr wrap="square" lIns="0" tIns="0" rIns="0" bIns="0" rtlCol="0" anchor="t"/>
           <a:lstStyle/>
           <a:p>
-            <a:pPr algn="l" indent="0" marL="0">
-              <a:lnSpc>
-                <a:spcPts val="1680"/>
-              </a:lnSpc>
-              <a:spcBef>
-                <a:spcPts val="300"/>
-              </a:spcBef>
-              <a:spcAft>
-                <a:spcPts val="300"/>
-              </a:spcAft>
-              <a:buNone/>
+            <a:pPr algn="l" marL="342900" indent="-342900">
+              <a:lnSpc>
+                <a:spcPts val="1620"/>
+              </a:lnSpc>
+              <a:spcAft>
+                <a:spcPts val="300"/>
+              </a:spcAft>
+              <a:buSzPct val="100000"/>
+              <a:buChar char="•"/>
             </a:pPr>
             <a:r>
               <a:rPr lang="en-US" sz="1200" dirty="0">
@@ -6245,15 +7344,12 @@
                 <a:ea typeface="Arial" pitchFamily="34" charset="-122"/>
                 <a:cs typeface="Arial" pitchFamily="34" charset="-120"/>
               </a:rPr>
-              <a:t>– Hand out five index cards per student. – Each card gets one element label at the top: </a:t>
-            </a:r>
-            <a:pPr algn="l" indent="0" marL="0">
-              <a:lnSpc>
-                <a:spcPts val="1680"/>
-              </a:lnSpc>
-              <a:spcBef>
-                <a:spcPts val="300"/>
-              </a:spcBef>
+              <a:t>Reveal the five objects on the table one at a time. For each, ask: </a:t>
+            </a:r>
+            <a:pPr algn="l" indent="0" marL="0">
+              <a:lnSpc>
+                <a:spcPts val="1620"/>
+              </a:lnSpc>
               <a:spcAft>
                 <a:spcPts val="300"/>
               </a:spcAft>
@@ -6268,76 +7364,7 @@
                 <a:ea typeface="Arial" pitchFamily="34" charset="-122"/>
                 <a:cs typeface="Arial" pitchFamily="34" charset="-120"/>
               </a:rPr>
-              <a:t>pṛthvī, ap, tejas, vāyu, ākāśa</a:t>
-            </a:r>
-            <a:pPr algn="l" indent="0" marL="0">
-              <a:lnSpc>
-                <a:spcPts val="1680"/>
-              </a:lnSpc>
-              <a:spcBef>
-                <a:spcPts val="300"/>
-              </a:spcBef>
-              <a:spcAft>
-                <a:spcPts val="300"/>
-              </a:spcAft>
-              <a:buNone/>
-            </a:pPr>
-            <a:r>
-              <a:rPr lang="en-US" sz="1200" dirty="0">
-                <a:solidFill>
-                  <a:srgbClr val="1C2833"/>
-                </a:solidFill>
-                <a:latin typeface="Arial" pitchFamily="34" charset="0"/>
-                <a:ea typeface="Arial" pitchFamily="34" charset="-122"/>
-                <a:cs typeface="Arial" pitchFamily="34" charset="-120"/>
-              </a:rPr>
-              <a:t> (with English in brackets). – In 10 minutes, students walk around the room (or stay seated if space is tight) and write ONE example of that element they can see </a:t>
-            </a:r>
-            <a:pPr algn="l" indent="0" marL="0">
-              <a:lnSpc>
-                <a:spcPts val="1680"/>
-              </a:lnSpc>
-              <a:spcBef>
-                <a:spcPts val="300"/>
-              </a:spcBef>
-              <a:spcAft>
-                <a:spcPts val="300"/>
-              </a:spcAft>
-              <a:buNone/>
-            </a:pPr>
-            <a:r>
-              <a:rPr lang="en-US" sz="1200" i="1" dirty="0">
-                <a:solidFill>
-                  <a:srgbClr val="1C2833"/>
-                </a:solidFill>
-                <a:latin typeface="Arial" pitchFamily="34" charset="0"/>
-                <a:ea typeface="Arial" pitchFamily="34" charset="-122"/>
-                <a:cs typeface="Arial" pitchFamily="34" charset="-120"/>
-              </a:rPr>
-              <a:t>right now</a:t>
-            </a:r>
-            <a:pPr algn="l" indent="0" marL="0">
-              <a:lnSpc>
-                <a:spcPts val="1680"/>
-              </a:lnSpc>
-              <a:spcBef>
-                <a:spcPts val="300"/>
-              </a:spcBef>
-              <a:spcAft>
-                <a:spcPts val="300"/>
-              </a:spcAft>
-              <a:buNone/>
-            </a:pPr>
-            <a:r>
-              <a:rPr lang="en-US" sz="1200" dirty="0">
-                <a:solidFill>
-                  <a:srgbClr val="1C2833"/>
-                </a:solidFill>
-                <a:latin typeface="Arial" pitchFamily="34" charset="0"/>
-                <a:ea typeface="Arial" pitchFamily="34" charset="-122"/>
-                <a:cs typeface="Arial" pitchFamily="34" charset="-120"/>
-              </a:rPr>
-              <a:t>, in this room.</a:t>
+              <a:t>"What is this an example of?"</a:t>
             </a:r>
             <a:endParaRPr lang="en-US" sz="1200" dirty="0"/>
           </a:p>
@@ -6351,8 +7378,8 @@
         </p:nvSpPr>
         <p:spPr>
           <a:xfrm>
-            <a:off x="634901" y="1599605"/>
-            <a:ext cx="8102798" cy="1257002"/>
+            <a:off x="634901" y="1266974"/>
+            <a:ext cx="8102798" cy="1218902"/>
           </a:xfrm>
           <a:prstGeom prst="rect">
             <a:avLst/>
@@ -6375,6 +7402,26 @@
               <a:buChar char="•"/>
             </a:pPr>
             <a:r>
+              <a:rPr lang="en-US" sz="1200" dirty="0">
+                <a:solidFill>
+                  <a:srgbClr val="1C2833"/>
+                </a:solidFill>
+                <a:latin typeface="Arial" pitchFamily="34" charset="0"/>
+                <a:ea typeface="Arial" pitchFamily="34" charset="-122"/>
+                <a:cs typeface="Arial" pitchFamily="34" charset="-120"/>
+              </a:rPr>
+              <a:t>Rock → solid. </a:t>
+            </a:r>
+            <a:pPr algn="l" indent="0" marL="0">
+              <a:lnSpc>
+                <a:spcPts val="1620"/>
+              </a:lnSpc>
+              <a:spcAft>
+                <a:spcPts val="300"/>
+              </a:spcAft>
+              <a:buNone/>
+            </a:pPr>
+            <a:r>
               <a:rPr lang="en-US" sz="1200" i="1" dirty="0">
                 <a:solidFill>
                   <a:srgbClr val="1C2833"/>
@@ -6383,7 +7430,7 @@
                 <a:ea typeface="Arial" pitchFamily="34" charset="-122"/>
                 <a:cs typeface="Arial" pitchFamily="34" charset="-120"/>
               </a:rPr>
-              <a:t>pṛthvī</a:t>
+              <a:t>"In Sanskrit, this category is called</a:t>
             </a:r>
             <a:pPr algn="l" indent="0" marL="0">
               <a:lnSpc>
@@ -6403,7 +7450,47 @@
                 <a:ea typeface="Arial" pitchFamily="34" charset="-122"/>
                 <a:cs typeface="Arial" pitchFamily="34" charset="-120"/>
               </a:rPr>
-              <a:t> — the desk top, a textbook, the floor.</a:t>
+              <a:t> pṛthvī </a:t>
+            </a:r>
+            <a:pPr algn="l" indent="0" marL="0">
+              <a:lnSpc>
+                <a:spcPts val="1620"/>
+              </a:lnSpc>
+              <a:spcAft>
+                <a:spcPts val="300"/>
+              </a:spcAft>
+              <a:buNone/>
+            </a:pPr>
+            <a:r>
+              <a:rPr lang="en-US" sz="1200" i="1" dirty="0">
+                <a:solidFill>
+                  <a:srgbClr val="1C2833"/>
+                </a:solidFill>
+                <a:latin typeface="Arial" pitchFamily="34" charset="0"/>
+                <a:ea typeface="Arial" pitchFamily="34" charset="-122"/>
+                <a:cs typeface="Arial" pitchFamily="34" charset="-120"/>
+              </a:rPr>
+              <a:t>— PRITH-vee — the earth-element."</a:t>
+            </a:r>
+            <a:pPr algn="l" indent="0" marL="0">
+              <a:lnSpc>
+                <a:spcPts val="1620"/>
+              </a:lnSpc>
+              <a:spcAft>
+                <a:spcPts val="300"/>
+              </a:spcAft>
+              <a:buNone/>
+            </a:pPr>
+            <a:r>
+              <a:rPr lang="en-US" sz="1200" dirty="0">
+                <a:solidFill>
+                  <a:srgbClr val="1C2833"/>
+                </a:solidFill>
+                <a:latin typeface="Arial" pitchFamily="34" charset="0"/>
+                <a:ea typeface="Arial" pitchFamily="34" charset="-122"/>
+                <a:cs typeface="Arial" pitchFamily="34" charset="-120"/>
+              </a:rPr>
+              <a:t> (Write on board.)</a:t>
             </a:r>
             <a:endParaRPr lang="en-US" sz="1200" dirty="0"/>
           </a:p>
@@ -6419,6 +7506,26 @@
               <a:buChar char="•"/>
             </a:pPr>
             <a:r>
+              <a:rPr lang="en-US" sz="1200" dirty="0">
+                <a:solidFill>
+                  <a:srgbClr val="1C2833"/>
+                </a:solidFill>
+                <a:latin typeface="Arial" pitchFamily="34" charset="0"/>
+                <a:ea typeface="Arial" pitchFamily="34" charset="-122"/>
+                <a:cs typeface="Arial" pitchFamily="34" charset="-120"/>
+              </a:rPr>
+              <a:t>Water jar → liquid. </a:t>
+            </a:r>
+            <a:pPr algn="l" indent="0" marL="0">
+              <a:lnSpc>
+                <a:spcPts val="1620"/>
+              </a:lnSpc>
+              <a:spcAft>
+                <a:spcPts val="300"/>
+              </a:spcAft>
+              <a:buNone/>
+            </a:pPr>
+            <a:r>
               <a:rPr lang="en-US" sz="1200" i="1" dirty="0">
                 <a:solidFill>
                   <a:srgbClr val="1C2833"/>
@@ -6427,7 +7534,7 @@
                 <a:ea typeface="Arial" pitchFamily="34" charset="-122"/>
                 <a:cs typeface="Arial" pitchFamily="34" charset="-120"/>
               </a:rPr>
-              <a:t>ap</a:t>
+              <a:t>"Sanskrit:</a:t>
             </a:r>
             <a:pPr algn="l" indent="0" marL="0">
               <a:lnSpc>
@@ -6447,7 +7554,67 @@
                 <a:ea typeface="Arial" pitchFamily="34" charset="-122"/>
                 <a:cs typeface="Arial" pitchFamily="34" charset="-120"/>
               </a:rPr>
-              <a:t> — water in their water bottle, sweat on a friend's brow, condensation on a window.</a:t>
+              <a:t> ap</a:t>
+            </a:r>
+            <a:pPr algn="l" indent="0" marL="0">
+              <a:lnSpc>
+                <a:spcPts val="1620"/>
+              </a:lnSpc>
+              <a:spcAft>
+                <a:spcPts val="300"/>
+              </a:spcAft>
+              <a:buNone/>
+            </a:pPr>
+            <a:r>
+              <a:rPr lang="en-US" sz="1200" i="1" dirty="0">
+                <a:solidFill>
+                  <a:srgbClr val="1C2833"/>
+                </a:solidFill>
+                <a:latin typeface="Arial" pitchFamily="34" charset="0"/>
+                <a:ea typeface="Arial" pitchFamily="34" charset="-122"/>
+                <a:cs typeface="Arial" pitchFamily="34" charset="-120"/>
+              </a:rPr>
+              <a:t>. (Some texts say</a:t>
+            </a:r>
+            <a:pPr algn="l" indent="0" marL="0">
+              <a:lnSpc>
+                <a:spcPts val="1620"/>
+              </a:lnSpc>
+              <a:spcAft>
+                <a:spcPts val="300"/>
+              </a:spcAft>
+              <a:buNone/>
+            </a:pPr>
+            <a:r>
+              <a:rPr lang="en-US" sz="1200" dirty="0">
+                <a:solidFill>
+                  <a:srgbClr val="1C2833"/>
+                </a:solidFill>
+                <a:latin typeface="Arial" pitchFamily="34" charset="0"/>
+                <a:ea typeface="Arial" pitchFamily="34" charset="-122"/>
+                <a:cs typeface="Arial" pitchFamily="34" charset="-120"/>
+              </a:rPr>
+              <a:t>jala</a:t>
+            </a:r>
+            <a:pPr algn="l" indent="0" marL="0">
+              <a:lnSpc>
+                <a:spcPts val="1620"/>
+              </a:lnSpc>
+              <a:spcAft>
+                <a:spcPts val="300"/>
+              </a:spcAft>
+              <a:buNone/>
+            </a:pPr>
+            <a:r>
+              <a:rPr lang="en-US" sz="1200" i="1" dirty="0">
+                <a:solidFill>
+                  <a:srgbClr val="1C2833"/>
+                </a:solidFill>
+                <a:latin typeface="Arial" pitchFamily="34" charset="0"/>
+                <a:ea typeface="Arial" pitchFamily="34" charset="-122"/>
+                <a:cs typeface="Arial" pitchFamily="34" charset="-120"/>
+              </a:rPr>
+              <a:t>.) The water-element."</a:t>
             </a:r>
             <a:endParaRPr lang="en-US" sz="1200" dirty="0"/>
           </a:p>
@@ -6463,6 +7630,26 @@
               <a:buChar char="•"/>
             </a:pPr>
             <a:r>
+              <a:rPr lang="en-US" sz="1200" dirty="0">
+                <a:solidFill>
+                  <a:srgbClr val="1C2833"/>
+                </a:solidFill>
+                <a:latin typeface="Arial" pitchFamily="34" charset="0"/>
+                <a:ea typeface="Arial" pitchFamily="34" charset="-122"/>
+                <a:cs typeface="Arial" pitchFamily="34" charset="-120"/>
+              </a:rPr>
+              <a:t>Candle → heat / light. </a:t>
+            </a:r>
+            <a:pPr algn="l" indent="0" marL="0">
+              <a:lnSpc>
+                <a:spcPts val="1620"/>
+              </a:lnSpc>
+              <a:spcAft>
+                <a:spcPts val="300"/>
+              </a:spcAft>
+              <a:buNone/>
+            </a:pPr>
+            <a:r>
               <a:rPr lang="en-US" sz="1200" i="1" dirty="0">
                 <a:solidFill>
                   <a:srgbClr val="1C2833"/>
@@ -6471,7 +7658,7 @@
                 <a:ea typeface="Arial" pitchFamily="34" charset="-122"/>
                 <a:cs typeface="Arial" pitchFamily="34" charset="-120"/>
               </a:rPr>
-              <a:t>tejas</a:t>
+              <a:t>"Sanskrit:</a:t>
             </a:r>
             <a:pPr algn="l" indent="0" marL="0">
               <a:lnSpc>
@@ -6491,7 +7678,27 @@
                 <a:ea typeface="Arial" pitchFamily="34" charset="-122"/>
                 <a:cs typeface="Arial" pitchFamily="34" charset="-120"/>
               </a:rPr>
-              <a:t> — sunlight through the window, the heat of a friend's hand, the warmth of a tube light.</a:t>
+              <a:t> tejas </a:t>
+            </a:r>
+            <a:pPr algn="l" indent="0" marL="0">
+              <a:lnSpc>
+                <a:spcPts val="1620"/>
+              </a:lnSpc>
+              <a:spcAft>
+                <a:spcPts val="300"/>
+              </a:spcAft>
+              <a:buNone/>
+            </a:pPr>
+            <a:r>
+              <a:rPr lang="en-US" sz="1200" i="1" dirty="0">
+                <a:solidFill>
+                  <a:srgbClr val="1C2833"/>
+                </a:solidFill>
+                <a:latin typeface="Arial" pitchFamily="34" charset="0"/>
+                <a:ea typeface="Arial" pitchFamily="34" charset="-122"/>
+                <a:cs typeface="Arial" pitchFamily="34" charset="-120"/>
+              </a:rPr>
+              <a:t>— TAY-jus — the fire-element. Not just a flame: anything hot, or that gives light, or transforms one thing into another."</a:t>
             </a:r>
             <a:endParaRPr lang="en-US" sz="1200" dirty="0"/>
           </a:p>
@@ -6507,6 +7714,26 @@
               <a:buChar char="•"/>
             </a:pPr>
             <a:r>
+              <a:rPr lang="en-US" sz="1200" dirty="0">
+                <a:solidFill>
+                  <a:srgbClr val="1C2833"/>
+                </a:solidFill>
+                <a:latin typeface="Arial" pitchFamily="34" charset="0"/>
+                <a:ea typeface="Arial" pitchFamily="34" charset="-122"/>
+                <a:cs typeface="Arial" pitchFamily="34" charset="-120"/>
+              </a:rPr>
+              <a:t>Balloon → air. </a:t>
+            </a:r>
+            <a:pPr algn="l" indent="0" marL="0">
+              <a:lnSpc>
+                <a:spcPts val="1620"/>
+              </a:lnSpc>
+              <a:spcAft>
+                <a:spcPts val="300"/>
+              </a:spcAft>
+              <a:buNone/>
+            </a:pPr>
+            <a:r>
               <a:rPr lang="en-US" sz="1200" i="1" dirty="0">
                 <a:solidFill>
                   <a:srgbClr val="1C2833"/>
@@ -6515,7 +7742,7 @@
                 <a:ea typeface="Arial" pitchFamily="34" charset="-122"/>
                 <a:cs typeface="Arial" pitchFamily="34" charset="-120"/>
               </a:rPr>
-              <a:t>vāyu</a:t>
+              <a:t>"Sanskrit:</a:t>
             </a:r>
             <a:pPr algn="l" indent="0" marL="0">
               <a:lnSpc>
@@ -6535,199 +7762,35 @@
                 <a:ea typeface="Arial" pitchFamily="34" charset="-122"/>
                 <a:cs typeface="Arial" pitchFamily="34" charset="-120"/>
               </a:rPr>
-              <a:t> — the breeze from a fan, their own breath.</a:t>
+              <a:t> vāyu </a:t>
+            </a:r>
+            <a:pPr algn="l" indent="0" marL="0">
+              <a:lnSpc>
+                <a:spcPts val="1620"/>
+              </a:lnSpc>
+              <a:spcAft>
+                <a:spcPts val="300"/>
+              </a:spcAft>
+              <a:buNone/>
+            </a:pPr>
+            <a:r>
+              <a:rPr lang="en-US" sz="1200" i="1" dirty="0">
+                <a:solidFill>
+                  <a:srgbClr val="1C2833"/>
+                </a:solidFill>
+                <a:latin typeface="Arial" pitchFamily="34" charset="0"/>
+                <a:ea typeface="Arial" pitchFamily="34" charset="-122"/>
+                <a:cs typeface="Arial" pitchFamily="34" charset="-120"/>
+              </a:rPr>
+              <a:t>— VAH-yu — the air-element. Anything that moves and flows like gas."</a:t>
             </a:r>
             <a:endParaRPr lang="en-US" sz="1200" dirty="0"/>
           </a:p>
-          <a:p>
-            <a:pPr algn="l" marL="342900" indent="-342900">
-              <a:lnSpc>
-                <a:spcPts val="1620"/>
-              </a:lnSpc>
-              <a:spcAft>
-                <a:spcPts val="300"/>
-              </a:spcAft>
-              <a:buSzPct val="100000"/>
-              <a:buChar char="•"/>
-            </a:pPr>
-            <a:r>
-              <a:rPr lang="en-US" sz="1200" i="1" dirty="0">
-                <a:solidFill>
-                  <a:srgbClr val="1C2833"/>
-                </a:solidFill>
-                <a:latin typeface="Arial" pitchFamily="34" charset="0"/>
-                <a:ea typeface="Arial" pitchFamily="34" charset="-122"/>
-                <a:cs typeface="Arial" pitchFamily="34" charset="-120"/>
-              </a:rPr>
-              <a:t>ākāśa</a:t>
-            </a:r>
-            <a:pPr algn="l" indent="0" marL="0">
-              <a:lnSpc>
-                <a:spcPts val="1620"/>
-              </a:lnSpc>
-              <a:spcAft>
-                <a:spcPts val="300"/>
-              </a:spcAft>
-              <a:buNone/>
-            </a:pPr>
-            <a:r>
-              <a:rPr lang="en-US" sz="1200" dirty="0">
-                <a:solidFill>
-                  <a:srgbClr val="1C2833"/>
-                </a:solidFill>
-                <a:latin typeface="Arial" pitchFamily="34" charset="0"/>
-                <a:ea typeface="Arial" pitchFamily="34" charset="-122"/>
-                <a:cs typeface="Arial" pitchFamily="34" charset="-120"/>
-              </a:rPr>
-              <a:t> — the space between two students, the gap above their heads.</a:t>
-            </a:r>
-            <a:endParaRPr lang="en-US" sz="1200" dirty="0"/>
-          </a:p>
         </p:txBody>
       </p:sp>
       <p:sp>
         <p:nvSpPr>
           <p:cNvPr id="6" name="Text 4"/>
-          <p:cNvSpPr/>
-          <p:nvPr/>
-        </p:nvSpPr>
-        <p:spPr>
-          <a:xfrm>
-            <a:off x="406301" y="2945457"/>
-            <a:ext cx="8498026" cy="426541"/>
-          </a:xfrm>
-          <a:prstGeom prst="rect">
-            <a:avLst/>
-          </a:prstGeom>
-          <a:noFill/>
-          <a:ln/>
-        </p:spPr>
-        <p:txBody>
-          <a:bodyPr wrap="square" lIns="0" tIns="0" rIns="0" bIns="0" rtlCol="0" anchor="t"/>
-          <a:lstStyle/>
-          <a:p>
-            <a:pPr algn="l" indent="0" marL="0">
-              <a:lnSpc>
-                <a:spcPts val="1680"/>
-              </a:lnSpc>
-              <a:spcBef>
-                <a:spcPts val="300"/>
-              </a:spcBef>
-              <a:spcAft>
-                <a:spcPts val="300"/>
-              </a:spcAft>
-              <a:buNone/>
-            </a:pPr>
-            <a:r>
-              <a:rPr lang="en-US" sz="1200" dirty="0">
-                <a:solidFill>
-                  <a:srgbClr val="1C2833"/>
-                </a:solidFill>
-                <a:latin typeface="Arial" pitchFamily="34" charset="0"/>
-                <a:ea typeface="Arial" pitchFamily="34" charset="-122"/>
-                <a:cs typeface="Arial" pitchFamily="34" charset="-120"/>
-              </a:rPr>
-              <a:t>Walk around. If a student writes "the chair" under </a:t>
-            </a:r>
-            <a:pPr algn="l" indent="0" marL="0">
-              <a:lnSpc>
-                <a:spcPts val="1680"/>
-              </a:lnSpc>
-              <a:spcBef>
-                <a:spcPts val="300"/>
-              </a:spcBef>
-              <a:spcAft>
-                <a:spcPts val="300"/>
-              </a:spcAft>
-              <a:buNone/>
-            </a:pPr>
-            <a:r>
-              <a:rPr lang="en-US" sz="1200" i="1" dirty="0">
-                <a:solidFill>
-                  <a:srgbClr val="1C2833"/>
-                </a:solidFill>
-                <a:latin typeface="Arial" pitchFamily="34" charset="0"/>
-                <a:ea typeface="Arial" pitchFamily="34" charset="-122"/>
-                <a:cs typeface="Arial" pitchFamily="34" charset="-120"/>
-              </a:rPr>
-              <a:t>pṛthvī</a:t>
-            </a:r>
-            <a:pPr algn="l" indent="0" marL="0">
-              <a:lnSpc>
-                <a:spcPts val="1680"/>
-              </a:lnSpc>
-              <a:spcBef>
-                <a:spcPts val="300"/>
-              </a:spcBef>
-              <a:spcAft>
-                <a:spcPts val="300"/>
-              </a:spcAft>
-              <a:buNone/>
-            </a:pPr>
-            <a:r>
-              <a:rPr lang="en-US" sz="1200" dirty="0">
-                <a:solidFill>
-                  <a:srgbClr val="1C2833"/>
-                </a:solidFill>
-                <a:latin typeface="Arial" pitchFamily="34" charset="0"/>
-                <a:ea typeface="Arial" pitchFamily="34" charset="-122"/>
-                <a:cs typeface="Arial" pitchFamily="34" charset="-120"/>
-              </a:rPr>
-              <a:t>, that's correct. If they write "a chair" under </a:t>
-            </a:r>
-            <a:pPr algn="l" indent="0" marL="0">
-              <a:lnSpc>
-                <a:spcPts val="1680"/>
-              </a:lnSpc>
-              <a:spcBef>
-                <a:spcPts val="300"/>
-              </a:spcBef>
-              <a:spcAft>
-                <a:spcPts val="300"/>
-              </a:spcAft>
-              <a:buNone/>
-            </a:pPr>
-            <a:r>
-              <a:rPr lang="en-US" sz="1200" i="1" dirty="0">
-                <a:solidFill>
-                  <a:srgbClr val="1C2833"/>
-                </a:solidFill>
-                <a:latin typeface="Arial" pitchFamily="34" charset="0"/>
-                <a:ea typeface="Arial" pitchFamily="34" charset="-122"/>
-                <a:cs typeface="Arial" pitchFamily="34" charset="-120"/>
-              </a:rPr>
-              <a:t>ākāśa</a:t>
-            </a:r>
-            <a:pPr algn="l" indent="0" marL="0">
-              <a:lnSpc>
-                <a:spcPts val="1680"/>
-              </a:lnSpc>
-              <a:spcBef>
-                <a:spcPts val="300"/>
-              </a:spcBef>
-              <a:spcAft>
-                <a:spcPts val="300"/>
-              </a:spcAft>
-              <a:buNone/>
-            </a:pPr>
-            <a:r>
-              <a:rPr lang="en-US" sz="1200" dirty="0">
-                <a:solidFill>
-                  <a:srgbClr val="1C2833"/>
-                </a:solidFill>
-                <a:latin typeface="Arial" pitchFamily="34" charset="0"/>
-                <a:ea typeface="Arial" pitchFamily="34" charset="-122"/>
-                <a:cs typeface="Arial" pitchFamily="34" charset="-120"/>
-              </a:rPr>
-              <a:t> and explain it's the empty seat space, that's also correct — and worth celebrating.</a:t>
-            </a:r>
-            <a:endParaRPr lang="en-US" sz="1200" dirty="0"/>
-          </a:p>
-        </p:txBody>
-      </p:sp>
-      <p:sp>
-        <p:nvSpPr>
-          <p:cNvPr id="7" name="Text 5"/>
           <p:cNvSpPr/>
           <p:nvPr/>
         </p:nvSpPr>
@@ -6877,7 +7940,7 @@
                 <a:ea typeface="Georgia" pitchFamily="34" charset="-122"/>
                 <a:cs typeface="Georgia" pitchFamily="34" charset="-120"/>
               </a:rPr>
-              <a:t>Wrap-up (5 min)</a:t>
+              <a:t>Core (20 min) (cont.)</a:t>
             </a:r>
             <a:endParaRPr lang="en-US" sz="1800" dirty="0"/>
           </a:p>
@@ -6891,8 +7954,8 @@
         </p:nvSpPr>
         <p:spPr>
           <a:xfrm>
-            <a:off x="406301" y="870942"/>
-            <a:ext cx="8498026" cy="639812"/>
+            <a:off x="634901" y="883593"/>
+            <a:ext cx="8102798" cy="487561"/>
           </a:xfrm>
           <a:prstGeom prst="rect">
             <a:avLst/>
@@ -6904,9 +7967,294 @@
           <a:bodyPr wrap="square" lIns="0" tIns="0" rIns="0" bIns="0" rtlCol="0" anchor="t"/>
           <a:lstStyle/>
           <a:p>
-            <a:pPr algn="l" indent="0" marL="0">
-              <a:lnSpc>
-                <a:spcPts val="1680"/>
+            <a:pPr algn="l" marL="342900" indent="-342900">
+              <a:lnSpc>
+                <a:spcPts val="1620"/>
+              </a:lnSpc>
+              <a:spcAft>
+                <a:spcPts val="300"/>
+              </a:spcAft>
+              <a:buSzPct val="100000"/>
+              <a:buChar char="•"/>
+            </a:pPr>
+            <a:r>
+              <a:rPr lang="en-US" sz="1200" dirty="0">
+                <a:solidFill>
+                  <a:srgbClr val="1C2833"/>
+                </a:solidFill>
+                <a:latin typeface="Arial" pitchFamily="34" charset="0"/>
+                <a:ea typeface="Arial" pitchFamily="34" charset="-122"/>
+                <a:cs typeface="Arial" pitchFamily="34" charset="-120"/>
+              </a:rPr>
+              <a:t>Empty box → space. </a:t>
+            </a:r>
+            <a:pPr algn="l" indent="0" marL="0">
+              <a:lnSpc>
+                <a:spcPts val="1620"/>
+              </a:lnSpc>
+              <a:spcAft>
+                <a:spcPts val="300"/>
+              </a:spcAft>
+              <a:buNone/>
+            </a:pPr>
+            <a:r>
+              <a:rPr lang="en-US" sz="1200" i="1" dirty="0">
+                <a:solidFill>
+                  <a:srgbClr val="1C2833"/>
+                </a:solidFill>
+                <a:latin typeface="Arial" pitchFamily="34" charset="0"/>
+                <a:ea typeface="Arial" pitchFamily="34" charset="-122"/>
+                <a:cs typeface="Arial" pitchFamily="34" charset="-120"/>
+              </a:rPr>
+              <a:t>"And finally — the</a:t>
+            </a:r>
+            <a:pPr algn="l" indent="0" marL="0">
+              <a:lnSpc>
+                <a:spcPts val="1620"/>
+              </a:lnSpc>
+              <a:spcAft>
+                <a:spcPts val="300"/>
+              </a:spcAft>
+              <a:buNone/>
+            </a:pPr>
+            <a:r>
+              <a:rPr lang="en-US" sz="1200" dirty="0">
+                <a:solidFill>
+                  <a:srgbClr val="1C2833"/>
+                </a:solidFill>
+                <a:latin typeface="Arial" pitchFamily="34" charset="0"/>
+                <a:ea typeface="Arial" pitchFamily="34" charset="-122"/>
+                <a:cs typeface="Arial" pitchFamily="34" charset="-120"/>
+              </a:rPr>
+              <a:t>box</a:t>
+            </a:r>
+            <a:pPr algn="l" indent="0" marL="0">
+              <a:lnSpc>
+                <a:spcPts val="1620"/>
+              </a:lnSpc>
+              <a:spcAft>
+                <a:spcPts val="300"/>
+              </a:spcAft>
+              <a:buNone/>
+            </a:pPr>
+            <a:r>
+              <a:rPr lang="en-US" sz="1200" i="1" dirty="0">
+                <a:solidFill>
+                  <a:srgbClr val="1C2833"/>
+                </a:solidFill>
+                <a:latin typeface="Arial" pitchFamily="34" charset="0"/>
+                <a:ea typeface="Arial" pitchFamily="34" charset="-122"/>
+                <a:cs typeface="Arial" pitchFamily="34" charset="-120"/>
+              </a:rPr>
+              <a:t> is made of cardboard, but what about what's</a:t>
+            </a:r>
+            <a:pPr algn="l" indent="0" marL="0">
+              <a:lnSpc>
+                <a:spcPts val="1620"/>
+              </a:lnSpc>
+              <a:spcAft>
+                <a:spcPts val="300"/>
+              </a:spcAft>
+              <a:buNone/>
+            </a:pPr>
+            <a:r>
+              <a:rPr lang="en-US" sz="1200" dirty="0">
+                <a:solidFill>
+                  <a:srgbClr val="1C2833"/>
+                </a:solidFill>
+                <a:latin typeface="Arial" pitchFamily="34" charset="0"/>
+                <a:ea typeface="Arial" pitchFamily="34" charset="-122"/>
+                <a:cs typeface="Arial" pitchFamily="34" charset="-120"/>
+              </a:rPr>
+              <a:t>inside</a:t>
+            </a:r>
+            <a:pPr algn="l" indent="0" marL="0">
+              <a:lnSpc>
+                <a:spcPts val="1620"/>
+              </a:lnSpc>
+              <a:spcAft>
+                <a:spcPts val="300"/>
+              </a:spcAft>
+              <a:buNone/>
+            </a:pPr>
+            <a:r>
+              <a:rPr lang="en-US" sz="1200" i="1" dirty="0">
+                <a:solidFill>
+                  <a:srgbClr val="1C2833"/>
+                </a:solidFill>
+                <a:latin typeface="Arial" pitchFamily="34" charset="0"/>
+                <a:ea typeface="Arial" pitchFamily="34" charset="-122"/>
+                <a:cs typeface="Arial" pitchFamily="34" charset="-120"/>
+              </a:rPr>
+              <a:t> the box? The room you have? That's</a:t>
+            </a:r>
+            <a:pPr algn="l" indent="0" marL="0">
+              <a:lnSpc>
+                <a:spcPts val="1620"/>
+              </a:lnSpc>
+              <a:spcAft>
+                <a:spcPts val="300"/>
+              </a:spcAft>
+              <a:buNone/>
+            </a:pPr>
+            <a:r>
+              <a:rPr lang="en-US" sz="1200" dirty="0">
+                <a:solidFill>
+                  <a:srgbClr val="1C2833"/>
+                </a:solidFill>
+                <a:latin typeface="Arial" pitchFamily="34" charset="0"/>
+                <a:ea typeface="Arial" pitchFamily="34" charset="-122"/>
+                <a:cs typeface="Arial" pitchFamily="34" charset="-120"/>
+              </a:rPr>
+              <a:t> ākāśa </a:t>
+            </a:r>
+            <a:pPr algn="l" indent="0" marL="0">
+              <a:lnSpc>
+                <a:spcPts val="1620"/>
+              </a:lnSpc>
+              <a:spcAft>
+                <a:spcPts val="300"/>
+              </a:spcAft>
+              <a:buNone/>
+            </a:pPr>
+            <a:r>
+              <a:rPr lang="en-US" sz="1200" i="1" dirty="0">
+                <a:solidFill>
+                  <a:srgbClr val="1C2833"/>
+                </a:solidFill>
+                <a:latin typeface="Arial" pitchFamily="34" charset="0"/>
+                <a:ea typeface="Arial" pitchFamily="34" charset="-122"/>
+                <a:cs typeface="Arial" pitchFamily="34" charset="-120"/>
+              </a:rPr>
+              <a:t>— AH-KAH-sha — the space-element."</a:t>
+            </a:r>
+            <a:endParaRPr lang="en-US" sz="1200" dirty="0"/>
+          </a:p>
+        </p:txBody>
+      </p:sp>
+      <p:sp>
+        <p:nvSpPr>
+          <p:cNvPr id="5" name="Text 3"/>
+          <p:cNvSpPr/>
+          <p:nvPr/>
+        </p:nvSpPr>
+        <p:spPr>
+          <a:xfrm>
+            <a:off x="634901" y="1472654"/>
+            <a:ext cx="8102798" cy="281880"/>
+          </a:xfrm>
+          <a:prstGeom prst="rect">
+            <a:avLst/>
+          </a:prstGeom>
+          <a:noFill/>
+          <a:ln/>
+        </p:spPr>
+        <p:txBody>
+          <a:bodyPr wrap="square" lIns="0" tIns="0" rIns="0" bIns="0" rtlCol="0" anchor="t"/>
+          <a:lstStyle/>
+          <a:p>
+            <a:pPr algn="l" marL="342900" indent="-342900">
+              <a:lnSpc>
+                <a:spcPts val="1620"/>
+              </a:lnSpc>
+              <a:spcAft>
+                <a:spcPts val="300"/>
+              </a:spcAft>
+              <a:buSzPct val="100000"/>
+              <a:buChar char="•"/>
+            </a:pPr>
+            <a:r>
+              <a:rPr lang="en-US" sz="1200" b="1" dirty="0">
+                <a:solidFill>
+                  <a:srgbClr val="1C2833"/>
+                </a:solidFill>
+                <a:latin typeface="Arial" pitchFamily="34" charset="0"/>
+                <a:ea typeface="Arial" pitchFamily="34" charset="-122"/>
+                <a:cs typeface="Arial" pitchFamily="34" charset="-120"/>
+              </a:rPr>
+              <a:t>Key idea on the board:</a:t>
+            </a:r>
+            <a:endParaRPr lang="en-US" sz="1200" dirty="0"/>
+          </a:p>
+        </p:txBody>
+      </p:sp>
+      <p:sp>
+        <p:nvSpPr>
+          <p:cNvPr id="6" name="Text 4"/>
+          <p:cNvSpPr/>
+          <p:nvPr/>
+        </p:nvSpPr>
+        <p:spPr>
+          <a:xfrm>
+            <a:off x="406301" y="1856036"/>
+            <a:ext cx="8331398" cy="842963"/>
+          </a:xfrm>
+          <a:prstGeom prst="rect">
+            <a:avLst/>
+          </a:prstGeom>
+          <a:solidFill>
+            <a:srgbClr val="F4F8F9"/>
+          </a:solidFill>
+          <a:ln/>
+        </p:spPr>
+        <p:txBody>
+          <a:bodyPr wrap="square" rtlCol="0" anchor="ctr"/>
+          <a:lstStyle/>
+          <a:p>
+            <a:pPr indent="0" marL="0">
+              <a:buNone/>
+            </a:pPr>
+            <a:endParaRPr lang="en-US" dirty="0"/>
+          </a:p>
+        </p:txBody>
+      </p:sp>
+      <p:sp>
+        <p:nvSpPr>
+          <p:cNvPr id="7" name="Shape 5"/>
+          <p:cNvSpPr/>
+          <p:nvPr/>
+        </p:nvSpPr>
+        <p:spPr>
+          <a:xfrm>
+            <a:off x="434876" y="1856036"/>
+            <a:ext cx="0" cy="842963"/>
+          </a:xfrm>
+          <a:prstGeom prst="line">
+            <a:avLst/>
+          </a:prstGeom>
+          <a:noFill/>
+          <a:ln w="57150">
+            <a:solidFill>
+              <a:srgbClr val="FE4447"/>
+            </a:solidFill>
+            <a:prstDash val="solid"/>
+          </a:ln>
+        </p:spPr>
+      </p:sp>
+      <p:sp>
+        <p:nvSpPr>
+          <p:cNvPr id="8" name="Text 6"/>
+          <p:cNvSpPr/>
+          <p:nvPr/>
+        </p:nvSpPr>
+        <p:spPr>
+          <a:xfrm>
+            <a:off x="692051" y="2046536"/>
+            <a:ext cx="7973389" cy="461963"/>
+          </a:xfrm>
+          <a:prstGeom prst="rect">
+            <a:avLst/>
+          </a:prstGeom>
+          <a:noFill/>
+          <a:ln/>
+        </p:spPr>
+        <p:txBody>
+          <a:bodyPr wrap="square" lIns="0" tIns="0" rIns="0" bIns="0" rtlCol="0" anchor="t"/>
+          <a:lstStyle/>
+          <a:p>
+            <a:pPr algn="l" indent="0" marL="0">
+              <a:lnSpc>
+                <a:spcPts val="1820"/>
               </a:lnSpc>
               <a:spcBef>
                 <a:spcPts val="300"/>
@@ -6917,19 +8265,19 @@
               <a:buNone/>
             </a:pPr>
             <a:r>
-              <a:rPr lang="en-US" sz="1200" dirty="0">
-                <a:solidFill>
-                  <a:srgbClr val="1C2833"/>
-                </a:solidFill>
-                <a:latin typeface="Arial" pitchFamily="34" charset="0"/>
-                <a:ea typeface="Arial" pitchFamily="34" charset="-122"/>
-                <a:cs typeface="Arial" pitchFamily="34" charset="-120"/>
-              </a:rPr>
-              <a:t>– Exit ticket (oral, going around the room): each student names ONE element and their own example. Anything that hasn't been said yet earns a small cheer. – Preview: "Tomorrow we'll see how the tradition says these five elements </a:t>
-            </a:r>
-            <a:pPr algn="l" indent="0" marL="0">
-              <a:lnSpc>
-                <a:spcPts val="1680"/>
+              <a:rPr lang="en-US" sz="1300" dirty="0">
+                <a:solidFill>
+                  <a:srgbClr val="1C2833"/>
+                </a:solidFill>
+                <a:latin typeface="Georgia" pitchFamily="34" charset="0"/>
+                <a:ea typeface="Georgia" pitchFamily="34" charset="-122"/>
+                <a:cs typeface="Georgia" pitchFamily="34" charset="-120"/>
+              </a:rPr>
+              <a:t>Around 1500 BCE, thinkers in the Indian subcontinent organised everything they could see into </a:t>
+            </a:r>
+            <a:pPr algn="l" indent="0" marL="0">
+              <a:lnSpc>
+                <a:spcPts val="1820"/>
               </a:lnSpc>
               <a:spcBef>
                 <a:spcPts val="300"/>
@@ -6940,19 +8288,19 @@
               <a:buNone/>
             </a:pPr>
             <a:r>
-              <a:rPr lang="en-US" sz="1200" i="1" dirty="0">
-                <a:solidFill>
-                  <a:srgbClr val="1C2833"/>
-                </a:solidFill>
-                <a:latin typeface="Arial" pitchFamily="34" charset="0"/>
-                <a:ea typeface="Arial" pitchFamily="34" charset="-122"/>
-                <a:cs typeface="Arial" pitchFamily="34" charset="-120"/>
-              </a:rPr>
-              <a:t>came to be</a:t>
-            </a:r>
-            <a:pPr algn="l" indent="0" marL="0">
-              <a:lnSpc>
-                <a:spcPts val="1680"/>
+              <a:rPr lang="en-US" sz="1300" b="1" i="1" dirty="0">
+                <a:solidFill>
+                  <a:srgbClr val="1C2833"/>
+                </a:solidFill>
+                <a:latin typeface="Georgia" pitchFamily="34" charset="0"/>
+                <a:ea typeface="Georgia" pitchFamily="34" charset="-122"/>
+                <a:cs typeface="Georgia" pitchFamily="34" charset="-120"/>
+              </a:rPr>
+              <a:t>five categories</a:t>
+            </a:r>
+            <a:pPr algn="l" indent="0" marL="0">
+              <a:lnSpc>
+                <a:spcPts val="1820"/>
               </a:lnSpc>
               <a:spcBef>
                 <a:spcPts val="300"/>
@@ -6963,23 +8311,115 @@
               <a:buNone/>
             </a:pPr>
             <a:r>
-              <a:rPr lang="en-US" sz="1200" dirty="0">
-                <a:solidFill>
-                  <a:srgbClr val="1C2833"/>
-                </a:solidFill>
-                <a:latin typeface="Arial" pitchFamily="34" charset="0"/>
-                <a:ea typeface="Arial" pitchFamily="34" charset="-122"/>
-                <a:cs typeface="Arial" pitchFamily="34" charset="-120"/>
-              </a:rPr>
-              <a:t> — one after another, in a specific order."</a:t>
-            </a:r>
-            <a:endParaRPr lang="en-US" sz="1200" dirty="0"/>
-          </a:p>
-        </p:txBody>
-      </p:sp>
-      <p:sp>
-        <p:nvSpPr>
-          <p:cNvPr id="5" name="Text 3"/>
+              <a:rPr lang="en-US" sz="1300" dirty="0">
+                <a:solidFill>
+                  <a:srgbClr val="1C2833"/>
+                </a:solidFill>
+                <a:latin typeface="Georgia" pitchFamily="34" charset="0"/>
+                <a:ea typeface="Georgia" pitchFamily="34" charset="-122"/>
+                <a:cs typeface="Georgia" pitchFamily="34" charset="-120"/>
+              </a:rPr>
+              <a:t>. They called them the </a:t>
+            </a:r>
+            <a:pPr algn="l" indent="0" marL="0">
+              <a:lnSpc>
+                <a:spcPts val="1820"/>
+              </a:lnSpc>
+              <a:spcBef>
+                <a:spcPts val="300"/>
+              </a:spcBef>
+              <a:spcAft>
+                <a:spcPts val="300"/>
+              </a:spcAft>
+              <a:buNone/>
+            </a:pPr>
+            <a:r>
+              <a:rPr lang="en-US" sz="1300" i="1" dirty="0">
+                <a:solidFill>
+                  <a:srgbClr val="1C2833"/>
+                </a:solidFill>
+                <a:latin typeface="Georgia" pitchFamily="34" charset="0"/>
+                <a:ea typeface="Georgia" pitchFamily="34" charset="-122"/>
+                <a:cs typeface="Georgia" pitchFamily="34" charset="-120"/>
+              </a:rPr>
+              <a:t>pañca-mahābhūta</a:t>
+            </a:r>
+            <a:pPr algn="l" indent="0" marL="0">
+              <a:lnSpc>
+                <a:spcPts val="1820"/>
+              </a:lnSpc>
+              <a:spcBef>
+                <a:spcPts val="300"/>
+              </a:spcBef>
+              <a:spcAft>
+                <a:spcPts val="300"/>
+              </a:spcAft>
+              <a:buNone/>
+            </a:pPr>
+            <a:r>
+              <a:rPr lang="en-US" sz="1300" dirty="0">
+                <a:solidFill>
+                  <a:srgbClr val="1C2833"/>
+                </a:solidFill>
+                <a:latin typeface="Georgia" pitchFamily="34" charset="0"/>
+                <a:ea typeface="Georgia" pitchFamily="34" charset="-122"/>
+                <a:cs typeface="Georgia" pitchFamily="34" charset="-120"/>
+              </a:rPr>
+              <a:t> — the </a:t>
+            </a:r>
+            <a:pPr algn="l" indent="0" marL="0">
+              <a:lnSpc>
+                <a:spcPts val="1820"/>
+              </a:lnSpc>
+              <a:spcBef>
+                <a:spcPts val="300"/>
+              </a:spcBef>
+              <a:spcAft>
+                <a:spcPts val="300"/>
+              </a:spcAft>
+              <a:buNone/>
+            </a:pPr>
+            <a:r>
+              <a:rPr lang="en-US" sz="1300" b="1" i="1" dirty="0">
+                <a:solidFill>
+                  <a:srgbClr val="1C2833"/>
+                </a:solidFill>
+                <a:latin typeface="Georgia" pitchFamily="34" charset="0"/>
+                <a:ea typeface="Georgia" pitchFamily="34" charset="-122"/>
+                <a:cs typeface="Georgia" pitchFamily="34" charset="-120"/>
+              </a:rPr>
+              <a:t>five great elements</a:t>
+            </a:r>
+            <a:pPr algn="l" indent="0" marL="0">
+              <a:lnSpc>
+                <a:spcPts val="1820"/>
+              </a:lnSpc>
+              <a:spcBef>
+                <a:spcPts val="300"/>
+              </a:spcBef>
+              <a:spcAft>
+                <a:spcPts val="300"/>
+              </a:spcAft>
+              <a:buNone/>
+            </a:pPr>
+            <a:r>
+              <a:rPr lang="en-US" sz="1300" dirty="0">
+                <a:solidFill>
+                  <a:srgbClr val="1C2833"/>
+                </a:solidFill>
+                <a:latin typeface="Georgia" pitchFamily="34" charset="0"/>
+                <a:ea typeface="Georgia" pitchFamily="34" charset="-122"/>
+                <a:cs typeface="Georgia" pitchFamily="34" charset="-120"/>
+              </a:rPr>
+              <a:t>.</a:t>
+            </a:r>
+            <a:endParaRPr lang="en-US" sz="1300" dirty="0"/>
+          </a:p>
+        </p:txBody>
+      </p:sp>
+      <p:sp>
+        <p:nvSpPr>
+          <p:cNvPr id="9" name="Text 7"/>
           <p:cNvSpPr/>
           <p:nvPr/>
         </p:nvSpPr>
@@ -7129,7 +8569,7 @@
                 <a:ea typeface="Georgia" pitchFamily="34" charset="-122"/>
                 <a:cs typeface="Georgia" pitchFamily="34" charset="-120"/>
               </a:rPr>
-              <a:t>Student-facing content</a:t>
+              <a:t>Core (20 min) (cont.)</a:t>
             </a:r>
             <a:endParaRPr lang="en-US" sz="1800" dirty="0"/>
           </a:p>
@@ -7143,8 +8583,54 @@
         </p:nvSpPr>
         <p:spPr>
           <a:xfrm>
-            <a:off x="406301" y="883593"/>
-            <a:ext cx="8331398" cy="2343150"/>
+            <a:off x="634901" y="883593"/>
+            <a:ext cx="8102798" cy="281880"/>
+          </a:xfrm>
+          <a:prstGeom prst="rect">
+            <a:avLst/>
+          </a:prstGeom>
+          <a:noFill/>
+          <a:ln/>
+        </p:spPr>
+        <p:txBody>
+          <a:bodyPr wrap="square" lIns="0" tIns="0" rIns="0" bIns="0" rtlCol="0" anchor="t"/>
+          <a:lstStyle/>
+          <a:p>
+            <a:pPr algn="l" marL="342900" indent="-342900">
+              <a:lnSpc>
+                <a:spcPts val="1620"/>
+              </a:lnSpc>
+              <a:spcAft>
+                <a:spcPts val="300"/>
+              </a:spcAft>
+              <a:buSzPct val="100000"/>
+              <a:buChar char="•"/>
+            </a:pPr>
+            <a:r>
+              <a:rPr lang="en-US" sz="1200" dirty="0">
+                <a:solidFill>
+                  <a:srgbClr val="1C2833"/>
+                </a:solidFill>
+                <a:latin typeface="Arial" pitchFamily="34" charset="0"/>
+                <a:ea typeface="Arial" pitchFamily="34" charset="-122"/>
+                <a:cs typeface="Arial" pitchFamily="34" charset="-120"/>
+              </a:rPr>
+              <a:t>Show the source: read aloud the SB 2.10.3 paraphrase from the cache file:</a:t>
+            </a:r>
+            <a:endParaRPr lang="en-US" sz="1200" dirty="0"/>
+          </a:p>
+        </p:txBody>
+      </p:sp>
+      <p:sp>
+        <p:nvSpPr>
+          <p:cNvPr id="5" name="Text 3"/>
+          <p:cNvSpPr/>
+          <p:nvPr/>
+        </p:nvSpPr>
+        <p:spPr>
+          <a:xfrm>
+            <a:off x="406301" y="1266974"/>
+            <a:ext cx="8331398" cy="611981"/>
           </a:xfrm>
           <a:prstGeom prst="rect">
             <a:avLst/>
@@ -7167,14 +8653,14 @@
       </p:sp>
       <p:sp>
         <p:nvSpPr>
-          <p:cNvPr id="5" name="Shape 3"/>
+          <p:cNvPr id="6" name="Shape 4"/>
           <p:cNvSpPr/>
           <p:nvPr/>
         </p:nvSpPr>
         <p:spPr>
           <a:xfrm>
-            <a:off x="434876" y="883593"/>
-            <a:ext cx="0" cy="2343150"/>
+            <a:off x="434876" y="1266974"/>
+            <a:ext cx="0" cy="611981"/>
           </a:xfrm>
           <a:prstGeom prst="line">
             <a:avLst/>
@@ -7190,13 +8676,13 @@
       </p:sp>
       <p:sp>
         <p:nvSpPr>
-          <p:cNvPr id="6" name="Text 4"/>
+          <p:cNvPr id="7" name="Text 5"/>
           <p:cNvSpPr/>
           <p:nvPr/>
         </p:nvSpPr>
         <p:spPr>
           <a:xfrm>
-            <a:off x="692051" y="1074093"/>
+            <a:off x="692051" y="1457474"/>
             <a:ext cx="7973389" cy="230981"/>
           </a:xfrm>
           <a:prstGeom prst="rect">
@@ -7222,7 +8708,7 @@
               <a:buNone/>
             </a:pPr>
             <a:r>
-              <a:rPr lang="en-US" sz="1300" b="1" i="1" dirty="0">
+              <a:rPr lang="en-US" sz="1300" i="1" dirty="0">
                 <a:solidFill>
                   <a:srgbClr val="1C2833"/>
                 </a:solidFill>
@@ -7230,7 +8716,30 @@
                 <a:ea typeface="Georgia" pitchFamily="34" charset="-122"/>
                 <a:cs typeface="Georgia" pitchFamily="34" charset="-120"/>
               </a:rPr>
-              <a:t>Today we learned: The Five Great Elements</a:t>
+              <a:t>"... bhūta — the five gross elements (the sky, air, fire, water, earth) ..."</a:t>
+            </a:r>
+            <a:pPr algn="l" indent="0" marL="0">
+              <a:lnSpc>
+                <a:spcPts val="1820"/>
+              </a:lnSpc>
+              <a:spcBef>
+                <a:spcPts val="300"/>
+              </a:spcBef>
+              <a:spcAft>
+                <a:spcPts val="300"/>
+              </a:spcAft>
+              <a:buNone/>
+            </a:pPr>
+            <a:r>
+              <a:rPr lang="en-US" sz="1300" dirty="0">
+                <a:solidFill>
+                  <a:srgbClr val="1C2833"/>
+                </a:solidFill>
+                <a:latin typeface="Georgia" pitchFamily="34" charset="0"/>
+                <a:ea typeface="Georgia" pitchFamily="34" charset="-122"/>
+                <a:cs typeface="Georgia" pitchFamily="34" charset="-120"/>
+              </a:rPr>
+              <a:t> — Śrīmad-Bhāgavatam 2.10.3</a:t>
             </a:r>
             <a:endParaRPr lang="en-US" sz="1300" dirty="0"/>
           </a:p>
@@ -7238,14 +8747,14 @@
       </p:sp>
       <p:sp>
         <p:nvSpPr>
-          <p:cNvPr id="7" name="Text 5"/>
+          <p:cNvPr id="8" name="Text 6"/>
           <p:cNvSpPr/>
           <p:nvPr/>
         </p:nvSpPr>
         <p:spPr>
           <a:xfrm>
-            <a:off x="692051" y="1343174"/>
-            <a:ext cx="7973389" cy="461963"/>
+            <a:off x="406301" y="1967805"/>
+            <a:ext cx="8498026" cy="213271"/>
           </a:xfrm>
           <a:prstGeom prst="rect">
             <a:avLst/>
@@ -7259,7 +8768,7 @@
           <a:p>
             <a:pPr algn="l" indent="0" marL="0">
               <a:lnSpc>
-                <a:spcPts val="1820"/>
+                <a:spcPts val="1680"/>
               </a:lnSpc>
               <a:spcBef>
                 <a:spcPts val="300"/>
@@ -7270,395 +8779,23 @@
               <a:buNone/>
             </a:pPr>
             <a:r>
-              <a:rPr lang="en-US" sz="1300" dirty="0">
-                <a:solidFill>
-                  <a:srgbClr val="1C2833"/>
-                </a:solidFill>
-                <a:latin typeface="Georgia" pitchFamily="34" charset="0"/>
-                <a:ea typeface="Georgia" pitchFamily="34" charset="-122"/>
-                <a:cs typeface="Georgia" pitchFamily="34" charset="-120"/>
-              </a:rPr>
-              <a:t>The </a:t>
-            </a:r>
-            <a:pPr algn="l" indent="0" marL="0">
-              <a:lnSpc>
-                <a:spcPts val="1820"/>
-              </a:lnSpc>
-              <a:spcBef>
-                <a:spcPts val="300"/>
-              </a:spcBef>
-              <a:spcAft>
-                <a:spcPts val="300"/>
-              </a:spcAft>
-              <a:buNone/>
-            </a:pPr>
-            <a:r>
-              <a:rPr lang="en-US" sz="1300" i="1" dirty="0">
-                <a:solidFill>
-                  <a:srgbClr val="1C2833"/>
-                </a:solidFill>
-                <a:latin typeface="Georgia" pitchFamily="34" charset="0"/>
-                <a:ea typeface="Georgia" pitchFamily="34" charset="-122"/>
-                <a:cs typeface="Georgia" pitchFamily="34" charset="-120"/>
-              </a:rPr>
-              <a:t>pañca-mahābhūta</a:t>
-            </a:r>
-            <a:pPr algn="l" indent="0" marL="0">
-              <a:lnSpc>
-                <a:spcPts val="1820"/>
-              </a:lnSpc>
-              <a:spcBef>
-                <a:spcPts val="300"/>
-              </a:spcBef>
-              <a:spcAft>
-                <a:spcPts val="300"/>
-              </a:spcAft>
-              <a:buNone/>
-            </a:pPr>
-            <a:r>
-              <a:rPr lang="en-US" sz="1300" dirty="0">
-                <a:solidFill>
-                  <a:srgbClr val="1C2833"/>
-                </a:solidFill>
-                <a:latin typeface="Georgia" pitchFamily="34" charset="0"/>
-                <a:ea typeface="Georgia" pitchFamily="34" charset="-122"/>
-                <a:cs typeface="Georgia" pitchFamily="34" charset="-120"/>
-              </a:rPr>
-              <a:t> are the five categories ancient Indian thinkers used to organise everything around us:</a:t>
-            </a:r>
-            <a:endParaRPr lang="en-US" sz="1300" dirty="0"/>
-          </a:p>
-        </p:txBody>
-      </p:sp>
-      <p:sp>
-        <p:nvSpPr>
-          <p:cNvPr id="8" name="Text 6"/>
-          <p:cNvSpPr/>
-          <p:nvPr/>
-        </p:nvSpPr>
-        <p:spPr>
-          <a:xfrm>
-            <a:off x="692051" y="1843236"/>
-            <a:ext cx="7973389" cy="923925"/>
-          </a:xfrm>
-          <a:prstGeom prst="rect">
-            <a:avLst/>
-          </a:prstGeom>
-          <a:noFill/>
-          <a:ln/>
-        </p:spPr>
-        <p:txBody>
-          <a:bodyPr wrap="square" lIns="0" tIns="0" rIns="0" bIns="0" rtlCol="0" anchor="t"/>
-          <a:lstStyle/>
-          <a:p>
-            <a:pPr algn="l" indent="0" marL="0">
-              <a:lnSpc>
-                <a:spcPts val="1820"/>
-              </a:lnSpc>
-              <a:spcBef>
-                <a:spcPts val="300"/>
-              </a:spcBef>
-              <a:spcAft>
-                <a:spcPts val="300"/>
-              </a:spcAft>
-              <a:buNone/>
-            </a:pPr>
-            <a:r>
-              <a:rPr lang="en-US" sz="1300" dirty="0">
-                <a:solidFill>
-                  <a:srgbClr val="1C2833"/>
-                </a:solidFill>
-                <a:latin typeface="Georgia" pitchFamily="34" charset="0"/>
-                <a:ea typeface="Georgia" pitchFamily="34" charset="-122"/>
-                <a:cs typeface="Georgia" pitchFamily="34" charset="-120"/>
-              </a:rPr>
-              <a:t>| Sanskrit (IAST) | English | One example from your room | |---|---|---| | </a:t>
-            </a:r>
-            <a:pPr algn="l" indent="0" marL="0">
-              <a:lnSpc>
-                <a:spcPts val="1820"/>
-              </a:lnSpc>
-              <a:spcBef>
-                <a:spcPts val="300"/>
-              </a:spcBef>
-              <a:spcAft>
-                <a:spcPts val="300"/>
-              </a:spcAft>
-              <a:buNone/>
-            </a:pPr>
-            <a:r>
-              <a:rPr lang="en-US" sz="1300" i="1" dirty="0">
-                <a:solidFill>
-                  <a:srgbClr val="1C2833"/>
-                </a:solidFill>
-                <a:latin typeface="Georgia" pitchFamily="34" charset="0"/>
-                <a:ea typeface="Georgia" pitchFamily="34" charset="-122"/>
-                <a:cs typeface="Georgia" pitchFamily="34" charset="-120"/>
-              </a:rPr>
-              <a:t>pṛthvī</a:t>
-            </a:r>
-            <a:pPr algn="l" indent="0" marL="0">
-              <a:lnSpc>
-                <a:spcPts val="1820"/>
-              </a:lnSpc>
-              <a:spcBef>
-                <a:spcPts val="300"/>
-              </a:spcBef>
-              <a:spcAft>
-                <a:spcPts val="300"/>
-              </a:spcAft>
-              <a:buNone/>
-            </a:pPr>
-            <a:r>
-              <a:rPr lang="en-US" sz="1300" dirty="0">
-                <a:solidFill>
-                  <a:srgbClr val="1C2833"/>
-                </a:solidFill>
-                <a:latin typeface="Georgia" pitchFamily="34" charset="0"/>
-                <a:ea typeface="Georgia" pitchFamily="34" charset="-122"/>
-                <a:cs typeface="Georgia" pitchFamily="34" charset="-120"/>
-              </a:rPr>
-              <a:t> | Earth / solid stuff | __________________ | | </a:t>
-            </a:r>
-            <a:pPr algn="l" indent="0" marL="0">
-              <a:lnSpc>
-                <a:spcPts val="1820"/>
-              </a:lnSpc>
-              <a:spcBef>
-                <a:spcPts val="300"/>
-              </a:spcBef>
-              <a:spcAft>
-                <a:spcPts val="300"/>
-              </a:spcAft>
-              <a:buNone/>
-            </a:pPr>
-            <a:r>
-              <a:rPr lang="en-US" sz="1300" i="1" dirty="0">
-                <a:solidFill>
-                  <a:srgbClr val="1C2833"/>
-                </a:solidFill>
-                <a:latin typeface="Georgia" pitchFamily="34" charset="0"/>
-                <a:ea typeface="Georgia" pitchFamily="34" charset="-122"/>
-                <a:cs typeface="Georgia" pitchFamily="34" charset="-120"/>
-              </a:rPr>
-              <a:t>ap</a:t>
-            </a:r>
-            <a:pPr algn="l" indent="0" marL="0">
-              <a:lnSpc>
-                <a:spcPts val="1820"/>
-              </a:lnSpc>
-              <a:spcBef>
-                <a:spcPts val="300"/>
-              </a:spcBef>
-              <a:spcAft>
-                <a:spcPts val="300"/>
-              </a:spcAft>
-              <a:buNone/>
-            </a:pPr>
-            <a:r>
-              <a:rPr lang="en-US" sz="1300" dirty="0">
-                <a:solidFill>
-                  <a:srgbClr val="1C2833"/>
-                </a:solidFill>
-                <a:latin typeface="Georgia" pitchFamily="34" charset="0"/>
-                <a:ea typeface="Georgia" pitchFamily="34" charset="-122"/>
-                <a:cs typeface="Georgia" pitchFamily="34" charset="-120"/>
-              </a:rPr>
-              <a:t> | Water / liquid stuff | __________________ | | </a:t>
-            </a:r>
-            <a:pPr algn="l" indent="0" marL="0">
-              <a:lnSpc>
-                <a:spcPts val="1820"/>
-              </a:lnSpc>
-              <a:spcBef>
-                <a:spcPts val="300"/>
-              </a:spcBef>
-              <a:spcAft>
-                <a:spcPts val="300"/>
-              </a:spcAft>
-              <a:buNone/>
-            </a:pPr>
-            <a:r>
-              <a:rPr lang="en-US" sz="1300" i="1" dirty="0">
-                <a:solidFill>
-                  <a:srgbClr val="1C2833"/>
-                </a:solidFill>
-                <a:latin typeface="Georgia" pitchFamily="34" charset="0"/>
-                <a:ea typeface="Georgia" pitchFamily="34" charset="-122"/>
-                <a:cs typeface="Georgia" pitchFamily="34" charset="-120"/>
-              </a:rPr>
-              <a:t>tejas</a:t>
-            </a:r>
-            <a:pPr algn="l" indent="0" marL="0">
-              <a:lnSpc>
-                <a:spcPts val="1820"/>
-              </a:lnSpc>
-              <a:spcBef>
-                <a:spcPts val="300"/>
-              </a:spcBef>
-              <a:spcAft>
-                <a:spcPts val="300"/>
-              </a:spcAft>
-              <a:buNone/>
-            </a:pPr>
-            <a:r>
-              <a:rPr lang="en-US" sz="1300" dirty="0">
-                <a:solidFill>
-                  <a:srgbClr val="1C2833"/>
-                </a:solidFill>
-                <a:latin typeface="Georgia" pitchFamily="34" charset="0"/>
-                <a:ea typeface="Georgia" pitchFamily="34" charset="-122"/>
-                <a:cs typeface="Georgia" pitchFamily="34" charset="-120"/>
-              </a:rPr>
-              <a:t> | Fire / heat / light | __________________ | | </a:t>
-            </a:r>
-            <a:pPr algn="l" indent="0" marL="0">
-              <a:lnSpc>
-                <a:spcPts val="1820"/>
-              </a:lnSpc>
-              <a:spcBef>
-                <a:spcPts val="300"/>
-              </a:spcBef>
-              <a:spcAft>
-                <a:spcPts val="300"/>
-              </a:spcAft>
-              <a:buNone/>
-            </a:pPr>
-            <a:r>
-              <a:rPr lang="en-US" sz="1300" i="1" dirty="0">
-                <a:solidFill>
-                  <a:srgbClr val="1C2833"/>
-                </a:solidFill>
-                <a:latin typeface="Georgia" pitchFamily="34" charset="0"/>
-                <a:ea typeface="Georgia" pitchFamily="34" charset="-122"/>
-                <a:cs typeface="Georgia" pitchFamily="34" charset="-120"/>
-              </a:rPr>
-              <a:t>vāyu</a:t>
-            </a:r>
-            <a:pPr algn="l" indent="0" marL="0">
-              <a:lnSpc>
-                <a:spcPts val="1820"/>
-              </a:lnSpc>
-              <a:spcBef>
-                <a:spcPts val="300"/>
-              </a:spcBef>
-              <a:spcAft>
-                <a:spcPts val="300"/>
-              </a:spcAft>
-              <a:buNone/>
-            </a:pPr>
-            <a:r>
-              <a:rPr lang="en-US" sz="1300" dirty="0">
-                <a:solidFill>
-                  <a:srgbClr val="1C2833"/>
-                </a:solidFill>
-                <a:latin typeface="Georgia" pitchFamily="34" charset="0"/>
-                <a:ea typeface="Georgia" pitchFamily="34" charset="-122"/>
-                <a:cs typeface="Georgia" pitchFamily="34" charset="-120"/>
-              </a:rPr>
-              <a:t> | Air / gas / movement | __________________ | | </a:t>
-            </a:r>
-            <a:pPr algn="l" indent="0" marL="0">
-              <a:lnSpc>
-                <a:spcPts val="1820"/>
-              </a:lnSpc>
-              <a:spcBef>
-                <a:spcPts val="300"/>
-              </a:spcBef>
-              <a:spcAft>
-                <a:spcPts val="300"/>
-              </a:spcAft>
-              <a:buNone/>
-            </a:pPr>
-            <a:r>
-              <a:rPr lang="en-US" sz="1300" i="1" dirty="0">
-                <a:solidFill>
-                  <a:srgbClr val="1C2833"/>
-                </a:solidFill>
-                <a:latin typeface="Georgia" pitchFamily="34" charset="0"/>
-                <a:ea typeface="Georgia" pitchFamily="34" charset="-122"/>
-                <a:cs typeface="Georgia" pitchFamily="34" charset="-120"/>
-              </a:rPr>
-              <a:t>ākāśa</a:t>
-            </a:r>
-            <a:pPr algn="l" indent="0" marL="0">
-              <a:lnSpc>
-                <a:spcPts val="1820"/>
-              </a:lnSpc>
-              <a:spcBef>
-                <a:spcPts val="300"/>
-              </a:spcBef>
-              <a:spcAft>
-                <a:spcPts val="300"/>
-              </a:spcAft>
-              <a:buNone/>
-            </a:pPr>
-            <a:r>
-              <a:rPr lang="en-US" sz="1300" dirty="0">
-                <a:solidFill>
-                  <a:srgbClr val="1C2833"/>
-                </a:solidFill>
-                <a:latin typeface="Georgia" pitchFamily="34" charset="0"/>
-                <a:ea typeface="Georgia" pitchFamily="34" charset="-122"/>
-                <a:cs typeface="Georgia" pitchFamily="34" charset="-120"/>
-              </a:rPr>
-              <a:t> | Space / room | __________________ |</a:t>
-            </a:r>
-            <a:endParaRPr lang="en-US" sz="1300" dirty="0"/>
+              <a:rPr lang="en-US" sz="1200" i="1" dirty="0">
+                <a:solidFill>
+                  <a:srgbClr val="1C2833"/>
+                </a:solidFill>
+                <a:latin typeface="Arial" pitchFamily="34" charset="0"/>
+                <a:ea typeface="Arial" pitchFamily="34" charset="-122"/>
+                <a:cs typeface="Arial" pitchFamily="34" charset="-120"/>
+              </a:rPr>
+              <a:t>(Read for adult ears, not for student memorisation. Just hear it once.)</a:t>
+            </a:r>
+            <a:endParaRPr lang="en-US" sz="1200" dirty="0"/>
           </a:p>
         </p:txBody>
       </p:sp>
       <p:sp>
         <p:nvSpPr>
           <p:cNvPr id="9" name="Text 7"/>
-          <p:cNvSpPr/>
-          <p:nvPr/>
-        </p:nvSpPr>
-        <p:spPr>
-          <a:xfrm>
-            <a:off x="692051" y="2805261"/>
-            <a:ext cx="7973389" cy="230981"/>
-          </a:xfrm>
-          <a:prstGeom prst="rect">
-            <a:avLst/>
-          </a:prstGeom>
-          <a:noFill/>
-          <a:ln/>
-        </p:spPr>
-        <p:txBody>
-          <a:bodyPr wrap="square" lIns="0" tIns="0" rIns="0" bIns="0" rtlCol="0" anchor="t"/>
-          <a:lstStyle/>
-          <a:p>
-            <a:pPr algn="l" indent="0" marL="0">
-              <a:lnSpc>
-                <a:spcPts val="1820"/>
-              </a:lnSpc>
-              <a:spcBef>
-                <a:spcPts val="300"/>
-              </a:spcBef>
-              <a:spcAft>
-                <a:spcPts val="300"/>
-              </a:spcAft>
-              <a:buNone/>
-            </a:pPr>
-            <a:r>
-              <a:rPr lang="en-US" sz="1300" i="1" dirty="0">
-                <a:solidFill>
-                  <a:srgbClr val="1C2833"/>
-                </a:solidFill>
-                <a:latin typeface="Georgia" pitchFamily="34" charset="0"/>
-                <a:ea typeface="Georgia" pitchFamily="34" charset="-122"/>
-                <a:cs typeface="Georgia" pitchFamily="34" charset="-120"/>
-              </a:rPr>
-              <a:t>Fill in the table with your own examples. Keep this in your notebook — we'll add to it through the module.</a:t>
-            </a:r>
-            <a:endParaRPr lang="en-US" sz="1300" dirty="0"/>
-          </a:p>
-        </p:txBody>
-      </p:sp>
-      <p:sp>
-        <p:nvSpPr>
-          <p:cNvPr id="10" name="Text 8"/>
           <p:cNvSpPr/>
           <p:nvPr/>
         </p:nvSpPr>
